--- a/Fase 1/Evidencias Grupales/PerfilMedico_ExposicionFase1.pptx
+++ b/Fase 1/Evidencias Grupales/PerfilMedico_ExposicionFase1.pptx
@@ -21,9 +21,11 @@
     <p:sldId id="269" r:id="rId15"/>
     <p:sldId id="270" r:id="rId16"/>
     <p:sldId id="271" r:id="rId17"/>
+    <p:sldId id="272" r:id="rId18"/>
+    <p:sldId id="273" r:id="rId19"/>
   </p:sldIdLst>
   <p:notesMasterIdLst>
-    <p:notesMasterId r:id="rId18"/>
+    <p:notesMasterId r:id="rId20"/>
   </p:notesMasterIdLst>
   <p:sldSz cx="12192000" cy="6858000"/>
   <p:notesSz cx="6858000" cy="12192000"/>
@@ -1157,6 +1159,182 @@
             <a:fld id="{F7021451-1387-4CA6-816F-3879F97B5CBC}" type="slidenum">
               <a:rPr lang="en-US"/>
               <a:t>16</a:t>
+            </a:fld>
+            <a:endParaRPr lang="en-US"/>
+          </a:p>
+        </p:txBody>
+      </p:sp>
+    </p:spTree>
+    <p:extLst>
+      <p:ext uri="{BB962C8B-B14F-4D97-AF65-F5344CB8AC3E}">
+        <p14:creationId xmlns:p14="http://schemas.microsoft.com/office/powerpoint/2010/main" val="1024086991"/>
+      </p:ext>
+    </p:extLst>
+  </p:cSld>
+  <p:clrMapOvr>
+    <a:masterClrMapping/>
+  </p:clrMapOvr>
+</p:notes>
+</file>
+
+<file path=ppt/notesSlides/notesSlide17.xml><?xml version="1.0" encoding="utf-8"?>
+<p:notes xmlns:a="http://schemas.openxmlformats.org/drawingml/2006/main" xmlns:r="http://schemas.openxmlformats.org/officeDocument/2006/relationships" xmlns:p="http://schemas.openxmlformats.org/presentationml/2006/main">
+  <p:cSld>
+    <p:spTree>
+      <p:nvGrpSpPr>
+        <p:cNvPr id="1" name=""/>
+        <p:cNvGrpSpPr/>
+        <p:nvPr/>
+      </p:nvGrpSpPr>
+      <p:grpSpPr>
+        <a:xfrm>
+          <a:off x="0" y="0"/>
+          <a:ext cx="0" cy="0"/>
+          <a:chOff x="0" y="0"/>
+          <a:chExt cx="0" cy="0"/>
+        </a:xfrm>
+      </p:grpSpPr>
+      <p:sp>
+        <p:nvSpPr>
+          <p:cNvPr id="2" name="Slide Image Placeholder 1"/>
+          <p:cNvSpPr>
+            <a:spLocks noGrp="1" noRot="1" noChangeAspect="1"/>
+          </p:cNvSpPr>
+          <p:nvPr>
+            <p:ph type="sldImg"/>
+          </p:nvPr>
+        </p:nvSpPr>
+        <p:spPr/>
+      </p:sp>
+      <p:sp>
+        <p:nvSpPr>
+          <p:cNvPr id="3" name="Notes Placeholder 2"/>
+          <p:cNvSpPr>
+            <a:spLocks noGrp="1"/>
+          </p:cNvSpPr>
+          <p:nvPr>
+            <p:ph type="body" idx="1"/>
+          </p:nvPr>
+        </p:nvSpPr>
+        <p:spPr/>
+        <p:txBody>
+          <a:bodyPr/>
+          <a:lstStyle/>
+          <a:p>
+            <a:r>
+              <a:rPr lang="en-US" dirty="0"/>
+              <a:t/>
+            </a:r>
+            <a:endParaRPr lang="en-US" dirty="0"/>
+          </a:p>
+        </p:txBody>
+      </p:sp>
+      <p:sp>
+        <p:nvSpPr>
+          <p:cNvPr id="4" name="Slide Number Placeholder 3"/>
+          <p:cNvSpPr>
+            <a:spLocks noGrp="1"/>
+          </p:cNvSpPr>
+          <p:nvPr>
+            <p:ph type="sldNum" sz="quarter" idx="10"/>
+          </p:nvPr>
+        </p:nvSpPr>
+        <p:spPr/>
+        <p:txBody>
+          <a:bodyPr/>
+          <a:lstStyle/>
+          <a:p>
+            <a:fld id="{F7021451-1387-4CA6-816F-3879F97B5CBC}" type="slidenum">
+              <a:rPr lang="en-US"/>
+              <a:t>17</a:t>
+            </a:fld>
+            <a:endParaRPr lang="en-US"/>
+          </a:p>
+        </p:txBody>
+      </p:sp>
+    </p:spTree>
+    <p:extLst>
+      <p:ext uri="{BB962C8B-B14F-4D97-AF65-F5344CB8AC3E}">
+        <p14:creationId xmlns:p14="http://schemas.microsoft.com/office/powerpoint/2010/main" val="1024086991"/>
+      </p:ext>
+    </p:extLst>
+  </p:cSld>
+  <p:clrMapOvr>
+    <a:masterClrMapping/>
+  </p:clrMapOvr>
+</p:notes>
+</file>
+
+<file path=ppt/notesSlides/notesSlide18.xml><?xml version="1.0" encoding="utf-8"?>
+<p:notes xmlns:a="http://schemas.openxmlformats.org/drawingml/2006/main" xmlns:r="http://schemas.openxmlformats.org/officeDocument/2006/relationships" xmlns:p="http://schemas.openxmlformats.org/presentationml/2006/main">
+  <p:cSld>
+    <p:spTree>
+      <p:nvGrpSpPr>
+        <p:cNvPr id="1" name=""/>
+        <p:cNvGrpSpPr/>
+        <p:nvPr/>
+      </p:nvGrpSpPr>
+      <p:grpSpPr>
+        <a:xfrm>
+          <a:off x="0" y="0"/>
+          <a:ext cx="0" cy="0"/>
+          <a:chOff x="0" y="0"/>
+          <a:chExt cx="0" cy="0"/>
+        </a:xfrm>
+      </p:grpSpPr>
+      <p:sp>
+        <p:nvSpPr>
+          <p:cNvPr id="2" name="Slide Image Placeholder 1"/>
+          <p:cNvSpPr>
+            <a:spLocks noGrp="1" noRot="1" noChangeAspect="1"/>
+          </p:cNvSpPr>
+          <p:nvPr>
+            <p:ph type="sldImg"/>
+          </p:nvPr>
+        </p:nvSpPr>
+        <p:spPr/>
+      </p:sp>
+      <p:sp>
+        <p:nvSpPr>
+          <p:cNvPr id="3" name="Notes Placeholder 2"/>
+          <p:cNvSpPr>
+            <a:spLocks noGrp="1"/>
+          </p:cNvSpPr>
+          <p:nvPr>
+            <p:ph type="body" idx="1"/>
+          </p:nvPr>
+        </p:nvSpPr>
+        <p:spPr/>
+        <p:txBody>
+          <a:bodyPr/>
+          <a:lstStyle/>
+          <a:p>
+            <a:r>
+              <a:rPr lang="en-US" dirty="0"/>
+              <a:t/>
+            </a:r>
+            <a:endParaRPr lang="en-US" dirty="0"/>
+          </a:p>
+        </p:txBody>
+      </p:sp>
+      <p:sp>
+        <p:nvSpPr>
+          <p:cNvPr id="4" name="Slide Number Placeholder 3"/>
+          <p:cNvSpPr>
+            <a:spLocks noGrp="1"/>
+          </p:cNvSpPr>
+          <p:nvPr>
+            <p:ph type="sldNum" sz="quarter" idx="10"/>
+          </p:nvPr>
+        </p:nvSpPr>
+        <p:spPr/>
+        <p:txBody>
+          <a:bodyPr/>
+          <a:lstStyle/>
+          <a:p>
+            <a:fld id="{F7021451-1387-4CA6-816F-3879F97B5CBC}" type="slidenum">
+              <a:rPr lang="en-US"/>
+              <a:t>18</a:t>
             </a:fld>
             <a:endParaRPr lang="en-US"/>
           </a:p>
@@ -2556,7 +2734,7 @@
                 <a:ea typeface="Cambria" pitchFamily="34" charset="-122"/>
                 <a:cs typeface="Cambria" pitchFamily="34" charset="-120"/>
               </a:rPr>
-              <a:t>Diferenciadores: qué nos distingue</a:t>
+              <a:t>Pulsera Inteligente Perfil Médico+</a:t>
             </a:r>
             <a:endParaRPr lang="en-US" sz="3000" dirty="0"/>
           </a:p>
@@ -2595,7 +2773,7 @@
                 <a:ea typeface="Calibri" pitchFamily="34" charset="-122"/>
                 <a:cs typeface="Calibri" pitchFamily="34" charset="-120"/>
               </a:rPr>
-              <a:t>Hay varios proyectos de recordatorio de medicamentos. Perfil Médico+ agrega tres funcionalidades que atacan directamente el caso del adulto mayor que vive solo o no maneja un smartphone — usando siempre tecnología de bajo costo ya existente, sin fabricar hardware propio.</a:t>
+              <a:t>Hay varios proyectos de recordatorio de medicamentos. Nos diferenciamos integrando una pulsera ya disponible en el mercado (sin fabricar hardware propio), pensada para los dos perfiles dependientes que atendemos: adultos mayores no valentes y niños.</a:t>
             </a:r>
             <a:endParaRPr lang="en-US" sz="1300" dirty="0"/>
           </a:p>
@@ -2609,12 +2787,12 @@
         </p:nvSpPr>
         <p:spPr>
           <a:xfrm>
-            <a:off x="548640" y="2057400"/>
-            <a:ext cx="3520440" cy="4023360"/>
+            <a:off x="548640" y="1965960"/>
+            <a:ext cx="5257800" cy="4114800"/>
           </a:xfrm>
           <a:prstGeom prst="roundRect">
             <a:avLst>
-              <a:gd name="adj" fmla="val 2597"/>
+              <a:gd name="adj" fmla="val 2222"/>
             </a:avLst>
           </a:prstGeom>
           <a:solidFill>
@@ -2631,12 +2809,12 @@
         </p:nvSpPr>
         <p:spPr>
           <a:xfrm>
-            <a:off x="548640" y="2057400"/>
-            <a:ext cx="3520440" cy="868680"/>
+            <a:off x="548640" y="1965960"/>
+            <a:ext cx="5257800" cy="685800"/>
           </a:xfrm>
           <a:prstGeom prst="roundRect">
             <a:avLst>
-              <a:gd name="adj" fmla="val 10526"/>
+              <a:gd name="adj" fmla="val 13333"/>
             </a:avLst>
           </a:prstGeom>
           <a:solidFill>
@@ -2653,8 +2831,8 @@
         </p:nvSpPr>
         <p:spPr>
           <a:xfrm>
-            <a:off x="548640" y="2496312"/>
-            <a:ext cx="3520440" cy="429768"/>
+            <a:off x="548640" y="2313432"/>
+            <a:ext cx="5257800" cy="338328"/>
           </a:xfrm>
           <a:prstGeom prst="rect">
             <a:avLst/>
@@ -2673,8 +2851,8 @@
         </p:nvSpPr>
         <p:spPr>
           <a:xfrm>
-            <a:off x="749808" y="2176272"/>
-            <a:ext cx="3118104" cy="365760"/>
+            <a:off x="777240" y="2112264"/>
+            <a:ext cx="4800600" cy="411480"/>
           </a:xfrm>
           <a:prstGeom prst="rect">
             <a:avLst/>
@@ -2690,7 +2868,7 @@
               <a:buNone/>
             </a:pPr>
             <a:r>
-              <a:rPr lang="en-US" sz="1450" b="1" dirty="0">
+              <a:rPr lang="en-US" sz="1600" b="1" dirty="0">
                 <a:solidFill>
                   <a:srgbClr val="FFFFFF"/>
                 </a:solidFill>
@@ -2698,9 +2876,9 @@
                 <a:ea typeface="Calibri" pitchFamily="34" charset="-122"/>
                 <a:cs typeface="Calibri" pitchFamily="34" charset="-120"/>
               </a:rPr>
-              <a:t>Pantalla en casa</a:t>
-            </a:r>
-            <a:endParaRPr lang="en-US" sz="1450" dirty="0"/>
+              <a:t>Ubicación y salud</a:t>
+            </a:r>
+            <a:endParaRPr lang="en-US" sz="1600" dirty="0"/>
           </a:p>
         </p:txBody>
       </p:sp>
@@ -2712,47 +2890,8 @@
         </p:nvSpPr>
         <p:spPr>
           <a:xfrm>
-            <a:off x="749808" y="2542032"/>
-            <a:ext cx="3118104" cy="365760"/>
-          </a:xfrm>
-          <a:prstGeom prst="rect">
-            <a:avLst/>
-          </a:prstGeom>
-          <a:noFill/>
-          <a:ln/>
-        </p:spPr>
-        <p:txBody>
-          <a:bodyPr wrap="square" lIns="0" tIns="0" rIns="0" bIns="0" rtlCol="0" anchor="ctr"/>
-          <a:lstStyle/>
-          <a:p>
-            <a:pPr indent="0" marL="0">
-              <a:buNone/>
-            </a:pPr>
-            <a:r>
-              <a:rPr lang="en-US" sz="1000" i="1" dirty="0">
-                <a:solidFill>
-                  <a:srgbClr val="FFFFFF"/>
-                </a:solidFill>
-                <a:latin typeface="Calibri" pitchFamily="34" charset="0"/>
-                <a:ea typeface="Calibri" pitchFamily="34" charset="-122"/>
-                <a:cs typeface="Calibri" pitchFamily="34" charset="-120"/>
-              </a:rPr>
-              <a:t>Tablet fija + Fully Kiosk Browser</a:t>
-            </a:r>
-            <a:endParaRPr lang="en-US" sz="1000" dirty="0"/>
-          </a:p>
-        </p:txBody>
-      </p:sp>
-      <p:sp>
-        <p:nvSpPr>
-          <p:cNvPr id="10" name="Text 8"/>
-          <p:cNvSpPr txBox="1"/>
-          <p:nvPr/>
-        </p:nvSpPr>
-        <p:spPr>
-          <a:xfrm>
-            <a:off x="749808" y="3154680"/>
-            <a:ext cx="3118104" cy="2743200"/>
+            <a:off x="822960" y="2880360"/>
+            <a:ext cx="4709160" cy="3017520"/>
           </a:xfrm>
           <a:prstGeom prst="rect">
             <a:avLst/>
@@ -2764,14 +2903,18 @@
           <a:bodyPr wrap="square" lIns="0" tIns="0" rIns="0" bIns="0" rtlCol="0" anchor="t"/>
           <a:lstStyle/>
           <a:p>
-            <a:pPr indent="0" marL="0">
+            <a:pPr marL="342900" indent="-342900">
               <a:lnSpc>
-                <a:spcPct val="120000"/>
+                <a:spcPct val="115000"/>
               </a:lnSpc>
-              <a:buNone/>
-            </a:pPr>
-            <a:r>
-              <a:rPr lang="en-US" sz="1100" dirty="0">
+              <a:spcAft>
+                <a:spcPts val="1400"/>
+              </a:spcAft>
+              <a:buSzPct val="100000"/>
+              <a:buChar char="▪"/>
+            </a:pPr>
+            <a:r>
+              <a:rPr lang="en-US" sz="1300" dirty="0">
                 <a:solidFill>
                   <a:srgbClr val="E8F4F3"/>
                 </a:solidFill>
@@ -2779,26 +2922,74 @@
                 <a:ea typeface="Calibri" pitchFamily="34" charset="-122"/>
                 <a:cs typeface="Calibri" pitchFamily="34" charset="-120"/>
               </a:rPr>
-              <a:t>Nuestra misma app, en modo simplificado sobre una tablet montada en la casa del adulto mayor: botones grandes, confirmación de un toque y botón de emergencia — sin necesitar un smartphone propio.</a:t>
-            </a:r>
-            <a:endParaRPr lang="en-US" sz="1100" dirty="0"/>
-          </a:p>
-        </p:txBody>
-      </p:sp>
-      <p:sp>
-        <p:nvSpPr>
-          <p:cNvPr id="11" name="Shape 9"/>
+              <a:t>GPS con geocercas: alerta si el niño no llega al colegio o el adulto mayor sale de una zona segura</a:t>
+            </a:r>
+            <a:endParaRPr lang="en-US" sz="1300" dirty="0"/>
+          </a:p>
+          <a:p>
+            <a:pPr marL="342900" indent="-342900">
+              <a:lnSpc>
+                <a:spcPct val="115000"/>
+              </a:lnSpc>
+              <a:spcAft>
+                <a:spcPts val="1400"/>
+              </a:spcAft>
+              <a:buSzPct val="100000"/>
+              <a:buChar char="▪"/>
+            </a:pPr>
+            <a:r>
+              <a:rPr lang="en-US" sz="1300" dirty="0">
+                <a:solidFill>
+                  <a:srgbClr val="E8F4F3"/>
+                </a:solidFill>
+                <a:latin typeface="Calibri" pitchFamily="34" charset="0"/>
+                <a:ea typeface="Calibri" pitchFamily="34" charset="-122"/>
+                <a:cs typeface="Calibri" pitchFamily="34" charset="-120"/>
+              </a:rPr>
+              <a:t>Frecuencia cardíaca vía Health Connect (API gratuita de Android)</a:t>
+            </a:r>
+            <a:endParaRPr lang="en-US" sz="1300" dirty="0"/>
+          </a:p>
+          <a:p>
+            <a:pPr marL="342900" indent="-342900">
+              <a:lnSpc>
+                <a:spcPct val="115000"/>
+              </a:lnSpc>
+              <a:spcAft>
+                <a:spcPts val="1400"/>
+              </a:spcAft>
+              <a:buSzPct val="100000"/>
+              <a:buChar char="▪"/>
+            </a:pPr>
+            <a:r>
+              <a:rPr lang="en-US" sz="1300" dirty="0">
+                <a:solidFill>
+                  <a:srgbClr val="E8F4F3"/>
+                </a:solidFill>
+                <a:latin typeface="Calibri" pitchFamily="34" charset="0"/>
+                <a:ea typeface="Calibri" pitchFamily="34" charset="-122"/>
+                <a:cs typeface="Calibri" pitchFamily="34" charset="-120"/>
+              </a:rPr>
+              <a:t>Presión arterial referencial (no reemplaza un tensiómetro médico)</a:t>
+            </a:r>
+            <a:endParaRPr lang="en-US" sz="1300" dirty="0"/>
+          </a:p>
+        </p:txBody>
+      </p:sp>
+      <p:sp>
+        <p:nvSpPr>
+          <p:cNvPr id="10" name="Shape 8"/>
           <p:cNvSpPr/>
           <p:nvPr/>
         </p:nvSpPr>
         <p:spPr>
           <a:xfrm>
-            <a:off x="4343400" y="2057400"/>
-            <a:ext cx="3520440" cy="4023360"/>
+            <a:off x="6355080" y="1965960"/>
+            <a:ext cx="5257800" cy="4114800"/>
           </a:xfrm>
           <a:prstGeom prst="roundRect">
             <a:avLst>
-              <a:gd name="adj" fmla="val 2597"/>
+              <a:gd name="adj" fmla="val 2222"/>
             </a:avLst>
           </a:prstGeom>
           <a:solidFill>
@@ -2809,18 +3000,18 @@
       </p:sp>
       <p:sp>
         <p:nvSpPr>
-          <p:cNvPr id="12" name="Shape 10"/>
+          <p:cNvPr id="11" name="Shape 9"/>
           <p:cNvSpPr/>
           <p:nvPr/>
         </p:nvSpPr>
         <p:spPr>
           <a:xfrm>
-            <a:off x="4343400" y="2057400"/>
-            <a:ext cx="3520440" cy="868680"/>
+            <a:off x="6355080" y="1965960"/>
+            <a:ext cx="5257800" cy="685800"/>
           </a:xfrm>
           <a:prstGeom prst="roundRect">
             <a:avLst>
-              <a:gd name="adj" fmla="val 10526"/>
+              <a:gd name="adj" fmla="val 13333"/>
             </a:avLst>
           </a:prstGeom>
           <a:solidFill>
@@ -2831,14 +3022,14 @@
       </p:sp>
       <p:sp>
         <p:nvSpPr>
-          <p:cNvPr id="13" name="Shape 11"/>
+          <p:cNvPr id="12" name="Shape 10"/>
           <p:cNvSpPr/>
           <p:nvPr/>
         </p:nvSpPr>
         <p:spPr>
           <a:xfrm>
-            <a:off x="4343400" y="2496312"/>
-            <a:ext cx="3520440" cy="429768"/>
+            <a:off x="6355080" y="2313432"/>
+            <a:ext cx="5257800" cy="338328"/>
           </a:xfrm>
           <a:prstGeom prst="rect">
             <a:avLst/>
@@ -2851,311 +3042,164 @@
       </p:sp>
       <p:sp>
         <p:nvSpPr>
+          <p:cNvPr id="13" name="Text 11"/>
+          <p:cNvSpPr txBox="1"/>
+          <p:nvPr/>
+        </p:nvSpPr>
+        <p:spPr>
+          <a:xfrm>
+            <a:off x="6583680" y="2112264"/>
+            <a:ext cx="4800600" cy="411480"/>
+          </a:xfrm>
+          <a:prstGeom prst="rect">
+            <a:avLst/>
+          </a:prstGeom>
+          <a:noFill/>
+          <a:ln/>
+        </p:spPr>
+        <p:txBody>
+          <a:bodyPr wrap="square" lIns="0" tIns="0" rIns="0" bIns="0" rtlCol="0" anchor="ctr"/>
+          <a:lstStyle/>
+          <a:p>
+            <a:pPr indent="0" marL="0">
+              <a:buNone/>
+            </a:pPr>
+            <a:r>
+              <a:rPr lang="en-US" sz="1600" b="1" dirty="0">
+                <a:solidFill>
+                  <a:srgbClr val="FFFFFF"/>
+                </a:solidFill>
+                <a:latin typeface="Calibri" pitchFamily="34" charset="0"/>
+                <a:ea typeface="Calibri" pitchFamily="34" charset="-122"/>
+                <a:cs typeface="Calibri" pitchFamily="34" charset="-120"/>
+              </a:rPr>
+              <a:t>Seguridad</a:t>
+            </a:r>
+            <a:endParaRPr lang="en-US" sz="1600" dirty="0"/>
+          </a:p>
+        </p:txBody>
+      </p:sp>
+      <p:sp>
+        <p:nvSpPr>
           <p:cNvPr id="14" name="Text 12"/>
           <p:cNvSpPr txBox="1"/>
           <p:nvPr/>
         </p:nvSpPr>
         <p:spPr>
           <a:xfrm>
-            <a:off x="4544568" y="2176272"/>
-            <a:ext cx="3118104" cy="365760"/>
-          </a:xfrm>
-          <a:prstGeom prst="rect">
-            <a:avLst/>
-          </a:prstGeom>
-          <a:noFill/>
-          <a:ln/>
-        </p:spPr>
-        <p:txBody>
-          <a:bodyPr wrap="square" lIns="0" tIns="0" rIns="0" bIns="0" rtlCol="0" anchor="ctr"/>
-          <a:lstStyle/>
-          <a:p>
-            <a:pPr indent="0" marL="0">
-              <a:buNone/>
-            </a:pPr>
-            <a:r>
-              <a:rPr lang="en-US" sz="1450" b="1" dirty="0">
-                <a:solidFill>
-                  <a:srgbClr val="FFFFFF"/>
-                </a:solidFill>
-                <a:latin typeface="Calibri" pitchFamily="34" charset="0"/>
-                <a:ea typeface="Calibri" pitchFamily="34" charset="-122"/>
-                <a:cs typeface="Calibri" pitchFamily="34" charset="-120"/>
-              </a:rPr>
-              <a:t>Pulsera inteligente</a:t>
-            </a:r>
-            <a:endParaRPr lang="en-US" sz="1450" dirty="0"/>
+            <a:off x="6629400" y="2880360"/>
+            <a:ext cx="4709160" cy="3017520"/>
+          </a:xfrm>
+          <a:prstGeom prst="rect">
+            <a:avLst/>
+          </a:prstGeom>
+          <a:noFill/>
+          <a:ln/>
+        </p:spPr>
+        <p:txBody>
+          <a:bodyPr wrap="square" lIns="0" tIns="0" rIns="0" bIns="0" rtlCol="0" anchor="t"/>
+          <a:lstStyle/>
+          <a:p>
+            <a:pPr marL="342900" indent="-342900">
+              <a:lnSpc>
+                <a:spcPct val="115000"/>
+              </a:lnSpc>
+              <a:spcAft>
+                <a:spcPts val="1400"/>
+              </a:spcAft>
+              <a:buSzPct val="100000"/>
+              <a:buChar char="▪"/>
+            </a:pPr>
+            <a:r>
+              <a:rPr lang="en-US" sz="1300" dirty="0">
+                <a:solidFill>
+                  <a:srgbClr val="E8F4F3"/>
+                </a:solidFill>
+                <a:latin typeface="Calibri" pitchFamily="34" charset="0"/>
+                <a:ea typeface="Calibri" pitchFamily="34" charset="-122"/>
+                <a:cs typeface="Calibri" pitchFamily="34" charset="-120"/>
+              </a:rPr>
+              <a:t>Detección automática de caídas</a:t>
+            </a:r>
+            <a:endParaRPr lang="en-US" sz="1300" dirty="0"/>
+          </a:p>
+          <a:p>
+            <a:pPr marL="342900" indent="-342900">
+              <a:lnSpc>
+                <a:spcPct val="115000"/>
+              </a:lnSpc>
+              <a:spcAft>
+                <a:spcPts val="1400"/>
+              </a:spcAft>
+              <a:buSzPct val="100000"/>
+              <a:buChar char="▪"/>
+            </a:pPr>
+            <a:r>
+              <a:rPr lang="en-US" sz="1300" dirty="0">
+                <a:solidFill>
+                  <a:srgbClr val="E8F4F3"/>
+                </a:solidFill>
+                <a:latin typeface="Calibri" pitchFamily="34" charset="0"/>
+                <a:ea typeface="Calibri" pitchFamily="34" charset="-122"/>
+                <a:cs typeface="Calibri" pitchFamily="34" charset="-120"/>
+              </a:rPr>
+              <a:t>Botón SOS físico en la pulsera</a:t>
+            </a:r>
+            <a:endParaRPr lang="en-US" sz="1300" dirty="0"/>
+          </a:p>
+          <a:p>
+            <a:pPr marL="342900" indent="-342900">
+              <a:lnSpc>
+                <a:spcPct val="115000"/>
+              </a:lnSpc>
+              <a:spcAft>
+                <a:spcPts val="1400"/>
+              </a:spcAft>
+              <a:buSzPct val="100000"/>
+              <a:buChar char="▪"/>
+            </a:pPr>
+            <a:r>
+              <a:rPr lang="en-US" sz="1300" dirty="0">
+                <a:solidFill>
+                  <a:srgbClr val="E8F4F3"/>
+                </a:solidFill>
+                <a:latin typeface="Calibri" pitchFamily="34" charset="0"/>
+                <a:ea typeface="Calibri" pitchFamily="34" charset="-122"/>
+                <a:cs typeface="Calibri" pitchFamily="34" charset="-120"/>
+              </a:rPr>
+              <a:t>Alerta de batería baja del dispositivo</a:t>
+            </a:r>
+            <a:endParaRPr lang="en-US" sz="1300" dirty="0"/>
+          </a:p>
+          <a:p>
+            <a:pPr marL="342900" indent="-342900">
+              <a:lnSpc>
+                <a:spcPct val="115000"/>
+              </a:lnSpc>
+              <a:spcAft>
+                <a:spcPts val="1400"/>
+              </a:spcAft>
+              <a:buSzPct val="100000"/>
+              <a:buChar char="▪"/>
+            </a:pPr>
+            <a:r>
+              <a:rPr lang="en-US" sz="1300" dirty="0">
+                <a:solidFill>
+                  <a:srgbClr val="E8F4F3"/>
+                </a:solidFill>
+                <a:latin typeface="Calibri" pitchFamily="34" charset="0"/>
+                <a:ea typeface="Calibri" pitchFamily="34" charset="-122"/>
+                <a:cs typeface="Calibri" pitchFamily="34" charset="-120"/>
+              </a:rPr>
+              <a:t>Detección de inactividad inusual</a:t>
+            </a:r>
+            <a:endParaRPr lang="en-US" sz="1300" dirty="0"/>
           </a:p>
         </p:txBody>
       </p:sp>
       <p:sp>
         <p:nvSpPr>
           <p:cNvPr id="15" name="Text 13"/>
-          <p:cNvSpPr txBox="1"/>
-          <p:nvPr/>
-        </p:nvSpPr>
-        <p:spPr>
-          <a:xfrm>
-            <a:off x="4544568" y="2542032"/>
-            <a:ext cx="3118104" cy="365760"/>
-          </a:xfrm>
-          <a:prstGeom prst="rect">
-            <a:avLst/>
-          </a:prstGeom>
-          <a:noFill/>
-          <a:ln/>
-        </p:spPr>
-        <p:txBody>
-          <a:bodyPr wrap="square" lIns="0" tIns="0" rIns="0" bIns="0" rtlCol="0" anchor="ctr"/>
-          <a:lstStyle/>
-          <a:p>
-            <a:pPr indent="0" marL="0">
-              <a:buNone/>
-            </a:pPr>
-            <a:r>
-              <a:rPr lang="en-US" sz="1000" i="1" dirty="0">
-                <a:solidFill>
-                  <a:srgbClr val="FFFFFF"/>
-                </a:solidFill>
-                <a:latin typeface="Calibri" pitchFamily="34" charset="0"/>
-                <a:ea typeface="Calibri" pitchFamily="34" charset="-122"/>
-                <a:cs typeface="Calibri" pitchFamily="34" charset="-120"/>
-              </a:rPr>
-              <a:t>Health Connect (API gratuita)</a:t>
-            </a:r>
-            <a:endParaRPr lang="en-US" sz="1000" dirty="0"/>
-          </a:p>
-        </p:txBody>
-      </p:sp>
-      <p:sp>
-        <p:nvSpPr>
-          <p:cNvPr id="16" name="Text 14"/>
-          <p:cNvSpPr txBox="1"/>
-          <p:nvPr/>
-        </p:nvSpPr>
-        <p:spPr>
-          <a:xfrm>
-            <a:off x="4544568" y="3154680"/>
-            <a:ext cx="3118104" cy="2743200"/>
-          </a:xfrm>
-          <a:prstGeom prst="rect">
-            <a:avLst/>
-          </a:prstGeom>
-          <a:noFill/>
-          <a:ln/>
-        </p:spPr>
-        <p:txBody>
-          <a:bodyPr wrap="square" lIns="0" tIns="0" rIns="0" bIns="0" rtlCol="0" anchor="t"/>
-          <a:lstStyle/>
-          <a:p>
-            <a:pPr indent="0" marL="0">
-              <a:lnSpc>
-                <a:spcPct val="120000"/>
-              </a:lnSpc>
-              <a:buNone/>
-            </a:pPr>
-            <a:r>
-              <a:rPr lang="en-US" sz="1100" dirty="0">
-                <a:solidFill>
-                  <a:srgbClr val="E8F4F3"/>
-                </a:solidFill>
-                <a:latin typeface="Calibri" pitchFamily="34" charset="0"/>
-                <a:ea typeface="Calibri" pitchFamily="34" charset="-122"/>
-                <a:cs typeface="Calibri" pitchFamily="34" charset="-120"/>
-              </a:rPr>
-              <a:t>Lee frecuencia cardíaca y otros signos vitales desde una pulsera Xiaomi ya existente en el mercado, vía la API oficial y gratuita de Android — sin desarrollar hardware propio.</a:t>
-            </a:r>
-            <a:endParaRPr lang="en-US" sz="1100" dirty="0"/>
-          </a:p>
-        </p:txBody>
-      </p:sp>
-      <p:sp>
-        <p:nvSpPr>
-          <p:cNvPr id="17" name="Shape 15"/>
-          <p:cNvSpPr/>
-          <p:nvPr/>
-        </p:nvSpPr>
-        <p:spPr>
-          <a:xfrm>
-            <a:off x="8138160" y="2057400"/>
-            <a:ext cx="3520440" cy="4023360"/>
-          </a:xfrm>
-          <a:prstGeom prst="roundRect">
-            <a:avLst>
-              <a:gd name="adj" fmla="val 2597"/>
-            </a:avLst>
-          </a:prstGeom>
-          <a:solidFill>
-            <a:srgbClr val="0E4A50"/>
-          </a:solidFill>
-          <a:ln/>
-        </p:spPr>
-      </p:sp>
-      <p:sp>
-        <p:nvSpPr>
-          <p:cNvPr id="18" name="Shape 16"/>
-          <p:cNvSpPr/>
-          <p:nvPr/>
-        </p:nvSpPr>
-        <p:spPr>
-          <a:xfrm>
-            <a:off x="8138160" y="2057400"/>
-            <a:ext cx="3520440" cy="868680"/>
-          </a:xfrm>
-          <a:prstGeom prst="roundRect">
-            <a:avLst>
-              <a:gd name="adj" fmla="val 10526"/>
-            </a:avLst>
-          </a:prstGeom>
-          <a:solidFill>
-            <a:srgbClr val="02C39A"/>
-          </a:solidFill>
-          <a:ln/>
-        </p:spPr>
-      </p:sp>
-      <p:sp>
-        <p:nvSpPr>
-          <p:cNvPr id="19" name="Shape 17"/>
-          <p:cNvSpPr/>
-          <p:nvPr/>
-        </p:nvSpPr>
-        <p:spPr>
-          <a:xfrm>
-            <a:off x="8138160" y="2496312"/>
-            <a:ext cx="3520440" cy="429768"/>
-          </a:xfrm>
-          <a:prstGeom prst="rect">
-            <a:avLst/>
-          </a:prstGeom>
-          <a:solidFill>
-            <a:srgbClr val="02C39A"/>
-          </a:solidFill>
-          <a:ln/>
-        </p:spPr>
-      </p:sp>
-      <p:sp>
-        <p:nvSpPr>
-          <p:cNvPr id="20" name="Text 18"/>
-          <p:cNvSpPr txBox="1"/>
-          <p:nvPr/>
-        </p:nvSpPr>
-        <p:spPr>
-          <a:xfrm>
-            <a:off x="8339328" y="2176272"/>
-            <a:ext cx="3118104" cy="365760"/>
-          </a:xfrm>
-          <a:prstGeom prst="rect">
-            <a:avLst/>
-          </a:prstGeom>
-          <a:noFill/>
-          <a:ln/>
-        </p:spPr>
-        <p:txBody>
-          <a:bodyPr wrap="square" lIns="0" tIns="0" rIns="0" bIns="0" rtlCol="0" anchor="ctr"/>
-          <a:lstStyle/>
-          <a:p>
-            <a:pPr indent="0" marL="0">
-              <a:buNone/>
-            </a:pPr>
-            <a:r>
-              <a:rPr lang="en-US" sz="1450" b="1" dirty="0">
-                <a:solidFill>
-                  <a:srgbClr val="FFFFFF"/>
-                </a:solidFill>
-                <a:latin typeface="Calibri" pitchFamily="34" charset="0"/>
-                <a:ea typeface="Calibri" pitchFamily="34" charset="-122"/>
-                <a:cs typeface="Calibri" pitchFamily="34" charset="-120"/>
-              </a:rPr>
-              <a:t>Detección de ruido fuerte</a:t>
-            </a:r>
-            <a:endParaRPr lang="en-US" sz="1450" dirty="0"/>
-          </a:p>
-        </p:txBody>
-      </p:sp>
-      <p:sp>
-        <p:nvSpPr>
-          <p:cNvPr id="21" name="Text 19"/>
-          <p:cNvSpPr txBox="1"/>
-          <p:nvPr/>
-        </p:nvSpPr>
-        <p:spPr>
-          <a:xfrm>
-            <a:off x="8339328" y="2542032"/>
-            <a:ext cx="3118104" cy="365760"/>
-          </a:xfrm>
-          <a:prstGeom prst="rect">
-            <a:avLst/>
-          </a:prstGeom>
-          <a:noFill/>
-          <a:ln/>
-        </p:spPr>
-        <p:txBody>
-          <a:bodyPr wrap="square" lIns="0" tIns="0" rIns="0" bIns="0" rtlCol="0" anchor="ctr"/>
-          <a:lstStyle/>
-          <a:p>
-            <a:pPr indent="0" marL="0">
-              <a:buNone/>
-            </a:pPr>
-            <a:r>
-              <a:rPr lang="en-US" sz="1000" i="1" dirty="0">
-                <a:solidFill>
-                  <a:srgbClr val="FFFFFF"/>
-                </a:solidFill>
-                <a:latin typeface="Calibri" pitchFamily="34" charset="0"/>
-                <a:ea typeface="Calibri" pitchFamily="34" charset="-122"/>
-                <a:cs typeface="Calibri" pitchFamily="34" charset="-120"/>
-              </a:rPr>
-              <a:t>Micrófono del dispositivo</a:t>
-            </a:r>
-            <a:endParaRPr lang="en-US" sz="1000" dirty="0"/>
-          </a:p>
-        </p:txBody>
-      </p:sp>
-      <p:sp>
-        <p:nvSpPr>
-          <p:cNvPr id="22" name="Text 20"/>
-          <p:cNvSpPr txBox="1"/>
-          <p:nvPr/>
-        </p:nvSpPr>
-        <p:spPr>
-          <a:xfrm>
-            <a:off x="8339328" y="3154680"/>
-            <a:ext cx="3118104" cy="2743200"/>
-          </a:xfrm>
-          <a:prstGeom prst="rect">
-            <a:avLst/>
-          </a:prstGeom>
-          <a:noFill/>
-          <a:ln/>
-        </p:spPr>
-        <p:txBody>
-          <a:bodyPr wrap="square" lIns="0" tIns="0" rIns="0" bIns="0" rtlCol="0" anchor="t"/>
-          <a:lstStyle/>
-          <a:p>
-            <a:pPr indent="0" marL="0">
-              <a:lnSpc>
-                <a:spcPct val="120000"/>
-              </a:lnSpc>
-              <a:buNone/>
-            </a:pPr>
-            <a:r>
-              <a:rPr lang="en-US" sz="1100" dirty="0">
-                <a:solidFill>
-                  <a:srgbClr val="E8F4F3"/>
-                </a:solidFill>
-                <a:latin typeface="Calibri" pitchFamily="34" charset="0"/>
-                <a:ea typeface="Calibri" pitchFamily="34" charset="-122"/>
-                <a:cs typeface="Calibri" pitchFamily="34" charset="-120"/>
-              </a:rPr>
-              <a:t>Detecta sonidos fuertes en el hogar (posible caída) usando el micrófono que ya trae el celular o tablet, sin sensores adicionales que fabricar o calibrar desde cero.</a:t>
-            </a:r>
-            <a:endParaRPr lang="en-US" sz="1100" dirty="0"/>
-          </a:p>
-        </p:txBody>
-      </p:sp>
-      <p:sp>
-        <p:nvSpPr>
-          <p:cNvPr id="23" name="Text 21"/>
           <p:cNvSpPr txBox="1"/>
           <p:nvPr/>
         </p:nvSpPr>
@@ -3186,7 +3230,7 @@
                 <a:ea typeface="Calibri" pitchFamily="34" charset="-122"/>
                 <a:cs typeface="Calibri" pitchFamily="34" charset="-120"/>
               </a:rPr>
-              <a:t>Planteadas como incrementos sobre el MVP base, a priorizar en Fase 2 según avance del equipo.</a:t>
+              <a:t>Costo de referencia: $70.000-$90.000 CLP el dispositivo + plan SIM prepago (~$5.000-$10.000 CLP/mes) para ubicación en tiempo real.</a:t>
             </a:r>
             <a:endParaRPr lang="en-US" sz="1050" dirty="0"/>
           </a:p>
@@ -3194,7 +3238,7 @@
       </p:sp>
       <p:sp>
         <p:nvSpPr>
-          <p:cNvPr id="24" name="Text 22"/>
+          <p:cNvPr id="16" name="Text 14"/>
           <p:cNvSpPr txBox="1"/>
           <p:nvPr/>
         </p:nvSpPr>
@@ -3233,7 +3277,7 @@
       </p:sp>
       <p:sp>
         <p:nvSpPr>
-          <p:cNvPr id="25" name="Text 23"/>
+          <p:cNvPr id="17" name="Text 15"/>
           <p:cNvSpPr txBox="1"/>
           <p:nvPr/>
         </p:nvSpPr>
@@ -3311,6 +3355,665 @@
         <p:spPr>
           <a:xfrm>
             <a:off x="548640" y="457200"/>
+            <a:ext cx="10515600" cy="640080"/>
+          </a:xfrm>
+          <a:prstGeom prst="rect">
+            <a:avLst/>
+          </a:prstGeom>
+          <a:noFill/>
+          <a:ln/>
+        </p:spPr>
+        <p:txBody>
+          <a:bodyPr wrap="square" lIns="0" tIns="0" rIns="0" bIns="0" rtlCol="0" anchor="ctr"/>
+          <a:lstStyle/>
+          <a:p>
+            <a:pPr indent="0" marL="0">
+              <a:buNone/>
+            </a:pPr>
+            <a:r>
+              <a:rPr lang="en-US" sz="3000" b="1" dirty="0">
+                <a:solidFill>
+                  <a:srgbClr val="0B3D42"/>
+                </a:solidFill>
+                <a:latin typeface="Cambria" pitchFamily="34" charset="0"/>
+                <a:ea typeface="Cambria" pitchFamily="34" charset="-122"/>
+                <a:cs typeface="Cambria" pitchFamily="34" charset="-120"/>
+              </a:rPr>
+              <a:t>Más funciones nuevas</a:t>
+            </a:r>
+            <a:endParaRPr lang="en-US" sz="3000" dirty="0"/>
+          </a:p>
+        </p:txBody>
+      </p:sp>
+      <p:sp>
+        <p:nvSpPr>
+          <p:cNvPr id="3" name="Text 1"/>
+          <p:cNvSpPr txBox="1"/>
+          <p:nvPr/>
+        </p:nvSpPr>
+        <p:spPr>
+          <a:xfrm>
+            <a:off x="548640" y="1170432"/>
+            <a:ext cx="10881360" cy="457200"/>
+          </a:xfrm>
+          <a:prstGeom prst="rect">
+            <a:avLst/>
+          </a:prstGeom>
+          <a:noFill/>
+          <a:ln/>
+        </p:spPr>
+        <p:txBody>
+          <a:bodyPr wrap="square" lIns="0" tIns="0" rIns="0" bIns="0" rtlCol="0" anchor="ctr"/>
+          <a:lstStyle/>
+          <a:p>
+            <a:pPr indent="0" marL="0">
+              <a:buNone/>
+            </a:pPr>
+            <a:r>
+              <a:rPr lang="en-US" sz="1300" dirty="0">
+                <a:solidFill>
+                  <a:srgbClr val="5C7A7C"/>
+                </a:solidFill>
+                <a:latin typeface="Calibri" pitchFamily="34" charset="0"/>
+                <a:ea typeface="Calibri" pitchFamily="34" charset="-122"/>
+                <a:cs typeface="Calibri" pitchFamily="34" charset="-120"/>
+              </a:rPr>
+              <a:t>Estas funciones son 100% software, sin costo de hardware adicional.</a:t>
+            </a:r>
+            <a:endParaRPr lang="en-US" sz="1300" dirty="0"/>
+          </a:p>
+        </p:txBody>
+      </p:sp>
+      <p:sp>
+        <p:nvSpPr>
+          <p:cNvPr id="4" name="Shape 2"/>
+          <p:cNvSpPr/>
+          <p:nvPr/>
+        </p:nvSpPr>
+        <p:spPr>
+          <a:xfrm>
+            <a:off x="548640" y="1965960"/>
+            <a:ext cx="3520440" cy="4114800"/>
+          </a:xfrm>
+          <a:prstGeom prst="roundRect">
+            <a:avLst>
+              <a:gd name="adj" fmla="val 2597"/>
+            </a:avLst>
+          </a:prstGeom>
+          <a:solidFill>
+            <a:srgbClr val="FFFFFF"/>
+          </a:solidFill>
+          <a:ln w="12700">
+            <a:solidFill>
+              <a:srgbClr val="DCEDEC"/>
+            </a:solidFill>
+            <a:prstDash val="solid"/>
+          </a:ln>
+          <a:effectLst>
+            <a:outerShdw sx="100000" sy="100000" kx="0" ky="0" algn="bl" rotWithShape="0" blurRad="76200" dist="25400" dir="5400000">
+              <a:srgbClr val="1F3A3C">
+                <a:alpha val="13000"/>
+              </a:srgbClr>
+            </a:outerShdw>
+          </a:effectLst>
+        </p:spPr>
+      </p:sp>
+      <p:sp>
+        <p:nvSpPr>
+          <p:cNvPr id="5" name="Shape 3"/>
+          <p:cNvSpPr/>
+          <p:nvPr/>
+        </p:nvSpPr>
+        <p:spPr>
+          <a:xfrm>
+            <a:off x="548640" y="1965960"/>
+            <a:ext cx="3520440" cy="777240"/>
+          </a:xfrm>
+          <a:prstGeom prst="roundRect">
+            <a:avLst>
+              <a:gd name="adj" fmla="val 11765"/>
+            </a:avLst>
+          </a:prstGeom>
+          <a:solidFill>
+            <a:srgbClr val="028090"/>
+          </a:solidFill>
+          <a:ln/>
+        </p:spPr>
+      </p:sp>
+      <p:sp>
+        <p:nvSpPr>
+          <p:cNvPr id="6" name="Shape 4"/>
+          <p:cNvSpPr/>
+          <p:nvPr/>
+        </p:nvSpPr>
+        <p:spPr>
+          <a:xfrm>
+            <a:off x="548640" y="2350008"/>
+            <a:ext cx="3520440" cy="393192"/>
+          </a:xfrm>
+          <a:prstGeom prst="rect">
+            <a:avLst/>
+          </a:prstGeom>
+          <a:solidFill>
+            <a:srgbClr val="028090"/>
+          </a:solidFill>
+          <a:ln/>
+        </p:spPr>
+      </p:sp>
+      <p:sp>
+        <p:nvSpPr>
+          <p:cNvPr id="7" name="Text 5"/>
+          <p:cNvSpPr txBox="1"/>
+          <p:nvPr/>
+        </p:nvSpPr>
+        <p:spPr>
+          <a:xfrm>
+            <a:off x="749808" y="2148840"/>
+            <a:ext cx="3118104" cy="457200"/>
+          </a:xfrm>
+          <a:prstGeom prst="rect">
+            <a:avLst/>
+          </a:prstGeom>
+          <a:noFill/>
+          <a:ln/>
+        </p:spPr>
+        <p:txBody>
+          <a:bodyPr wrap="square" lIns="0" tIns="0" rIns="0" bIns="0" rtlCol="0" anchor="ctr"/>
+          <a:lstStyle/>
+          <a:p>
+            <a:pPr indent="0" marL="0">
+              <a:buNone/>
+            </a:pPr>
+            <a:r>
+              <a:rPr lang="en-US" sz="1400" b="1" dirty="0">
+                <a:solidFill>
+                  <a:srgbClr val="FFFFFF"/>
+                </a:solidFill>
+                <a:latin typeface="Calibri" pitchFamily="34" charset="0"/>
+                <a:ea typeface="Calibri" pitchFamily="34" charset="-122"/>
+                <a:cs typeface="Calibri" pitchFamily="34" charset="-120"/>
+              </a:rPr>
+              <a:t>Registro manual de glucosa</a:t>
+            </a:r>
+            <a:endParaRPr lang="en-US" sz="1400" dirty="0"/>
+          </a:p>
+        </p:txBody>
+      </p:sp>
+      <p:sp>
+        <p:nvSpPr>
+          <p:cNvPr id="8" name="Text 6"/>
+          <p:cNvSpPr txBox="1"/>
+          <p:nvPr/>
+        </p:nvSpPr>
+        <p:spPr>
+          <a:xfrm>
+            <a:off x="749808" y="2926080"/>
+            <a:ext cx="3118104" cy="2971800"/>
+          </a:xfrm>
+          <a:prstGeom prst="rect">
+            <a:avLst/>
+          </a:prstGeom>
+          <a:noFill/>
+          <a:ln/>
+        </p:spPr>
+        <p:txBody>
+          <a:bodyPr wrap="square" lIns="0" tIns="0" rIns="0" bIns="0" rtlCol="0" anchor="t"/>
+          <a:lstStyle/>
+          <a:p>
+            <a:pPr indent="0" marL="0">
+              <a:lnSpc>
+                <a:spcPct val="120000"/>
+              </a:lnSpc>
+              <a:buNone/>
+            </a:pPr>
+            <a:r>
+              <a:rPr lang="en-US" sz="1100" dirty="0">
+                <a:solidFill>
+                  <a:srgbClr val="0B2B2E"/>
+                </a:solidFill>
+                <a:latin typeface="Calibri" pitchFamily="34" charset="0"/>
+                <a:ea typeface="Calibri" pitchFamily="34" charset="-122"/>
+                <a:cs typeface="Calibri" pitchFamily="34" charset="-120"/>
+              </a:rPr>
+              <a:t>El cuidador ingresa la lectura de un glucómetro certificado. No se mide automáticamente por seguridad: la FDA advirtió en 2024 que ningún smartwatch o anillo está aprobado para medir glucosa, y confiar en esa medición puede causar errores de dosis de insulina.</a:t>
+            </a:r>
+            <a:endParaRPr lang="en-US" sz="1100" dirty="0"/>
+          </a:p>
+        </p:txBody>
+      </p:sp>
+      <p:sp>
+        <p:nvSpPr>
+          <p:cNvPr id="9" name="Shape 7"/>
+          <p:cNvSpPr/>
+          <p:nvPr/>
+        </p:nvSpPr>
+        <p:spPr>
+          <a:xfrm>
+            <a:off x="4343400" y="1965960"/>
+            <a:ext cx="3520440" cy="4114800"/>
+          </a:xfrm>
+          <a:prstGeom prst="roundRect">
+            <a:avLst>
+              <a:gd name="adj" fmla="val 2597"/>
+            </a:avLst>
+          </a:prstGeom>
+          <a:solidFill>
+            <a:srgbClr val="FFFFFF"/>
+          </a:solidFill>
+          <a:ln w="12700">
+            <a:solidFill>
+              <a:srgbClr val="DCEDEC"/>
+            </a:solidFill>
+            <a:prstDash val="solid"/>
+          </a:ln>
+          <a:effectLst>
+            <a:outerShdw sx="100000" sy="100000" kx="0" ky="0" algn="bl" rotWithShape="0" blurRad="76200" dist="25400" dir="5400000">
+              <a:srgbClr val="1F3A3C">
+                <a:alpha val="13000"/>
+              </a:srgbClr>
+            </a:outerShdw>
+          </a:effectLst>
+        </p:spPr>
+      </p:sp>
+      <p:sp>
+        <p:nvSpPr>
+          <p:cNvPr id="10" name="Shape 8"/>
+          <p:cNvSpPr/>
+          <p:nvPr/>
+        </p:nvSpPr>
+        <p:spPr>
+          <a:xfrm>
+            <a:off x="4343400" y="1965960"/>
+            <a:ext cx="3520440" cy="777240"/>
+          </a:xfrm>
+          <a:prstGeom prst="roundRect">
+            <a:avLst>
+              <a:gd name="adj" fmla="val 11765"/>
+            </a:avLst>
+          </a:prstGeom>
+          <a:solidFill>
+            <a:srgbClr val="00A896"/>
+          </a:solidFill>
+          <a:ln/>
+        </p:spPr>
+      </p:sp>
+      <p:sp>
+        <p:nvSpPr>
+          <p:cNvPr id="11" name="Shape 9"/>
+          <p:cNvSpPr/>
+          <p:nvPr/>
+        </p:nvSpPr>
+        <p:spPr>
+          <a:xfrm>
+            <a:off x="4343400" y="2350008"/>
+            <a:ext cx="3520440" cy="393192"/>
+          </a:xfrm>
+          <a:prstGeom prst="rect">
+            <a:avLst/>
+          </a:prstGeom>
+          <a:solidFill>
+            <a:srgbClr val="00A896"/>
+          </a:solidFill>
+          <a:ln/>
+        </p:spPr>
+      </p:sp>
+      <p:sp>
+        <p:nvSpPr>
+          <p:cNvPr id="12" name="Text 10"/>
+          <p:cNvSpPr txBox="1"/>
+          <p:nvPr/>
+        </p:nvSpPr>
+        <p:spPr>
+          <a:xfrm>
+            <a:off x="4544568" y="2148840"/>
+            <a:ext cx="3118104" cy="457200"/>
+          </a:xfrm>
+          <a:prstGeom prst="rect">
+            <a:avLst/>
+          </a:prstGeom>
+          <a:noFill/>
+          <a:ln/>
+        </p:spPr>
+        <p:txBody>
+          <a:bodyPr wrap="square" lIns="0" tIns="0" rIns="0" bIns="0" rtlCol="0" anchor="ctr"/>
+          <a:lstStyle/>
+          <a:p>
+            <a:pPr indent="0" marL="0">
+              <a:buNone/>
+            </a:pPr>
+            <a:r>
+              <a:rPr lang="en-US" sz="1400" b="1" dirty="0">
+                <a:solidFill>
+                  <a:srgbClr val="FFFFFF"/>
+                </a:solidFill>
+                <a:latin typeface="Calibri" pitchFamily="34" charset="0"/>
+                <a:ea typeface="Calibri" pitchFamily="34" charset="-122"/>
+                <a:cs typeface="Calibri" pitchFamily="34" charset="-120"/>
+              </a:rPr>
+              <a:t>Recordatorios extendidos</a:t>
+            </a:r>
+            <a:endParaRPr lang="en-US" sz="1400" dirty="0"/>
+          </a:p>
+        </p:txBody>
+      </p:sp>
+      <p:sp>
+        <p:nvSpPr>
+          <p:cNvPr id="13" name="Text 11"/>
+          <p:cNvSpPr txBox="1"/>
+          <p:nvPr/>
+        </p:nvSpPr>
+        <p:spPr>
+          <a:xfrm>
+            <a:off x="4544568" y="2926080"/>
+            <a:ext cx="3118104" cy="2971800"/>
+          </a:xfrm>
+          <a:prstGeom prst="rect">
+            <a:avLst/>
+          </a:prstGeom>
+          <a:noFill/>
+          <a:ln/>
+        </p:spPr>
+        <p:txBody>
+          <a:bodyPr wrap="square" lIns="0" tIns="0" rIns="0" bIns="0" rtlCol="0" anchor="t"/>
+          <a:lstStyle/>
+          <a:p>
+            <a:pPr indent="0" marL="0">
+              <a:lnSpc>
+                <a:spcPct val="120000"/>
+              </a:lnSpc>
+              <a:buNone/>
+            </a:pPr>
+            <a:r>
+              <a:rPr lang="en-US" sz="1100" dirty="0">
+                <a:solidFill>
+                  <a:srgbClr val="0B2B2E"/>
+                </a:solidFill>
+                <a:latin typeface="Calibri" pitchFamily="34" charset="0"/>
+                <a:ea typeface="Calibri" pitchFamily="34" charset="-122"/>
+                <a:cs typeface="Calibri" pitchFamily="34" charset="-120"/>
+              </a:rPr>
+              <a:t>Indicaciones posteriores a una consulta médica (ej. tomar algo horas después de ver a un especialista) y citas médicas pendientes, con recordatorio diario hasta la fecha.</a:t>
+            </a:r>
+            <a:endParaRPr lang="en-US" sz="1100" dirty="0"/>
+          </a:p>
+        </p:txBody>
+      </p:sp>
+      <p:sp>
+        <p:nvSpPr>
+          <p:cNvPr id="14" name="Shape 12"/>
+          <p:cNvSpPr/>
+          <p:nvPr/>
+        </p:nvSpPr>
+        <p:spPr>
+          <a:xfrm>
+            <a:off x="8138160" y="1965960"/>
+            <a:ext cx="3520440" cy="4114800"/>
+          </a:xfrm>
+          <a:prstGeom prst="roundRect">
+            <a:avLst>
+              <a:gd name="adj" fmla="val 2597"/>
+            </a:avLst>
+          </a:prstGeom>
+          <a:solidFill>
+            <a:srgbClr val="FFFFFF"/>
+          </a:solidFill>
+          <a:ln w="12700">
+            <a:solidFill>
+              <a:srgbClr val="DCEDEC"/>
+            </a:solidFill>
+            <a:prstDash val="solid"/>
+          </a:ln>
+          <a:effectLst>
+            <a:outerShdw sx="100000" sy="100000" kx="0" ky="0" algn="bl" rotWithShape="0" blurRad="76200" dist="25400" dir="5400000">
+              <a:srgbClr val="1F3A3C">
+                <a:alpha val="13000"/>
+              </a:srgbClr>
+            </a:outerShdw>
+          </a:effectLst>
+        </p:spPr>
+      </p:sp>
+      <p:sp>
+        <p:nvSpPr>
+          <p:cNvPr id="15" name="Shape 13"/>
+          <p:cNvSpPr/>
+          <p:nvPr/>
+        </p:nvSpPr>
+        <p:spPr>
+          <a:xfrm>
+            <a:off x="8138160" y="1965960"/>
+            <a:ext cx="3520440" cy="777240"/>
+          </a:xfrm>
+          <a:prstGeom prst="roundRect">
+            <a:avLst>
+              <a:gd name="adj" fmla="val 11765"/>
+            </a:avLst>
+          </a:prstGeom>
+          <a:solidFill>
+            <a:srgbClr val="02C39A"/>
+          </a:solidFill>
+          <a:ln/>
+        </p:spPr>
+      </p:sp>
+      <p:sp>
+        <p:nvSpPr>
+          <p:cNvPr id="16" name="Shape 14"/>
+          <p:cNvSpPr/>
+          <p:nvPr/>
+        </p:nvSpPr>
+        <p:spPr>
+          <a:xfrm>
+            <a:off x="8138160" y="2350008"/>
+            <a:ext cx="3520440" cy="393192"/>
+          </a:xfrm>
+          <a:prstGeom prst="rect">
+            <a:avLst/>
+          </a:prstGeom>
+          <a:solidFill>
+            <a:srgbClr val="02C39A"/>
+          </a:solidFill>
+          <a:ln/>
+        </p:spPr>
+      </p:sp>
+      <p:sp>
+        <p:nvSpPr>
+          <p:cNvPr id="17" name="Text 15"/>
+          <p:cNvSpPr txBox="1"/>
+          <p:nvPr/>
+        </p:nvSpPr>
+        <p:spPr>
+          <a:xfrm>
+            <a:off x="8339328" y="2148840"/>
+            <a:ext cx="3118104" cy="457200"/>
+          </a:xfrm>
+          <a:prstGeom prst="rect">
+            <a:avLst/>
+          </a:prstGeom>
+          <a:noFill/>
+          <a:ln/>
+        </p:spPr>
+        <p:txBody>
+          <a:bodyPr wrap="square" lIns="0" tIns="0" rIns="0" bIns="0" rtlCol="0" anchor="ctr"/>
+          <a:lstStyle/>
+          <a:p>
+            <a:pPr indent="0" marL="0">
+              <a:buNone/>
+            </a:pPr>
+            <a:r>
+              <a:rPr lang="en-US" sz="1400" b="1" dirty="0">
+                <a:solidFill>
+                  <a:srgbClr val="FFFFFF"/>
+                </a:solidFill>
+                <a:latin typeface="Calibri" pitchFamily="34" charset="0"/>
+                <a:ea typeface="Calibri" pitchFamily="34" charset="-122"/>
+                <a:cs typeface="Calibri" pitchFamily="34" charset="-120"/>
+              </a:rPr>
+              <a:t>Farmacias cercanas vía IA</a:t>
+            </a:r>
+            <a:endParaRPr lang="en-US" sz="1400" dirty="0"/>
+          </a:p>
+        </p:txBody>
+      </p:sp>
+      <p:sp>
+        <p:nvSpPr>
+          <p:cNvPr id="18" name="Text 16"/>
+          <p:cNvSpPr txBox="1"/>
+          <p:nvPr/>
+        </p:nvSpPr>
+        <p:spPr>
+          <a:xfrm>
+            <a:off x="8339328" y="2926080"/>
+            <a:ext cx="3118104" cy="2971800"/>
+          </a:xfrm>
+          <a:prstGeom prst="rect">
+            <a:avLst/>
+          </a:prstGeom>
+          <a:noFill/>
+          <a:ln/>
+        </p:spPr>
+        <p:txBody>
+          <a:bodyPr wrap="square" lIns="0" tIns="0" rIns="0" bIns="0" rtlCol="0" anchor="t"/>
+          <a:lstStyle/>
+          <a:p>
+            <a:pPr indent="0" marL="0">
+              <a:lnSpc>
+                <a:spcPct val="120000"/>
+              </a:lnSpc>
+              <a:buNone/>
+            </a:pPr>
+            <a:r>
+              <a:rPr lang="en-US" sz="1100" dirty="0">
+                <a:solidFill>
+                  <a:srgbClr val="0B2B2E"/>
+                </a:solidFill>
+                <a:latin typeface="Calibri" pitchFamily="34" charset="0"/>
+                <a:ea typeface="Calibri" pitchFamily="34" charset="-122"/>
+                <a:cs typeface="Calibri" pitchFamily="34" charset="-120"/>
+              </a:rPr>
+              <a:t>Se le pregunta a la IA por un medicamento y recomienda farmacias cercanas comparando precio, inspirado en herramientas públicas reales como TuFarmacia.gob.cl (MINSAL) y comparadores como BuscaFarma.</a:t>
+            </a:r>
+            <a:endParaRPr lang="en-US" sz="1100" dirty="0"/>
+          </a:p>
+        </p:txBody>
+      </p:sp>
+      <p:sp>
+        <p:nvSpPr>
+          <p:cNvPr id="19" name="Text 17"/>
+          <p:cNvSpPr txBox="1"/>
+          <p:nvPr/>
+        </p:nvSpPr>
+        <p:spPr>
+          <a:xfrm>
+            <a:off x="457200" y="6510528"/>
+            <a:ext cx="7315200" cy="274320"/>
+          </a:xfrm>
+          <a:prstGeom prst="rect">
+            <a:avLst/>
+          </a:prstGeom>
+          <a:noFill/>
+          <a:ln/>
+        </p:spPr>
+        <p:txBody>
+          <a:bodyPr wrap="square" lIns="0" tIns="0" rIns="0" bIns="0" rtlCol="0" anchor="ctr"/>
+          <a:lstStyle/>
+          <a:p>
+            <a:pPr algn="l" indent="0" marL="0">
+              <a:buNone/>
+            </a:pPr>
+            <a:r>
+              <a:rPr lang="en-US" sz="900" dirty="0">
+                <a:solidFill>
+                  <a:srgbClr val="5C7A7C"/>
+                </a:solidFill>
+                <a:latin typeface="Calibri" pitchFamily="34" charset="0"/>
+                <a:ea typeface="Calibri" pitchFamily="34" charset="-122"/>
+                <a:cs typeface="Calibri" pitchFamily="34" charset="-120"/>
+              </a:rPr>
+              <a:t>Perfil Médico+  ·  Capstone_005D · Grupo 7  ·  PTY4614</a:t>
+            </a:r>
+            <a:endParaRPr lang="en-US" sz="900" dirty="0"/>
+          </a:p>
+        </p:txBody>
+      </p:sp>
+      <p:sp>
+        <p:nvSpPr>
+          <p:cNvPr id="20" name="Text 18"/>
+          <p:cNvSpPr txBox="1"/>
+          <p:nvPr/>
+        </p:nvSpPr>
+        <p:spPr>
+          <a:xfrm>
+            <a:off x="11521440" y="6510528"/>
+            <a:ext cx="457200" cy="274320"/>
+          </a:xfrm>
+          <a:prstGeom prst="rect">
+            <a:avLst/>
+          </a:prstGeom>
+          <a:noFill/>
+          <a:ln/>
+        </p:spPr>
+        <p:txBody>
+          <a:bodyPr wrap="square" lIns="0" tIns="0" rIns="0" bIns="0" rtlCol="0" anchor="ctr"/>
+          <a:lstStyle/>
+          <a:p>
+            <a:pPr algn="r" indent="0" marL="0">
+              <a:buNone/>
+            </a:pPr>
+            <a:r>
+              <a:rPr lang="en-US" sz="900" dirty="0">
+                <a:solidFill>
+                  <a:srgbClr val="5C7A7C"/>
+                </a:solidFill>
+                <a:latin typeface="Calibri" pitchFamily="34" charset="0"/>
+                <a:ea typeface="Calibri" pitchFamily="34" charset="-122"/>
+                <a:cs typeface="Calibri" pitchFamily="34" charset="-120"/>
+              </a:rPr>
+              <a:t>11</a:t>
+            </a:r>
+            <a:endParaRPr lang="en-US" sz="900" dirty="0"/>
+          </a:p>
+        </p:txBody>
+      </p:sp>
+    </p:spTree>
+  </p:cSld>
+  <p:clrMapOvr>
+    <a:masterClrMapping/>
+  </p:clrMapOvr>
+</p:sld>
+</file>
+
+<file path=ppt/slides/slide12.xml><?xml version="1.0" encoding="utf-8"?>
+<p:sld xmlns:a="http://schemas.openxmlformats.org/drawingml/2006/main" xmlns:r="http://schemas.openxmlformats.org/officeDocument/2006/relationships" xmlns:p="http://schemas.openxmlformats.org/presentationml/2006/main">
+  <p:cSld name="Slide 12">
+    <p:bg>
+      <p:bgPr>
+        <a:solidFill>
+          <a:srgbClr val="F4FAF9"/>
+        </a:solidFill>
+      </p:bgPr>
+    </p:bg>
+    <p:spTree>
+      <p:nvGrpSpPr>
+        <p:cNvPr id="1" name=""/>
+        <p:cNvGrpSpPr/>
+        <p:nvPr/>
+      </p:nvGrpSpPr>
+      <p:grpSpPr>
+        <a:xfrm>
+          <a:off x="0" y="0"/>
+          <a:ext cx="0" cy="0"/>
+          <a:chOff x="0" y="0"/>
+          <a:chExt cx="0" cy="0"/>
+        </a:xfrm>
+      </p:grpSpPr>
+      <p:sp>
+        <p:nvSpPr>
+          <p:cNvPr id="2" name="Text 0"/>
+          <p:cNvSpPr txBox="1"/>
+          <p:nvPr/>
+        </p:nvSpPr>
+        <p:spPr>
+          <a:xfrm>
+            <a:off x="548640" y="457200"/>
             <a:ext cx="9144000" cy="640080"/>
           </a:xfrm>
           <a:prstGeom prst="rect">
@@ -3435,7 +4138,7 @@
                 <a:ea typeface="Calibri" pitchFamily="34" charset="-122"/>
                 <a:cs typeface="Calibri" pitchFamily="34" charset="-120"/>
               </a:rPr>
-              <a:t>Paciente · Adulto mayor · Cuidador</a:t>
+              <a:t>Titular · Perfil dependiente · Cuidador</a:t>
             </a:r>
             <a:endParaRPr lang="en-US" sz="950" dirty="0"/>
           </a:p>
@@ -3860,7 +4563,7 @@
       </p:sp>
       <p:graphicFrame>
         <p:nvGraphicFramePr>
-          <p:cNvPr id="12" name="Table 0"/>
+          <p:cNvPr id="13" name="Table 0"/>
           <p:cNvGraphicFramePr>
             <a:graphicFrameLocks noGrp="1"/>
           </p:cNvGraphicFramePr>
@@ -4657,7 +5360,7 @@
                           <a:ea typeface="Calibri" pitchFamily="34" charset="-122"/>
                           <a:cs typeface="Calibri" pitchFamily="34" charset="-120"/>
                         </a:rPr>
-                        <a:t>Relacional, ajustada a datos interrelacionados del paciente</a:t>
+                        <a:t>Relacional, ajustada a datos interrelacionados del perfil dependiente</a:t>
                       </a:r>
                       <a:endParaRPr lang="en-US" sz="1050" dirty="0">
                         <a:latin typeface="Calibri" charset="0"/>
@@ -5403,899 +6106,6 @@
                 <a:ea typeface="Calibri" pitchFamily="34" charset="-122"/>
                 <a:cs typeface="Calibri" pitchFamily="34" charset="-120"/>
               </a:rPr>
-              <a:t>11</a:t>
-            </a:r>
-            <a:endParaRPr lang="en-US" sz="900" dirty="0"/>
-          </a:p>
-        </p:txBody>
-      </p:sp>
-    </p:spTree>
-  </p:cSld>
-  <p:clrMapOvr>
-    <a:masterClrMapping/>
-  </p:clrMapOvr>
-</p:sld>
-</file>
-
-<file path=ppt/slides/slide12.xml><?xml version="1.0" encoding="utf-8"?>
-<p:sld xmlns:a="http://schemas.openxmlformats.org/drawingml/2006/main" xmlns:r="http://schemas.openxmlformats.org/officeDocument/2006/relationships" xmlns:p="http://schemas.openxmlformats.org/presentationml/2006/main">
-  <p:cSld name="Slide 12">
-    <p:bg>
-      <p:bgPr>
-        <a:solidFill>
-          <a:srgbClr val="F4FAF9"/>
-        </a:solidFill>
-      </p:bgPr>
-    </p:bg>
-    <p:spTree>
-      <p:nvGrpSpPr>
-        <p:cNvPr id="1" name=""/>
-        <p:cNvGrpSpPr/>
-        <p:nvPr/>
-      </p:nvGrpSpPr>
-      <p:grpSpPr>
-        <a:xfrm>
-          <a:off x="0" y="0"/>
-          <a:ext cx="0" cy="0"/>
-          <a:chOff x="0" y="0"/>
-          <a:chExt cx="0" cy="0"/>
-        </a:xfrm>
-      </p:grpSpPr>
-      <p:sp>
-        <p:nvSpPr>
-          <p:cNvPr id="2" name="Text 0"/>
-          <p:cNvSpPr txBox="1"/>
-          <p:nvPr/>
-        </p:nvSpPr>
-        <p:spPr>
-          <a:xfrm>
-            <a:off x="548640" y="457200"/>
-            <a:ext cx="10058400" cy="640080"/>
-          </a:xfrm>
-          <a:prstGeom prst="rect">
-            <a:avLst/>
-          </a:prstGeom>
-          <a:noFill/>
-          <a:ln/>
-        </p:spPr>
-        <p:txBody>
-          <a:bodyPr wrap="square" lIns="0" tIns="0" rIns="0" bIns="0" rtlCol="0" anchor="ctr"/>
-          <a:lstStyle/>
-          <a:p>
-            <a:pPr indent="0" marL="0">
-              <a:buNone/>
-            </a:pPr>
-            <a:r>
-              <a:rPr lang="en-US" sz="3000" b="1" dirty="0">
-                <a:solidFill>
-                  <a:srgbClr val="0B3D42"/>
-                </a:solidFill>
-                <a:latin typeface="Cambria" pitchFamily="34" charset="0"/>
-                <a:ea typeface="Cambria" pitchFamily="34" charset="-122"/>
-                <a:cs typeface="Cambria" pitchFamily="34" charset="-120"/>
-              </a:rPr>
-              <a:t>Metodología de trabajo y roles</a:t>
-            </a:r>
-            <a:endParaRPr lang="en-US" sz="3000" dirty="0"/>
-          </a:p>
-        </p:txBody>
-      </p:sp>
-      <p:sp>
-        <p:nvSpPr>
-          <p:cNvPr id="3" name="Text 1"/>
-          <p:cNvSpPr txBox="1"/>
-          <p:nvPr/>
-        </p:nvSpPr>
-        <p:spPr>
-          <a:xfrm>
-            <a:off x="548640" y="1170432"/>
-            <a:ext cx="10881360" cy="594360"/>
-          </a:xfrm>
-          <a:prstGeom prst="rect">
-            <a:avLst/>
-          </a:prstGeom>
-          <a:noFill/>
-          <a:ln/>
-        </p:spPr>
-        <p:txBody>
-          <a:bodyPr wrap="square" lIns="0" tIns="0" rIns="0" bIns="0" rtlCol="0" anchor="ctr"/>
-          <a:lstStyle/>
-          <a:p>
-            <a:pPr indent="0" marL="0">
-              <a:buNone/>
-            </a:pPr>
-            <a:r>
-              <a:rPr lang="en-US" sz="1300" dirty="0">
-                <a:solidFill>
-                  <a:srgbClr val="5C7A7C"/>
-                </a:solidFill>
-                <a:latin typeface="Calibri" pitchFamily="34" charset="0"/>
-                <a:ea typeface="Calibri" pitchFamily="34" charset="-122"/>
-                <a:cs typeface="Calibri" pitchFamily="34" charset="-120"/>
-              </a:rPr>
-              <a:t>Trabajo ágil (Scrum), con sprints quincenales durante la Fase 2: Sprint Planning, seguimiento breve, demo de cierre y retrospectiva. Una historia se considera terminada (Definition of Done) cuando está integrada, probada y documentada en GitHub.</a:t>
-            </a:r>
-            <a:endParaRPr lang="en-US" sz="1300" dirty="0"/>
-          </a:p>
-        </p:txBody>
-      </p:sp>
-      <p:sp>
-        <p:nvSpPr>
-          <p:cNvPr id="4" name="Shape 2"/>
-          <p:cNvSpPr/>
-          <p:nvPr/>
-        </p:nvSpPr>
-        <p:spPr>
-          <a:xfrm>
-            <a:off x="548640" y="2011680"/>
-            <a:ext cx="3520440" cy="4114800"/>
-          </a:xfrm>
-          <a:prstGeom prst="roundRect">
-            <a:avLst>
-              <a:gd name="adj" fmla="val 2597"/>
-            </a:avLst>
-          </a:prstGeom>
-          <a:solidFill>
-            <a:srgbClr val="FFFFFF"/>
-          </a:solidFill>
-          <a:ln w="12700">
-            <a:solidFill>
-              <a:srgbClr val="DCEDEC"/>
-            </a:solidFill>
-            <a:prstDash val="solid"/>
-          </a:ln>
-          <a:effectLst>
-            <a:outerShdw sx="100000" sy="100000" kx="0" ky="0" algn="bl" rotWithShape="0" blurRad="76200" dist="25400" dir="5400000">
-              <a:srgbClr val="1F3A3C">
-                <a:alpha val="13000"/>
-              </a:srgbClr>
-            </a:outerShdw>
-          </a:effectLst>
-        </p:spPr>
-      </p:sp>
-      <p:sp>
-        <p:nvSpPr>
-          <p:cNvPr id="5" name="Shape 3"/>
-          <p:cNvSpPr/>
-          <p:nvPr/>
-        </p:nvSpPr>
-        <p:spPr>
-          <a:xfrm>
-            <a:off x="548640" y="2011680"/>
-            <a:ext cx="3520440" cy="822960"/>
-          </a:xfrm>
-          <a:prstGeom prst="roundRect">
-            <a:avLst>
-              <a:gd name="adj" fmla="val 11111"/>
-            </a:avLst>
-          </a:prstGeom>
-          <a:solidFill>
-            <a:srgbClr val="028090"/>
-          </a:solidFill>
-          <a:ln/>
-        </p:spPr>
-      </p:sp>
-      <p:sp>
-        <p:nvSpPr>
-          <p:cNvPr id="6" name="Shape 4"/>
-          <p:cNvSpPr/>
-          <p:nvPr/>
-        </p:nvSpPr>
-        <p:spPr>
-          <a:xfrm>
-            <a:off x="548640" y="2423160"/>
-            <a:ext cx="3520440" cy="411480"/>
-          </a:xfrm>
-          <a:prstGeom prst="rect">
-            <a:avLst/>
-          </a:prstGeom>
-          <a:solidFill>
-            <a:srgbClr val="028090"/>
-          </a:solidFill>
-          <a:ln/>
-        </p:spPr>
-      </p:sp>
-      <p:sp>
-        <p:nvSpPr>
-          <p:cNvPr id="7" name="Text 5"/>
-          <p:cNvSpPr txBox="1"/>
-          <p:nvPr/>
-        </p:nvSpPr>
-        <p:spPr>
-          <a:xfrm>
-            <a:off x="777240" y="2121408"/>
-            <a:ext cx="3063240" cy="365760"/>
-          </a:xfrm>
-          <a:prstGeom prst="rect">
-            <a:avLst/>
-          </a:prstGeom>
-          <a:noFill/>
-          <a:ln/>
-        </p:spPr>
-        <p:txBody>
-          <a:bodyPr wrap="square" lIns="0" tIns="0" rIns="0" bIns="0" rtlCol="0" anchor="ctr"/>
-          <a:lstStyle/>
-          <a:p>
-            <a:pPr indent="0" marL="0">
-              <a:buNone/>
-            </a:pPr>
-            <a:r>
-              <a:rPr lang="en-US" sz="1500" b="1" dirty="0">
-                <a:solidFill>
-                  <a:srgbClr val="FFFFFF"/>
-                </a:solidFill>
-                <a:latin typeface="Calibri" pitchFamily="34" charset="0"/>
-                <a:ea typeface="Calibri" pitchFamily="34" charset="-122"/>
-                <a:cs typeface="Calibri" pitchFamily="34" charset="-120"/>
-              </a:rPr>
-              <a:t>Benjamín Leiva</a:t>
-            </a:r>
-            <a:endParaRPr lang="en-US" sz="1500" dirty="0"/>
-          </a:p>
-        </p:txBody>
-      </p:sp>
-      <p:sp>
-        <p:nvSpPr>
-          <p:cNvPr id="8" name="Text 6"/>
-          <p:cNvSpPr txBox="1"/>
-          <p:nvPr/>
-        </p:nvSpPr>
-        <p:spPr>
-          <a:xfrm>
-            <a:off x="777240" y="2450592"/>
-            <a:ext cx="3063240" cy="320040"/>
-          </a:xfrm>
-          <a:prstGeom prst="rect">
-            <a:avLst/>
-          </a:prstGeom>
-          <a:noFill/>
-          <a:ln/>
-        </p:spPr>
-        <p:txBody>
-          <a:bodyPr wrap="square" lIns="0" tIns="0" rIns="0" bIns="0" rtlCol="0" anchor="ctr"/>
-          <a:lstStyle/>
-          <a:p>
-            <a:pPr indent="0" marL="0">
-              <a:buNone/>
-            </a:pPr>
-            <a:r>
-              <a:rPr lang="en-US" sz="1150" dirty="0">
-                <a:solidFill>
-                  <a:srgbClr val="FFFFFF"/>
-                </a:solidFill>
-                <a:latin typeface="Calibri" pitchFamily="34" charset="0"/>
-                <a:ea typeface="Calibri" pitchFamily="34" charset="-122"/>
-                <a:cs typeface="Calibri" pitchFamily="34" charset="-120"/>
-              </a:rPr>
-              <a:t>Backend</a:t>
-            </a:r>
-            <a:endParaRPr lang="en-US" sz="1150" dirty="0"/>
-          </a:p>
-        </p:txBody>
-      </p:sp>
-      <p:sp>
-        <p:nvSpPr>
-          <p:cNvPr id="9" name="Text 7"/>
-          <p:cNvSpPr txBox="1"/>
-          <p:nvPr/>
-        </p:nvSpPr>
-        <p:spPr>
-          <a:xfrm>
-            <a:off x="777240" y="3017520"/>
-            <a:ext cx="3063240" cy="320040"/>
-          </a:xfrm>
-          <a:prstGeom prst="rect">
-            <a:avLst/>
-          </a:prstGeom>
-          <a:noFill/>
-          <a:ln/>
-        </p:spPr>
-        <p:txBody>
-          <a:bodyPr wrap="square" lIns="0" tIns="0" rIns="0" bIns="0" rtlCol="0" anchor="ctr"/>
-          <a:lstStyle/>
-          <a:p>
-            <a:pPr indent="0" marL="0">
-              <a:buNone/>
-            </a:pPr>
-            <a:r>
-              <a:rPr lang="en-US" sz="1100" b="1" i="1" dirty="0">
-                <a:solidFill>
-                  <a:srgbClr val="028090"/>
-                </a:solidFill>
-                <a:latin typeface="Calibri" pitchFamily="34" charset="0"/>
-                <a:ea typeface="Calibri" pitchFamily="34" charset="-122"/>
-                <a:cs typeface="Calibri" pitchFamily="34" charset="-120"/>
-              </a:rPr>
-              <a:t>Python + FastAPI</a:t>
-            </a:r>
-            <a:endParaRPr lang="en-US" sz="1100" dirty="0"/>
-          </a:p>
-        </p:txBody>
-      </p:sp>
-      <p:sp>
-        <p:nvSpPr>
-          <p:cNvPr id="10" name="Text 8"/>
-          <p:cNvSpPr txBox="1"/>
-          <p:nvPr/>
-        </p:nvSpPr>
-        <p:spPr>
-          <a:xfrm>
-            <a:off x="777240" y="3429000"/>
-            <a:ext cx="3063240" cy="2468880"/>
-          </a:xfrm>
-          <a:prstGeom prst="rect">
-            <a:avLst/>
-          </a:prstGeom>
-          <a:noFill/>
-          <a:ln/>
-        </p:spPr>
-        <p:txBody>
-          <a:bodyPr wrap="square" lIns="0" tIns="0" rIns="0" bIns="0" rtlCol="0" anchor="t"/>
-          <a:lstStyle/>
-          <a:p>
-            <a:pPr indent="0" marL="0">
-              <a:lnSpc>
-                <a:spcPct val="120000"/>
-              </a:lnSpc>
-              <a:buNone/>
-            </a:pPr>
-            <a:r>
-              <a:rPr lang="en-US" sz="1150" dirty="0">
-                <a:solidFill>
-                  <a:srgbClr val="0B2B2E"/>
-                </a:solidFill>
-                <a:latin typeface="Calibri" pitchFamily="34" charset="0"/>
-                <a:ea typeface="Calibri" pitchFamily="34" charset="-122"/>
-                <a:cs typeface="Calibri" pitchFamily="34" charset="-120"/>
-              </a:rPr>
-              <a:t>API REST, autenticación JWT, lógica de negocio, orquestación de la API de IA (consultas y manejo de errores) e integración de notificaciones</a:t>
-            </a:r>
-            <a:endParaRPr lang="en-US" sz="1150" dirty="0"/>
-          </a:p>
-        </p:txBody>
-      </p:sp>
-      <p:sp>
-        <p:nvSpPr>
-          <p:cNvPr id="11" name="Shape 9"/>
-          <p:cNvSpPr/>
-          <p:nvPr/>
-        </p:nvSpPr>
-        <p:spPr>
-          <a:xfrm>
-            <a:off x="4343400" y="2011680"/>
-            <a:ext cx="3520440" cy="4114800"/>
-          </a:xfrm>
-          <a:prstGeom prst="roundRect">
-            <a:avLst>
-              <a:gd name="adj" fmla="val 2597"/>
-            </a:avLst>
-          </a:prstGeom>
-          <a:solidFill>
-            <a:srgbClr val="FFFFFF"/>
-          </a:solidFill>
-          <a:ln w="12700">
-            <a:solidFill>
-              <a:srgbClr val="DCEDEC"/>
-            </a:solidFill>
-            <a:prstDash val="solid"/>
-          </a:ln>
-          <a:effectLst>
-            <a:outerShdw sx="100000" sy="100000" kx="0" ky="0" algn="bl" rotWithShape="0" blurRad="76200" dist="25400" dir="5400000">
-              <a:srgbClr val="1F3A3C">
-                <a:alpha val="13000"/>
-              </a:srgbClr>
-            </a:outerShdw>
-          </a:effectLst>
-        </p:spPr>
-      </p:sp>
-      <p:sp>
-        <p:nvSpPr>
-          <p:cNvPr id="12" name="Shape 10"/>
-          <p:cNvSpPr/>
-          <p:nvPr/>
-        </p:nvSpPr>
-        <p:spPr>
-          <a:xfrm>
-            <a:off x="4343400" y="2011680"/>
-            <a:ext cx="3520440" cy="822960"/>
-          </a:xfrm>
-          <a:prstGeom prst="roundRect">
-            <a:avLst>
-              <a:gd name="adj" fmla="val 11111"/>
-            </a:avLst>
-          </a:prstGeom>
-          <a:solidFill>
-            <a:srgbClr val="00A896"/>
-          </a:solidFill>
-          <a:ln/>
-        </p:spPr>
-      </p:sp>
-      <p:sp>
-        <p:nvSpPr>
-          <p:cNvPr id="13" name="Shape 11"/>
-          <p:cNvSpPr/>
-          <p:nvPr/>
-        </p:nvSpPr>
-        <p:spPr>
-          <a:xfrm>
-            <a:off x="4343400" y="2423160"/>
-            <a:ext cx="3520440" cy="411480"/>
-          </a:xfrm>
-          <a:prstGeom prst="rect">
-            <a:avLst/>
-          </a:prstGeom>
-          <a:solidFill>
-            <a:srgbClr val="00A896"/>
-          </a:solidFill>
-          <a:ln/>
-        </p:spPr>
-      </p:sp>
-      <p:sp>
-        <p:nvSpPr>
-          <p:cNvPr id="14" name="Text 12"/>
-          <p:cNvSpPr txBox="1"/>
-          <p:nvPr/>
-        </p:nvSpPr>
-        <p:spPr>
-          <a:xfrm>
-            <a:off x="4572000" y="2121408"/>
-            <a:ext cx="3063240" cy="365760"/>
-          </a:xfrm>
-          <a:prstGeom prst="rect">
-            <a:avLst/>
-          </a:prstGeom>
-          <a:noFill/>
-          <a:ln/>
-        </p:spPr>
-        <p:txBody>
-          <a:bodyPr wrap="square" lIns="0" tIns="0" rIns="0" bIns="0" rtlCol="0" anchor="ctr"/>
-          <a:lstStyle/>
-          <a:p>
-            <a:pPr indent="0" marL="0">
-              <a:buNone/>
-            </a:pPr>
-            <a:r>
-              <a:rPr lang="en-US" sz="1500" b="1" dirty="0">
-                <a:solidFill>
-                  <a:srgbClr val="FFFFFF"/>
-                </a:solidFill>
-                <a:latin typeface="Calibri" pitchFamily="34" charset="0"/>
-                <a:ea typeface="Calibri" pitchFamily="34" charset="-122"/>
-                <a:cs typeface="Calibri" pitchFamily="34" charset="-120"/>
-              </a:rPr>
-              <a:t>Sergio Ocares</a:t>
-            </a:r>
-            <a:endParaRPr lang="en-US" sz="1500" dirty="0"/>
-          </a:p>
-        </p:txBody>
-      </p:sp>
-      <p:sp>
-        <p:nvSpPr>
-          <p:cNvPr id="15" name="Text 13"/>
-          <p:cNvSpPr txBox="1"/>
-          <p:nvPr/>
-        </p:nvSpPr>
-        <p:spPr>
-          <a:xfrm>
-            <a:off x="4572000" y="2450592"/>
-            <a:ext cx="3063240" cy="320040"/>
-          </a:xfrm>
-          <a:prstGeom prst="rect">
-            <a:avLst/>
-          </a:prstGeom>
-          <a:noFill/>
-          <a:ln/>
-        </p:spPr>
-        <p:txBody>
-          <a:bodyPr wrap="square" lIns="0" tIns="0" rIns="0" bIns="0" rtlCol="0" anchor="ctr"/>
-          <a:lstStyle/>
-          <a:p>
-            <a:pPr indent="0" marL="0">
-              <a:buNone/>
-            </a:pPr>
-            <a:r>
-              <a:rPr lang="en-US" sz="1150" dirty="0">
-                <a:solidFill>
-                  <a:srgbClr val="FFFFFF"/>
-                </a:solidFill>
-                <a:latin typeface="Calibri" pitchFamily="34" charset="0"/>
-                <a:ea typeface="Calibri" pitchFamily="34" charset="-122"/>
-                <a:cs typeface="Calibri" pitchFamily="34" charset="-120"/>
-              </a:rPr>
-              <a:t>Base de datos + IA</a:t>
-            </a:r>
-            <a:endParaRPr lang="en-US" sz="1150" dirty="0"/>
-          </a:p>
-        </p:txBody>
-      </p:sp>
-      <p:sp>
-        <p:nvSpPr>
-          <p:cNvPr id="16" name="Text 14"/>
-          <p:cNvSpPr txBox="1"/>
-          <p:nvPr/>
-        </p:nvSpPr>
-        <p:spPr>
-          <a:xfrm>
-            <a:off x="4572000" y="3017520"/>
-            <a:ext cx="3063240" cy="320040"/>
-          </a:xfrm>
-          <a:prstGeom prst="rect">
-            <a:avLst/>
-          </a:prstGeom>
-          <a:noFill/>
-          <a:ln/>
-        </p:spPr>
-        <p:txBody>
-          <a:bodyPr wrap="square" lIns="0" tIns="0" rIns="0" bIns="0" rtlCol="0" anchor="ctr"/>
-          <a:lstStyle/>
-          <a:p>
-            <a:pPr indent="0" marL="0">
-              <a:buNone/>
-            </a:pPr>
-            <a:r>
-              <a:rPr lang="en-US" sz="1100" b="1" i="1" dirty="0">
-                <a:solidFill>
-                  <a:srgbClr val="00A896"/>
-                </a:solidFill>
-                <a:latin typeface="Calibri" pitchFamily="34" charset="0"/>
-                <a:ea typeface="Calibri" pitchFamily="34" charset="-122"/>
-                <a:cs typeface="Calibri" pitchFamily="34" charset="-120"/>
-              </a:rPr>
-              <a:t>PostgreSQL / API LLM</a:t>
-            </a:r>
-            <a:endParaRPr lang="en-US" sz="1100" dirty="0"/>
-          </a:p>
-        </p:txBody>
-      </p:sp>
-      <p:sp>
-        <p:nvSpPr>
-          <p:cNvPr id="17" name="Text 15"/>
-          <p:cNvSpPr txBox="1"/>
-          <p:nvPr/>
-        </p:nvSpPr>
-        <p:spPr>
-          <a:xfrm>
-            <a:off x="4572000" y="3429000"/>
-            <a:ext cx="3063240" cy="2468880"/>
-          </a:xfrm>
-          <a:prstGeom prst="rect">
-            <a:avLst/>
-          </a:prstGeom>
-          <a:noFill/>
-          <a:ln/>
-        </p:spPr>
-        <p:txBody>
-          <a:bodyPr wrap="square" lIns="0" tIns="0" rIns="0" bIns="0" rtlCol="0" anchor="t"/>
-          <a:lstStyle/>
-          <a:p>
-            <a:pPr indent="0" marL="0">
-              <a:lnSpc>
-                <a:spcPct val="120000"/>
-              </a:lnSpc>
-              <a:buNone/>
-            </a:pPr>
-            <a:r>
-              <a:rPr lang="en-US" sz="1150" dirty="0">
-                <a:solidFill>
-                  <a:srgbClr val="0B2B2E"/>
-                </a:solidFill>
-                <a:latin typeface="Calibri" pitchFamily="34" charset="0"/>
-                <a:ea typeface="Calibri" pitchFamily="34" charset="-122"/>
-                <a:cs typeface="Calibri" pitchFamily="34" charset="-120"/>
-              </a:rPr>
-              <a:t>Modelado de BD, indicadores y reportes de cumplimiento, define el contexto enviado a la IA y almacena sus resultados</a:t>
-            </a:r>
-            <a:endParaRPr lang="en-US" sz="1150" dirty="0"/>
-          </a:p>
-        </p:txBody>
-      </p:sp>
-      <p:sp>
-        <p:nvSpPr>
-          <p:cNvPr id="18" name="Shape 16"/>
-          <p:cNvSpPr/>
-          <p:nvPr/>
-        </p:nvSpPr>
-        <p:spPr>
-          <a:xfrm>
-            <a:off x="8138160" y="2011680"/>
-            <a:ext cx="3520440" cy="4114800"/>
-          </a:xfrm>
-          <a:prstGeom prst="roundRect">
-            <a:avLst>
-              <a:gd name="adj" fmla="val 2597"/>
-            </a:avLst>
-          </a:prstGeom>
-          <a:solidFill>
-            <a:srgbClr val="FFFFFF"/>
-          </a:solidFill>
-          <a:ln w="12700">
-            <a:solidFill>
-              <a:srgbClr val="DCEDEC"/>
-            </a:solidFill>
-            <a:prstDash val="solid"/>
-          </a:ln>
-          <a:effectLst>
-            <a:outerShdw sx="100000" sy="100000" kx="0" ky="0" algn="bl" rotWithShape="0" blurRad="76200" dist="25400" dir="5400000">
-              <a:srgbClr val="1F3A3C">
-                <a:alpha val="13000"/>
-              </a:srgbClr>
-            </a:outerShdw>
-          </a:effectLst>
-        </p:spPr>
-      </p:sp>
-      <p:sp>
-        <p:nvSpPr>
-          <p:cNvPr id="19" name="Shape 17"/>
-          <p:cNvSpPr/>
-          <p:nvPr/>
-        </p:nvSpPr>
-        <p:spPr>
-          <a:xfrm>
-            <a:off x="8138160" y="2011680"/>
-            <a:ext cx="3520440" cy="822960"/>
-          </a:xfrm>
-          <a:prstGeom prst="roundRect">
-            <a:avLst>
-              <a:gd name="adj" fmla="val 11111"/>
-            </a:avLst>
-          </a:prstGeom>
-          <a:solidFill>
-            <a:srgbClr val="02C39A"/>
-          </a:solidFill>
-          <a:ln/>
-        </p:spPr>
-      </p:sp>
-      <p:sp>
-        <p:nvSpPr>
-          <p:cNvPr id="20" name="Shape 18"/>
-          <p:cNvSpPr/>
-          <p:nvPr/>
-        </p:nvSpPr>
-        <p:spPr>
-          <a:xfrm>
-            <a:off x="8138160" y="2423160"/>
-            <a:ext cx="3520440" cy="411480"/>
-          </a:xfrm>
-          <a:prstGeom prst="rect">
-            <a:avLst/>
-          </a:prstGeom>
-          <a:solidFill>
-            <a:srgbClr val="02C39A"/>
-          </a:solidFill>
-          <a:ln/>
-        </p:spPr>
-      </p:sp>
-      <p:sp>
-        <p:nvSpPr>
-          <p:cNvPr id="21" name="Text 19"/>
-          <p:cNvSpPr txBox="1"/>
-          <p:nvPr/>
-        </p:nvSpPr>
-        <p:spPr>
-          <a:xfrm>
-            <a:off x="8366760" y="2121408"/>
-            <a:ext cx="3063240" cy="365760"/>
-          </a:xfrm>
-          <a:prstGeom prst="rect">
-            <a:avLst/>
-          </a:prstGeom>
-          <a:noFill/>
-          <a:ln/>
-        </p:spPr>
-        <p:txBody>
-          <a:bodyPr wrap="square" lIns="0" tIns="0" rIns="0" bIns="0" rtlCol="0" anchor="ctr"/>
-          <a:lstStyle/>
-          <a:p>
-            <a:pPr indent="0" marL="0">
-              <a:buNone/>
-            </a:pPr>
-            <a:r>
-              <a:rPr lang="en-US" sz="1500" b="1" dirty="0">
-                <a:solidFill>
-                  <a:srgbClr val="FFFFFF"/>
-                </a:solidFill>
-                <a:latin typeface="Calibri" pitchFamily="34" charset="0"/>
-                <a:ea typeface="Calibri" pitchFamily="34" charset="-122"/>
-                <a:cs typeface="Calibri" pitchFamily="34" charset="-120"/>
-              </a:rPr>
-              <a:t>Matías Pizarro</a:t>
-            </a:r>
-            <a:endParaRPr lang="en-US" sz="1500" dirty="0"/>
-          </a:p>
-        </p:txBody>
-      </p:sp>
-      <p:sp>
-        <p:nvSpPr>
-          <p:cNvPr id="22" name="Text 20"/>
-          <p:cNvSpPr txBox="1"/>
-          <p:nvPr/>
-        </p:nvSpPr>
-        <p:spPr>
-          <a:xfrm>
-            <a:off x="8366760" y="2450592"/>
-            <a:ext cx="3063240" cy="320040"/>
-          </a:xfrm>
-          <a:prstGeom prst="rect">
-            <a:avLst/>
-          </a:prstGeom>
-          <a:noFill/>
-          <a:ln/>
-        </p:spPr>
-        <p:txBody>
-          <a:bodyPr wrap="square" lIns="0" tIns="0" rIns="0" bIns="0" rtlCol="0" anchor="ctr"/>
-          <a:lstStyle/>
-          <a:p>
-            <a:pPr indent="0" marL="0">
-              <a:buNone/>
-            </a:pPr>
-            <a:r>
-              <a:rPr lang="en-US" sz="1150" dirty="0">
-                <a:solidFill>
-                  <a:srgbClr val="FFFFFF"/>
-                </a:solidFill>
-                <a:latin typeface="Calibri" pitchFamily="34" charset="0"/>
-                <a:ea typeface="Calibri" pitchFamily="34" charset="-122"/>
-                <a:cs typeface="Calibri" pitchFamily="34" charset="-120"/>
-              </a:rPr>
-              <a:t>App móvil</a:t>
-            </a:r>
-            <a:endParaRPr lang="en-US" sz="1150" dirty="0"/>
-          </a:p>
-        </p:txBody>
-      </p:sp>
-      <p:sp>
-        <p:nvSpPr>
-          <p:cNvPr id="23" name="Text 21"/>
-          <p:cNvSpPr txBox="1"/>
-          <p:nvPr/>
-        </p:nvSpPr>
-        <p:spPr>
-          <a:xfrm>
-            <a:off x="8366760" y="3017520"/>
-            <a:ext cx="3063240" cy="320040"/>
-          </a:xfrm>
-          <a:prstGeom prst="rect">
-            <a:avLst/>
-          </a:prstGeom>
-          <a:noFill/>
-          <a:ln/>
-        </p:spPr>
-        <p:txBody>
-          <a:bodyPr wrap="square" lIns="0" tIns="0" rIns="0" bIns="0" rtlCol="0" anchor="ctr"/>
-          <a:lstStyle/>
-          <a:p>
-            <a:pPr indent="0" marL="0">
-              <a:buNone/>
-            </a:pPr>
-            <a:r>
-              <a:rPr lang="en-US" sz="1100" b="1" i="1" dirty="0">
-                <a:solidFill>
-                  <a:srgbClr val="02C39A"/>
-                </a:solidFill>
-                <a:latin typeface="Calibri" pitchFamily="34" charset="0"/>
-                <a:ea typeface="Calibri" pitchFamily="34" charset="-122"/>
-                <a:cs typeface="Calibri" pitchFamily="34" charset="-120"/>
-              </a:rPr>
-              <a:t>Flutter / Dart</a:t>
-            </a:r>
-            <a:endParaRPr lang="en-US" sz="1100" dirty="0"/>
-          </a:p>
-        </p:txBody>
-      </p:sp>
-      <p:sp>
-        <p:nvSpPr>
-          <p:cNvPr id="24" name="Text 22"/>
-          <p:cNvSpPr txBox="1"/>
-          <p:nvPr/>
-        </p:nvSpPr>
-        <p:spPr>
-          <a:xfrm>
-            <a:off x="8366760" y="3429000"/>
-            <a:ext cx="3063240" cy="2468880"/>
-          </a:xfrm>
-          <a:prstGeom prst="rect">
-            <a:avLst/>
-          </a:prstGeom>
-          <a:noFill/>
-          <a:ln/>
-        </p:spPr>
-        <p:txBody>
-          <a:bodyPr wrap="square" lIns="0" tIns="0" rIns="0" bIns="0" rtlCol="0" anchor="t"/>
-          <a:lstStyle/>
-          <a:p>
-            <a:pPr indent="0" marL="0">
-              <a:lnSpc>
-                <a:spcPct val="120000"/>
-              </a:lnSpc>
-              <a:buNone/>
-            </a:pPr>
-            <a:r>
-              <a:rPr lang="en-US" sz="1150" dirty="0">
-                <a:solidFill>
-                  <a:srgbClr val="0B2B2E"/>
-                </a:solidFill>
-                <a:latin typeface="Calibri" pitchFamily="34" charset="0"/>
-                <a:ea typeface="Calibri" pitchFamily="34" charset="-122"/>
-                <a:cs typeface="Calibri" pitchFamily="34" charset="-120"/>
-              </a:rPr>
-              <a:t>Interfaz para titular y perfiles dependientes, experiencia de usuario accesible</a:t>
-            </a:r>
-            <a:endParaRPr lang="en-US" sz="1150" dirty="0"/>
-          </a:p>
-        </p:txBody>
-      </p:sp>
-      <p:sp>
-        <p:nvSpPr>
-          <p:cNvPr id="25" name="Text 23"/>
-          <p:cNvSpPr txBox="1"/>
-          <p:nvPr/>
-        </p:nvSpPr>
-        <p:spPr>
-          <a:xfrm>
-            <a:off x="457200" y="6510528"/>
-            <a:ext cx="7315200" cy="274320"/>
-          </a:xfrm>
-          <a:prstGeom prst="rect">
-            <a:avLst/>
-          </a:prstGeom>
-          <a:noFill/>
-          <a:ln/>
-        </p:spPr>
-        <p:txBody>
-          <a:bodyPr wrap="square" lIns="0" tIns="0" rIns="0" bIns="0" rtlCol="0" anchor="ctr"/>
-          <a:lstStyle/>
-          <a:p>
-            <a:pPr algn="l" indent="0" marL="0">
-              <a:buNone/>
-            </a:pPr>
-            <a:r>
-              <a:rPr lang="en-US" sz="900" dirty="0">
-                <a:solidFill>
-                  <a:srgbClr val="5C7A7C"/>
-                </a:solidFill>
-                <a:latin typeface="Calibri" pitchFamily="34" charset="0"/>
-                <a:ea typeface="Calibri" pitchFamily="34" charset="-122"/>
-                <a:cs typeface="Calibri" pitchFamily="34" charset="-120"/>
-              </a:rPr>
-              <a:t>Perfil Médico+  ·  Capstone_005D · Grupo 7  ·  PTY4614</a:t>
-            </a:r>
-            <a:endParaRPr lang="en-US" sz="900" dirty="0"/>
-          </a:p>
-        </p:txBody>
-      </p:sp>
-      <p:sp>
-        <p:nvSpPr>
-          <p:cNvPr id="26" name="Text 24"/>
-          <p:cNvSpPr txBox="1"/>
-          <p:nvPr/>
-        </p:nvSpPr>
-        <p:spPr>
-          <a:xfrm>
-            <a:off x="11521440" y="6510528"/>
-            <a:ext cx="457200" cy="274320"/>
-          </a:xfrm>
-          <a:prstGeom prst="rect">
-            <a:avLst/>
-          </a:prstGeom>
-          <a:noFill/>
-          <a:ln/>
-        </p:spPr>
-        <p:txBody>
-          <a:bodyPr wrap="square" lIns="0" tIns="0" rIns="0" bIns="0" rtlCol="0" anchor="ctr"/>
-          <a:lstStyle/>
-          <a:p>
-            <a:pPr algn="r" indent="0" marL="0">
-              <a:buNone/>
-            </a:pPr>
-            <a:r>
-              <a:rPr lang="en-US" sz="900" dirty="0">
-                <a:solidFill>
-                  <a:srgbClr val="5C7A7C"/>
-                </a:solidFill>
-                <a:latin typeface="Calibri" pitchFamily="34" charset="0"/>
-                <a:ea typeface="Calibri" pitchFamily="34" charset="-122"/>
-                <a:cs typeface="Calibri" pitchFamily="34" charset="-120"/>
-              </a:rPr>
               <a:t>12</a:t>
             </a:r>
             <a:endParaRPr lang="en-US" sz="900" dirty="0"/>
@@ -6343,7 +6153,7 @@
         <p:spPr>
           <a:xfrm>
             <a:off x="548640" y="457200"/>
-            <a:ext cx="7315200" cy="640080"/>
+            <a:ext cx="10058400" cy="640080"/>
           </a:xfrm>
           <a:prstGeom prst="rect">
             <a:avLst/>
@@ -6359,7 +6169,7 @@
               <a:buNone/>
             </a:pPr>
             <a:r>
-              <a:rPr lang="en-US" sz="3200" b="1" dirty="0">
+              <a:rPr lang="en-US" sz="3000" b="1" dirty="0">
                 <a:solidFill>
                   <a:srgbClr val="0B3D42"/>
                 </a:solidFill>
@@ -6367,9 +6177,9 @@
                 <a:ea typeface="Cambria" pitchFamily="34" charset="-122"/>
                 <a:cs typeface="Cambria" pitchFamily="34" charset="-120"/>
               </a:rPr>
-              <a:t>Plan de trabajo</a:t>
-            </a:r>
-            <a:endParaRPr lang="en-US" sz="3200" dirty="0"/>
+              <a:t>Metodología de trabajo y roles</a:t>
+            </a:r>
+            <a:endParaRPr lang="en-US" sz="3000" dirty="0"/>
           </a:p>
         </p:txBody>
       </p:sp>
@@ -6381,8 +6191,8 @@
         </p:nvSpPr>
         <p:spPr>
           <a:xfrm>
-            <a:off x="548640" y="1115568"/>
-            <a:ext cx="7315200" cy="365760"/>
+            <a:off x="548640" y="1170432"/>
+            <a:ext cx="10881360" cy="594360"/>
           </a:xfrm>
           <a:prstGeom prst="rect">
             <a:avLst/>
@@ -6406,7 +6216,7 @@
                 <a:ea typeface="Calibri" pitchFamily="34" charset="-122"/>
                 <a:cs typeface="Calibri" pitchFamily="34" charset="-120"/>
               </a:rPr>
-              <a:t>Semestre de 18 semanas · 3 fases</a:t>
+              <a:t>Trabajo ágil (Scrum), con sprints quincenales durante la Fase 2: Sprint Planning, seguimiento breve, demo de cierre y retrospectiva. Una historia se considera terminada (Definition of Done) cuando está integrada, probada y documentada en GitHub.</a:t>
             </a:r>
             <a:endParaRPr lang="en-US" sz="1300" dirty="0"/>
           </a:p>
@@ -6420,491 +6230,12 @@
         </p:nvSpPr>
         <p:spPr>
           <a:xfrm>
-            <a:off x="548640" y="1828800"/>
-            <a:ext cx="2458720" cy="777240"/>
+            <a:off x="548640" y="2011680"/>
+            <a:ext cx="3520440" cy="4114800"/>
           </a:xfrm>
           <a:prstGeom prst="roundRect">
             <a:avLst>
-              <a:gd name="adj" fmla="val 7059"/>
-            </a:avLst>
-          </a:prstGeom>
-          <a:solidFill>
-            <a:srgbClr val="028090"/>
-          </a:solidFill>
-          <a:ln/>
-        </p:spPr>
-      </p:sp>
-      <p:sp>
-        <p:nvSpPr>
-          <p:cNvPr id="5" name="Text 3"/>
-          <p:cNvSpPr txBox="1"/>
-          <p:nvPr/>
-        </p:nvSpPr>
-        <p:spPr>
-          <a:xfrm>
-            <a:off x="640080" y="1883664"/>
-            <a:ext cx="2275840" cy="320040"/>
-          </a:xfrm>
-          <a:prstGeom prst="rect">
-            <a:avLst/>
-          </a:prstGeom>
-          <a:noFill/>
-          <a:ln/>
-        </p:spPr>
-        <p:txBody>
-          <a:bodyPr wrap="square" lIns="0" tIns="0" rIns="0" bIns="0" rtlCol="0" anchor="ctr"/>
-          <a:lstStyle/>
-          <a:p>
-            <a:pPr indent="0" marL="0">
-              <a:buNone/>
-            </a:pPr>
-            <a:r>
-              <a:rPr lang="en-US" sz="1300" b="1" dirty="0">
-                <a:solidFill>
-                  <a:srgbClr val="FFFFFF"/>
-                </a:solidFill>
-                <a:latin typeface="Calibri" pitchFamily="34" charset="0"/>
-                <a:ea typeface="Calibri" pitchFamily="34" charset="-122"/>
-                <a:cs typeface="Calibri" pitchFamily="34" charset="-120"/>
-              </a:rPr>
-              <a:t>Fase 1</a:t>
-            </a:r>
-            <a:endParaRPr lang="en-US" sz="1300" dirty="0"/>
-          </a:p>
-        </p:txBody>
-      </p:sp>
-      <p:sp>
-        <p:nvSpPr>
-          <p:cNvPr id="6" name="Text 4"/>
-          <p:cNvSpPr txBox="1"/>
-          <p:nvPr/>
-        </p:nvSpPr>
-        <p:spPr>
-          <a:xfrm>
-            <a:off x="640080" y="2194560"/>
-            <a:ext cx="2275840" cy="274320"/>
-          </a:xfrm>
-          <a:prstGeom prst="rect">
-            <a:avLst/>
-          </a:prstGeom>
-          <a:noFill/>
-          <a:ln/>
-        </p:spPr>
-        <p:txBody>
-          <a:bodyPr wrap="square" lIns="0" tIns="0" rIns="0" bIns="0" rtlCol="0" anchor="ctr"/>
-          <a:lstStyle/>
-          <a:p>
-            <a:pPr indent="0" marL="0">
-              <a:buNone/>
-            </a:pPr>
-            <a:r>
-              <a:rPr lang="en-US" sz="950" dirty="0">
-                <a:solidFill>
-                  <a:srgbClr val="FFFFFF"/>
-                </a:solidFill>
-                <a:latin typeface="Calibri" pitchFamily="34" charset="0"/>
-                <a:ea typeface="Calibri" pitchFamily="34" charset="-122"/>
-                <a:cs typeface="Calibri" pitchFamily="34" charset="-120"/>
-              </a:rPr>
-              <a:t>Definición</a:t>
-            </a:r>
-            <a:endParaRPr lang="en-US" sz="950" dirty="0"/>
-          </a:p>
-        </p:txBody>
-      </p:sp>
-      <p:sp>
-        <p:nvSpPr>
-          <p:cNvPr id="7" name="Text 5"/>
-          <p:cNvSpPr txBox="1"/>
-          <p:nvPr/>
-        </p:nvSpPr>
-        <p:spPr>
-          <a:xfrm>
-            <a:off x="640080" y="2395728"/>
-            <a:ext cx="2275840" cy="228600"/>
-          </a:xfrm>
-          <a:prstGeom prst="rect">
-            <a:avLst/>
-          </a:prstGeom>
-          <a:noFill/>
-          <a:ln/>
-        </p:spPr>
-        <p:txBody>
-          <a:bodyPr wrap="square" lIns="0" tIns="0" rIns="0" bIns="0" rtlCol="0" anchor="ctr"/>
-          <a:lstStyle/>
-          <a:p>
-            <a:pPr indent="0" marL="0">
-              <a:buNone/>
-            </a:pPr>
-            <a:r>
-              <a:rPr lang="en-US" sz="900" i="1" dirty="0">
-                <a:solidFill>
-                  <a:srgbClr val="FFFFFF"/>
-                </a:solidFill>
-                <a:latin typeface="Calibri" pitchFamily="34" charset="0"/>
-                <a:ea typeface="Calibri" pitchFamily="34" charset="-122"/>
-                <a:cs typeface="Calibri" pitchFamily="34" charset="-120"/>
-              </a:rPr>
-              <a:t>S1 – S4</a:t>
-            </a:r>
-            <a:endParaRPr lang="en-US" sz="900" dirty="0"/>
-          </a:p>
-        </p:txBody>
-      </p:sp>
-      <p:sp>
-        <p:nvSpPr>
-          <p:cNvPr id="8" name="Shape 6"/>
-          <p:cNvSpPr/>
-          <p:nvPr/>
-        </p:nvSpPr>
-        <p:spPr>
-          <a:xfrm>
-            <a:off x="3007360" y="1828800"/>
-            <a:ext cx="6761480" cy="777240"/>
-          </a:xfrm>
-          <a:prstGeom prst="roundRect">
-            <a:avLst>
-              <a:gd name="adj" fmla="val 7059"/>
-            </a:avLst>
-          </a:prstGeom>
-          <a:solidFill>
-            <a:srgbClr val="00A896"/>
-          </a:solidFill>
-          <a:ln/>
-        </p:spPr>
-      </p:sp>
-      <p:sp>
-        <p:nvSpPr>
-          <p:cNvPr id="9" name="Text 7"/>
-          <p:cNvSpPr txBox="1"/>
-          <p:nvPr/>
-        </p:nvSpPr>
-        <p:spPr>
-          <a:xfrm>
-            <a:off x="3098800" y="1883664"/>
-            <a:ext cx="6578600" cy="320040"/>
-          </a:xfrm>
-          <a:prstGeom prst="rect">
-            <a:avLst/>
-          </a:prstGeom>
-          <a:noFill/>
-          <a:ln/>
-        </p:spPr>
-        <p:txBody>
-          <a:bodyPr wrap="square" lIns="0" tIns="0" rIns="0" bIns="0" rtlCol="0" anchor="ctr"/>
-          <a:lstStyle/>
-          <a:p>
-            <a:pPr indent="0" marL="0">
-              <a:buNone/>
-            </a:pPr>
-            <a:r>
-              <a:rPr lang="en-US" sz="1300" b="1" dirty="0">
-                <a:solidFill>
-                  <a:srgbClr val="FFFFFF"/>
-                </a:solidFill>
-                <a:latin typeface="Calibri" pitchFamily="34" charset="0"/>
-                <a:ea typeface="Calibri" pitchFamily="34" charset="-122"/>
-                <a:cs typeface="Calibri" pitchFamily="34" charset="-120"/>
-              </a:rPr>
-              <a:t>Fase 2</a:t>
-            </a:r>
-            <a:endParaRPr lang="en-US" sz="1300" dirty="0"/>
-          </a:p>
-        </p:txBody>
-      </p:sp>
-      <p:sp>
-        <p:nvSpPr>
-          <p:cNvPr id="10" name="Text 8"/>
-          <p:cNvSpPr txBox="1"/>
-          <p:nvPr/>
-        </p:nvSpPr>
-        <p:spPr>
-          <a:xfrm>
-            <a:off x="3098800" y="2194560"/>
-            <a:ext cx="6578600" cy="274320"/>
-          </a:xfrm>
-          <a:prstGeom prst="rect">
-            <a:avLst/>
-          </a:prstGeom>
-          <a:noFill/>
-          <a:ln/>
-        </p:spPr>
-        <p:txBody>
-          <a:bodyPr wrap="square" lIns="0" tIns="0" rIns="0" bIns="0" rtlCol="0" anchor="ctr"/>
-          <a:lstStyle/>
-          <a:p>
-            <a:pPr indent="0" marL="0">
-              <a:buNone/>
-            </a:pPr>
-            <a:r>
-              <a:rPr lang="en-US" sz="950" dirty="0">
-                <a:solidFill>
-                  <a:srgbClr val="FFFFFF"/>
-                </a:solidFill>
-                <a:latin typeface="Calibri" pitchFamily="34" charset="0"/>
-                <a:ea typeface="Calibri" pitchFamily="34" charset="-122"/>
-                <a:cs typeface="Calibri" pitchFamily="34" charset="-120"/>
-              </a:rPr>
-              <a:t>Desarrollo (6 sprints)</a:t>
-            </a:r>
-            <a:endParaRPr lang="en-US" sz="950" dirty="0"/>
-          </a:p>
-        </p:txBody>
-      </p:sp>
-      <p:sp>
-        <p:nvSpPr>
-          <p:cNvPr id="11" name="Text 9"/>
-          <p:cNvSpPr txBox="1"/>
-          <p:nvPr/>
-        </p:nvSpPr>
-        <p:spPr>
-          <a:xfrm>
-            <a:off x="3098800" y="2395728"/>
-            <a:ext cx="6578600" cy="228600"/>
-          </a:xfrm>
-          <a:prstGeom prst="rect">
-            <a:avLst/>
-          </a:prstGeom>
-          <a:noFill/>
-          <a:ln/>
-        </p:spPr>
-        <p:txBody>
-          <a:bodyPr wrap="square" lIns="0" tIns="0" rIns="0" bIns="0" rtlCol="0" anchor="ctr"/>
-          <a:lstStyle/>
-          <a:p>
-            <a:pPr indent="0" marL="0">
-              <a:buNone/>
-            </a:pPr>
-            <a:r>
-              <a:rPr lang="en-US" sz="900" i="1" dirty="0">
-                <a:solidFill>
-                  <a:srgbClr val="FFFFFF"/>
-                </a:solidFill>
-                <a:latin typeface="Calibri" pitchFamily="34" charset="0"/>
-                <a:ea typeface="Calibri" pitchFamily="34" charset="-122"/>
-                <a:cs typeface="Calibri" pitchFamily="34" charset="-120"/>
-              </a:rPr>
-              <a:t>S5 – S15</a:t>
-            </a:r>
-            <a:endParaRPr lang="en-US" sz="900" dirty="0"/>
-          </a:p>
-        </p:txBody>
-      </p:sp>
-      <p:sp>
-        <p:nvSpPr>
-          <p:cNvPr id="12" name="Shape 10"/>
-          <p:cNvSpPr/>
-          <p:nvPr/>
-        </p:nvSpPr>
-        <p:spPr>
-          <a:xfrm>
-            <a:off x="9768840" y="1828800"/>
-            <a:ext cx="1844040" cy="777240"/>
-          </a:xfrm>
-          <a:prstGeom prst="roundRect">
-            <a:avLst>
-              <a:gd name="adj" fmla="val 7059"/>
-            </a:avLst>
-          </a:prstGeom>
-          <a:solidFill>
-            <a:srgbClr val="02C39A"/>
-          </a:solidFill>
-          <a:ln/>
-        </p:spPr>
-      </p:sp>
-      <p:sp>
-        <p:nvSpPr>
-          <p:cNvPr id="13" name="Text 11"/>
-          <p:cNvSpPr txBox="1"/>
-          <p:nvPr/>
-        </p:nvSpPr>
-        <p:spPr>
-          <a:xfrm>
-            <a:off x="9860280" y="1883664"/>
-            <a:ext cx="1661160" cy="320040"/>
-          </a:xfrm>
-          <a:prstGeom prst="rect">
-            <a:avLst/>
-          </a:prstGeom>
-          <a:noFill/>
-          <a:ln/>
-        </p:spPr>
-        <p:txBody>
-          <a:bodyPr wrap="square" lIns="0" tIns="0" rIns="0" bIns="0" rtlCol="0" anchor="ctr"/>
-          <a:lstStyle/>
-          <a:p>
-            <a:pPr indent="0" marL="0">
-              <a:buNone/>
-            </a:pPr>
-            <a:r>
-              <a:rPr lang="en-US" sz="1300" b="1" dirty="0">
-                <a:solidFill>
-                  <a:srgbClr val="FFFFFF"/>
-                </a:solidFill>
-                <a:latin typeface="Calibri" pitchFamily="34" charset="0"/>
-                <a:ea typeface="Calibri" pitchFamily="34" charset="-122"/>
-                <a:cs typeface="Calibri" pitchFamily="34" charset="-120"/>
-              </a:rPr>
-              <a:t>Fase 3</a:t>
-            </a:r>
-            <a:endParaRPr lang="en-US" sz="1300" dirty="0"/>
-          </a:p>
-        </p:txBody>
-      </p:sp>
-      <p:sp>
-        <p:nvSpPr>
-          <p:cNvPr id="14" name="Text 12"/>
-          <p:cNvSpPr txBox="1"/>
-          <p:nvPr/>
-        </p:nvSpPr>
-        <p:spPr>
-          <a:xfrm>
-            <a:off x="9860280" y="2194560"/>
-            <a:ext cx="1661160" cy="274320"/>
-          </a:xfrm>
-          <a:prstGeom prst="rect">
-            <a:avLst/>
-          </a:prstGeom>
-          <a:noFill/>
-          <a:ln/>
-        </p:spPr>
-        <p:txBody>
-          <a:bodyPr wrap="square" lIns="0" tIns="0" rIns="0" bIns="0" rtlCol="0" anchor="ctr"/>
-          <a:lstStyle/>
-          <a:p>
-            <a:pPr indent="0" marL="0">
-              <a:buNone/>
-            </a:pPr>
-            <a:r>
-              <a:rPr lang="en-US" sz="950" dirty="0">
-                <a:solidFill>
-                  <a:srgbClr val="FFFFFF"/>
-                </a:solidFill>
-                <a:latin typeface="Calibri" pitchFamily="34" charset="0"/>
-                <a:ea typeface="Calibri" pitchFamily="34" charset="-122"/>
-                <a:cs typeface="Calibri" pitchFamily="34" charset="-120"/>
-              </a:rPr>
-              <a:t>Presentación</a:t>
-            </a:r>
-            <a:endParaRPr lang="en-US" sz="950" dirty="0"/>
-          </a:p>
-        </p:txBody>
-      </p:sp>
-      <p:sp>
-        <p:nvSpPr>
-          <p:cNvPr id="15" name="Text 13"/>
-          <p:cNvSpPr txBox="1"/>
-          <p:nvPr/>
-        </p:nvSpPr>
-        <p:spPr>
-          <a:xfrm>
-            <a:off x="9860280" y="2395728"/>
-            <a:ext cx="1661160" cy="228600"/>
-          </a:xfrm>
-          <a:prstGeom prst="rect">
-            <a:avLst/>
-          </a:prstGeom>
-          <a:noFill/>
-          <a:ln/>
-        </p:spPr>
-        <p:txBody>
-          <a:bodyPr wrap="square" lIns="0" tIns="0" rIns="0" bIns="0" rtlCol="0" anchor="ctr"/>
-          <a:lstStyle/>
-          <a:p>
-            <a:pPr indent="0" marL="0">
-              <a:buNone/>
-            </a:pPr>
-            <a:r>
-              <a:rPr lang="en-US" sz="900" i="1" dirty="0">
-                <a:solidFill>
-                  <a:srgbClr val="FFFFFF"/>
-                </a:solidFill>
-                <a:latin typeface="Calibri" pitchFamily="34" charset="0"/>
-                <a:ea typeface="Calibri" pitchFamily="34" charset="-122"/>
-                <a:cs typeface="Calibri" pitchFamily="34" charset="-120"/>
-              </a:rPr>
-              <a:t>S16 – S18</a:t>
-            </a:r>
-            <a:endParaRPr lang="en-US" sz="900" dirty="0"/>
-          </a:p>
-        </p:txBody>
-      </p:sp>
-      <p:sp>
-        <p:nvSpPr>
-          <p:cNvPr id="16" name="Shape 14"/>
-          <p:cNvSpPr/>
-          <p:nvPr/>
-        </p:nvSpPr>
-        <p:spPr>
-          <a:xfrm>
-            <a:off x="3007360" y="1691640"/>
-            <a:ext cx="0" cy="1051560"/>
-          </a:xfrm>
-          <a:prstGeom prst="line">
-            <a:avLst/>
-          </a:prstGeom>
-          <a:noFill/>
-          <a:ln w="25400">
-            <a:solidFill>
-              <a:srgbClr val="0B3D42"/>
-            </a:solidFill>
-            <a:prstDash val="dash"/>
-          </a:ln>
-        </p:spPr>
-      </p:sp>
-      <p:sp>
-        <p:nvSpPr>
-          <p:cNvPr id="17" name="Text 15"/>
-          <p:cNvSpPr txBox="1"/>
-          <p:nvPr/>
-        </p:nvSpPr>
-        <p:spPr>
-          <a:xfrm>
-            <a:off x="2367280" y="1325880"/>
-            <a:ext cx="1280160" cy="320040"/>
-          </a:xfrm>
-          <a:prstGeom prst="rect">
-            <a:avLst/>
-          </a:prstGeom>
-          <a:noFill/>
-          <a:ln/>
-        </p:spPr>
-        <p:txBody>
-          <a:bodyPr wrap="square" lIns="0" tIns="0" rIns="0" bIns="0" rtlCol="0" anchor="ctr"/>
-          <a:lstStyle/>
-          <a:p>
-            <a:pPr algn="ctr" indent="0" marL="0">
-              <a:buNone/>
-            </a:pPr>
-            <a:r>
-              <a:rPr lang="en-US" sz="1000" b="1" dirty="0">
-                <a:solidFill>
-                  <a:srgbClr val="0B3D42"/>
-                </a:solidFill>
-                <a:latin typeface="Calibri" pitchFamily="34" charset="0"/>
-                <a:ea typeface="Calibri" pitchFamily="34" charset="-122"/>
-                <a:cs typeface="Calibri" pitchFamily="34" charset="-120"/>
-              </a:rPr>
-              <a:t>Estamos aquí</a:t>
-            </a:r>
-            <a:endParaRPr lang="en-US" sz="1000" dirty="0"/>
-          </a:p>
-        </p:txBody>
-      </p:sp>
-      <p:sp>
-        <p:nvSpPr>
-          <p:cNvPr id="18" name="Shape 16"/>
-          <p:cNvSpPr/>
-          <p:nvPr/>
-        </p:nvSpPr>
-        <p:spPr>
-          <a:xfrm>
-            <a:off x="548640" y="2971800"/>
-            <a:ext cx="3535680" cy="868680"/>
-          </a:xfrm>
-          <a:prstGeom prst="roundRect">
-            <a:avLst>
-              <a:gd name="adj" fmla="val 7368"/>
+              <a:gd name="adj" fmla="val 2597"/>
             </a:avLst>
           </a:prstGeom>
           <a:solidFill>
@@ -6916,18 +6247,67 @@
             </a:solidFill>
             <a:prstDash val="solid"/>
           </a:ln>
-        </p:spPr>
-      </p:sp>
-      <p:sp>
-        <p:nvSpPr>
-          <p:cNvPr id="19" name="Text 17"/>
-          <p:cNvSpPr txBox="1"/>
-          <p:nvPr/>
-        </p:nvSpPr>
-        <p:spPr>
-          <a:xfrm>
-            <a:off x="685800" y="3044952"/>
-            <a:ext cx="3261360" cy="274320"/>
+          <a:effectLst>
+            <a:outerShdw sx="100000" sy="100000" kx="0" ky="0" algn="bl" rotWithShape="0" blurRad="76200" dist="25400" dir="5400000">
+              <a:srgbClr val="1F3A3C">
+                <a:alpha val="13000"/>
+              </a:srgbClr>
+            </a:outerShdw>
+          </a:effectLst>
+        </p:spPr>
+      </p:sp>
+      <p:sp>
+        <p:nvSpPr>
+          <p:cNvPr id="5" name="Shape 3"/>
+          <p:cNvSpPr/>
+          <p:nvPr/>
+        </p:nvSpPr>
+        <p:spPr>
+          <a:xfrm>
+            <a:off x="548640" y="2011680"/>
+            <a:ext cx="3520440" cy="822960"/>
+          </a:xfrm>
+          <a:prstGeom prst="roundRect">
+            <a:avLst>
+              <a:gd name="adj" fmla="val 11111"/>
+            </a:avLst>
+          </a:prstGeom>
+          <a:solidFill>
+            <a:srgbClr val="028090"/>
+          </a:solidFill>
+          <a:ln/>
+        </p:spPr>
+      </p:sp>
+      <p:sp>
+        <p:nvSpPr>
+          <p:cNvPr id="6" name="Shape 4"/>
+          <p:cNvSpPr/>
+          <p:nvPr/>
+        </p:nvSpPr>
+        <p:spPr>
+          <a:xfrm>
+            <a:off x="548640" y="2423160"/>
+            <a:ext cx="3520440" cy="411480"/>
+          </a:xfrm>
+          <a:prstGeom prst="rect">
+            <a:avLst/>
+          </a:prstGeom>
+          <a:solidFill>
+            <a:srgbClr val="028090"/>
+          </a:solidFill>
+          <a:ln/>
+        </p:spPr>
+      </p:sp>
+      <p:sp>
+        <p:nvSpPr>
+          <p:cNvPr id="7" name="Text 5"/>
+          <p:cNvSpPr txBox="1"/>
+          <p:nvPr/>
+        </p:nvSpPr>
+        <p:spPr>
+          <a:xfrm>
+            <a:off x="777240" y="2121408"/>
+            <a:ext cx="3063240" cy="365760"/>
           </a:xfrm>
           <a:prstGeom prst="rect">
             <a:avLst/>
@@ -6943,7 +6323,85 @@
               <a:buNone/>
             </a:pPr>
             <a:r>
-              <a:rPr lang="en-US" sz="1150" b="1" dirty="0">
+              <a:rPr lang="en-US" sz="1500" b="1" dirty="0">
+                <a:solidFill>
+                  <a:srgbClr val="FFFFFF"/>
+                </a:solidFill>
+                <a:latin typeface="Calibri" pitchFamily="34" charset="0"/>
+                <a:ea typeface="Calibri" pitchFamily="34" charset="-122"/>
+                <a:cs typeface="Calibri" pitchFamily="34" charset="-120"/>
+              </a:rPr>
+              <a:t>Benjamín Leiva</a:t>
+            </a:r>
+            <a:endParaRPr lang="en-US" sz="1500" dirty="0"/>
+          </a:p>
+        </p:txBody>
+      </p:sp>
+      <p:sp>
+        <p:nvSpPr>
+          <p:cNvPr id="8" name="Text 6"/>
+          <p:cNvSpPr txBox="1"/>
+          <p:nvPr/>
+        </p:nvSpPr>
+        <p:spPr>
+          <a:xfrm>
+            <a:off x="777240" y="2450592"/>
+            <a:ext cx="3063240" cy="320040"/>
+          </a:xfrm>
+          <a:prstGeom prst="rect">
+            <a:avLst/>
+          </a:prstGeom>
+          <a:noFill/>
+          <a:ln/>
+        </p:spPr>
+        <p:txBody>
+          <a:bodyPr wrap="square" lIns="0" tIns="0" rIns="0" bIns="0" rtlCol="0" anchor="ctr"/>
+          <a:lstStyle/>
+          <a:p>
+            <a:pPr indent="0" marL="0">
+              <a:buNone/>
+            </a:pPr>
+            <a:r>
+              <a:rPr lang="en-US" sz="1150" dirty="0">
+                <a:solidFill>
+                  <a:srgbClr val="FFFFFF"/>
+                </a:solidFill>
+                <a:latin typeface="Calibri" pitchFamily="34" charset="0"/>
+                <a:ea typeface="Calibri" pitchFamily="34" charset="-122"/>
+                <a:cs typeface="Calibri" pitchFamily="34" charset="-120"/>
+              </a:rPr>
+              <a:t>Backend</a:t>
+            </a:r>
+            <a:endParaRPr lang="en-US" sz="1150" dirty="0"/>
+          </a:p>
+        </p:txBody>
+      </p:sp>
+      <p:sp>
+        <p:nvSpPr>
+          <p:cNvPr id="9" name="Text 7"/>
+          <p:cNvSpPr txBox="1"/>
+          <p:nvPr/>
+        </p:nvSpPr>
+        <p:spPr>
+          <a:xfrm>
+            <a:off x="777240" y="3017520"/>
+            <a:ext cx="3063240" cy="320040"/>
+          </a:xfrm>
+          <a:prstGeom prst="rect">
+            <a:avLst/>
+          </a:prstGeom>
+          <a:noFill/>
+          <a:ln/>
+        </p:spPr>
+        <p:txBody>
+          <a:bodyPr wrap="square" lIns="0" tIns="0" rIns="0" bIns="0" rtlCol="0" anchor="ctr"/>
+          <a:lstStyle/>
+          <a:p>
+            <a:pPr indent="0" marL="0">
+              <a:buNone/>
+            </a:pPr>
+            <a:r>
+              <a:rPr lang="en-US" sz="1100" b="1" i="1" dirty="0">
                 <a:solidFill>
                   <a:srgbClr val="028090"/>
                 </a:solidFill>
@@ -6951,41 +6409,41 @@
                 <a:ea typeface="Calibri" pitchFamily="34" charset="-122"/>
                 <a:cs typeface="Calibri" pitchFamily="34" charset="-120"/>
               </a:rPr>
-              <a:t>Sprint 1 (S5-6)</a:t>
-            </a:r>
-            <a:endParaRPr lang="en-US" sz="1150" dirty="0"/>
-          </a:p>
-        </p:txBody>
-      </p:sp>
-      <p:sp>
-        <p:nvSpPr>
-          <p:cNvPr id="20" name="Text 18"/>
-          <p:cNvSpPr txBox="1"/>
-          <p:nvPr/>
-        </p:nvSpPr>
-        <p:spPr>
-          <a:xfrm>
-            <a:off x="685800" y="3319272"/>
-            <a:ext cx="3261360" cy="457200"/>
-          </a:xfrm>
-          <a:prstGeom prst="rect">
-            <a:avLst/>
-          </a:prstGeom>
-          <a:noFill/>
-          <a:ln/>
-        </p:spPr>
-        <p:txBody>
-          <a:bodyPr wrap="square" lIns="0" tIns="0" rIns="0" bIns="0" rtlCol="0" anchor="ctr"/>
+              <a:t>Python + FastAPI</a:t>
+            </a:r>
+            <a:endParaRPr lang="en-US" sz="1100" dirty="0"/>
+          </a:p>
+        </p:txBody>
+      </p:sp>
+      <p:sp>
+        <p:nvSpPr>
+          <p:cNvPr id="10" name="Text 8"/>
+          <p:cNvSpPr txBox="1"/>
+          <p:nvPr/>
+        </p:nvSpPr>
+        <p:spPr>
+          <a:xfrm>
+            <a:off x="777240" y="3429000"/>
+            <a:ext cx="3063240" cy="2468880"/>
+          </a:xfrm>
+          <a:prstGeom prst="rect">
+            <a:avLst/>
+          </a:prstGeom>
+          <a:noFill/>
+          <a:ln/>
+        </p:spPr>
+        <p:txBody>
+          <a:bodyPr wrap="square" lIns="0" tIns="0" rIns="0" bIns="0" rtlCol="0" anchor="t"/>
           <a:lstStyle/>
           <a:p>
             <a:pPr indent="0" marL="0">
               <a:lnSpc>
-                <a:spcPct val="105000"/>
+                <a:spcPct val="120000"/>
               </a:lnSpc>
               <a:buNone/>
             </a:pPr>
             <a:r>
-              <a:rPr lang="en-US" sz="1000" dirty="0">
+              <a:rPr lang="en-US" sz="1150" dirty="0">
                 <a:solidFill>
                   <a:srgbClr val="0B2B2E"/>
                 </a:solidFill>
@@ -6993,26 +6451,26 @@
                 <a:ea typeface="Calibri" pitchFamily="34" charset="-122"/>
                 <a:cs typeface="Calibri" pitchFamily="34" charset="-120"/>
               </a:rPr>
-              <a:t>Autenticación, modelo de datos, estructura base app</a:t>
-            </a:r>
-            <a:endParaRPr lang="en-US" sz="1000" dirty="0"/>
-          </a:p>
-        </p:txBody>
-      </p:sp>
-      <p:sp>
-        <p:nvSpPr>
-          <p:cNvPr id="21" name="Shape 19"/>
+              <a:t>API REST, autenticación JWT, lógica de negocio, orquestación de la API de IA (consultas y manejo de errores) e integración de notificaciones</a:t>
+            </a:r>
+            <a:endParaRPr lang="en-US" sz="1150" dirty="0"/>
+          </a:p>
+        </p:txBody>
+      </p:sp>
+      <p:sp>
+        <p:nvSpPr>
+          <p:cNvPr id="11" name="Shape 9"/>
           <p:cNvSpPr/>
           <p:nvPr/>
         </p:nvSpPr>
         <p:spPr>
           <a:xfrm>
-            <a:off x="4312920" y="2971800"/>
-            <a:ext cx="3535680" cy="868680"/>
+            <a:off x="4343400" y="2011680"/>
+            <a:ext cx="3520440" cy="4114800"/>
           </a:xfrm>
           <a:prstGeom prst="roundRect">
             <a:avLst>
-              <a:gd name="adj" fmla="val 7368"/>
+              <a:gd name="adj" fmla="val 2597"/>
             </a:avLst>
           </a:prstGeom>
           <a:solidFill>
@@ -7024,18 +6482,67 @@
             </a:solidFill>
             <a:prstDash val="solid"/>
           </a:ln>
-        </p:spPr>
-      </p:sp>
-      <p:sp>
-        <p:nvSpPr>
-          <p:cNvPr id="22" name="Text 20"/>
-          <p:cNvSpPr txBox="1"/>
-          <p:nvPr/>
-        </p:nvSpPr>
-        <p:spPr>
-          <a:xfrm>
-            <a:off x="4450080" y="3044952"/>
-            <a:ext cx="3261360" cy="274320"/>
+          <a:effectLst>
+            <a:outerShdw sx="100000" sy="100000" kx="0" ky="0" algn="bl" rotWithShape="0" blurRad="76200" dist="25400" dir="5400000">
+              <a:srgbClr val="1F3A3C">
+                <a:alpha val="13000"/>
+              </a:srgbClr>
+            </a:outerShdw>
+          </a:effectLst>
+        </p:spPr>
+      </p:sp>
+      <p:sp>
+        <p:nvSpPr>
+          <p:cNvPr id="12" name="Shape 10"/>
+          <p:cNvSpPr/>
+          <p:nvPr/>
+        </p:nvSpPr>
+        <p:spPr>
+          <a:xfrm>
+            <a:off x="4343400" y="2011680"/>
+            <a:ext cx="3520440" cy="822960"/>
+          </a:xfrm>
+          <a:prstGeom prst="roundRect">
+            <a:avLst>
+              <a:gd name="adj" fmla="val 11111"/>
+            </a:avLst>
+          </a:prstGeom>
+          <a:solidFill>
+            <a:srgbClr val="00A896"/>
+          </a:solidFill>
+          <a:ln/>
+        </p:spPr>
+      </p:sp>
+      <p:sp>
+        <p:nvSpPr>
+          <p:cNvPr id="13" name="Shape 11"/>
+          <p:cNvSpPr/>
+          <p:nvPr/>
+        </p:nvSpPr>
+        <p:spPr>
+          <a:xfrm>
+            <a:off x="4343400" y="2423160"/>
+            <a:ext cx="3520440" cy="411480"/>
+          </a:xfrm>
+          <a:prstGeom prst="rect">
+            <a:avLst/>
+          </a:prstGeom>
+          <a:solidFill>
+            <a:srgbClr val="00A896"/>
+          </a:solidFill>
+          <a:ln/>
+        </p:spPr>
+      </p:sp>
+      <p:sp>
+        <p:nvSpPr>
+          <p:cNvPr id="14" name="Text 12"/>
+          <p:cNvSpPr txBox="1"/>
+          <p:nvPr/>
+        </p:nvSpPr>
+        <p:spPr>
+          <a:xfrm>
+            <a:off x="4572000" y="2121408"/>
+            <a:ext cx="3063240" cy="365760"/>
           </a:xfrm>
           <a:prstGeom prst="rect">
             <a:avLst/>
@@ -7051,15 +6558,54 @@
               <a:buNone/>
             </a:pPr>
             <a:r>
-              <a:rPr lang="en-US" sz="1150" b="1" dirty="0">
-                <a:solidFill>
-                  <a:srgbClr val="028090"/>
-                </a:solidFill>
-                <a:latin typeface="Calibri" pitchFamily="34" charset="0"/>
-                <a:ea typeface="Calibri" pitchFamily="34" charset="-122"/>
-                <a:cs typeface="Calibri" pitchFamily="34" charset="-120"/>
-              </a:rPr>
-              <a:t>Sprint 2 (S7-8)</a:t>
+              <a:rPr lang="en-US" sz="1500" b="1" dirty="0">
+                <a:solidFill>
+                  <a:srgbClr val="FFFFFF"/>
+                </a:solidFill>
+                <a:latin typeface="Calibri" pitchFamily="34" charset="0"/>
+                <a:ea typeface="Calibri" pitchFamily="34" charset="-122"/>
+                <a:cs typeface="Calibri" pitchFamily="34" charset="-120"/>
+              </a:rPr>
+              <a:t>Sergio Ocares</a:t>
+            </a:r>
+            <a:endParaRPr lang="en-US" sz="1500" dirty="0"/>
+          </a:p>
+        </p:txBody>
+      </p:sp>
+      <p:sp>
+        <p:nvSpPr>
+          <p:cNvPr id="15" name="Text 13"/>
+          <p:cNvSpPr txBox="1"/>
+          <p:nvPr/>
+        </p:nvSpPr>
+        <p:spPr>
+          <a:xfrm>
+            <a:off x="4572000" y="2450592"/>
+            <a:ext cx="3063240" cy="320040"/>
+          </a:xfrm>
+          <a:prstGeom prst="rect">
+            <a:avLst/>
+          </a:prstGeom>
+          <a:noFill/>
+          <a:ln/>
+        </p:spPr>
+        <p:txBody>
+          <a:bodyPr wrap="square" lIns="0" tIns="0" rIns="0" bIns="0" rtlCol="0" anchor="ctr"/>
+          <a:lstStyle/>
+          <a:p>
+            <a:pPr indent="0" marL="0">
+              <a:buNone/>
+            </a:pPr>
+            <a:r>
+              <a:rPr lang="en-US" sz="1150" dirty="0">
+                <a:solidFill>
+                  <a:srgbClr val="FFFFFF"/>
+                </a:solidFill>
+                <a:latin typeface="Calibri" pitchFamily="34" charset="0"/>
+                <a:ea typeface="Calibri" pitchFamily="34" charset="-122"/>
+                <a:cs typeface="Calibri" pitchFamily="34" charset="-120"/>
+              </a:rPr>
+              <a:t>Base de datos + IA</a:t>
             </a:r>
             <a:endParaRPr lang="en-US" sz="1150" dirty="0"/>
           </a:p>
@@ -7067,33 +6613,72 @@
       </p:sp>
       <p:sp>
         <p:nvSpPr>
-          <p:cNvPr id="23" name="Text 21"/>
-          <p:cNvSpPr txBox="1"/>
-          <p:nvPr/>
-        </p:nvSpPr>
-        <p:spPr>
-          <a:xfrm>
-            <a:off x="4450080" y="3319272"/>
-            <a:ext cx="3261360" cy="457200"/>
-          </a:xfrm>
-          <a:prstGeom prst="rect">
-            <a:avLst/>
-          </a:prstGeom>
-          <a:noFill/>
-          <a:ln/>
-        </p:spPr>
-        <p:txBody>
-          <a:bodyPr wrap="square" lIns="0" tIns="0" rIns="0" bIns="0" rtlCol="0" anchor="ctr"/>
+          <p:cNvPr id="16" name="Text 14"/>
+          <p:cNvSpPr txBox="1"/>
+          <p:nvPr/>
+        </p:nvSpPr>
+        <p:spPr>
+          <a:xfrm>
+            <a:off x="4572000" y="3017520"/>
+            <a:ext cx="3063240" cy="320040"/>
+          </a:xfrm>
+          <a:prstGeom prst="rect">
+            <a:avLst/>
+          </a:prstGeom>
+          <a:noFill/>
+          <a:ln/>
+        </p:spPr>
+        <p:txBody>
+          <a:bodyPr wrap="square" lIns="0" tIns="0" rIns="0" bIns="0" rtlCol="0" anchor="ctr"/>
+          <a:lstStyle/>
+          <a:p>
+            <a:pPr indent="0" marL="0">
+              <a:buNone/>
+            </a:pPr>
+            <a:r>
+              <a:rPr lang="en-US" sz="1100" b="1" i="1" dirty="0">
+                <a:solidFill>
+                  <a:srgbClr val="00A896"/>
+                </a:solidFill>
+                <a:latin typeface="Calibri" pitchFamily="34" charset="0"/>
+                <a:ea typeface="Calibri" pitchFamily="34" charset="-122"/>
+                <a:cs typeface="Calibri" pitchFamily="34" charset="-120"/>
+              </a:rPr>
+              <a:t>PostgreSQL / API LLM</a:t>
+            </a:r>
+            <a:endParaRPr lang="en-US" sz="1100" dirty="0"/>
+          </a:p>
+        </p:txBody>
+      </p:sp>
+      <p:sp>
+        <p:nvSpPr>
+          <p:cNvPr id="17" name="Text 15"/>
+          <p:cNvSpPr txBox="1"/>
+          <p:nvPr/>
+        </p:nvSpPr>
+        <p:spPr>
+          <a:xfrm>
+            <a:off x="4572000" y="3429000"/>
+            <a:ext cx="3063240" cy="2468880"/>
+          </a:xfrm>
+          <a:prstGeom prst="rect">
+            <a:avLst/>
+          </a:prstGeom>
+          <a:noFill/>
+          <a:ln/>
+        </p:spPr>
+        <p:txBody>
+          <a:bodyPr wrap="square" lIns="0" tIns="0" rIns="0" bIns="0" rtlCol="0" anchor="t"/>
           <a:lstStyle/>
           <a:p>
             <a:pPr indent="0" marL="0">
               <a:lnSpc>
-                <a:spcPct val="105000"/>
+                <a:spcPct val="120000"/>
               </a:lnSpc>
               <a:buNone/>
             </a:pPr>
             <a:r>
-              <a:rPr lang="en-US" sz="1000" dirty="0">
+              <a:rPr lang="en-US" sz="1150" dirty="0">
                 <a:solidFill>
                   <a:srgbClr val="0B2B2E"/>
                 </a:solidFill>
@@ -7101,26 +6686,26 @@
                 <a:ea typeface="Calibri" pitchFamily="34" charset="-122"/>
                 <a:cs typeface="Calibri" pitchFamily="34" charset="-120"/>
               </a:rPr>
-              <a:t>Medicamentos y rutinas: API + UI conectadas</a:t>
-            </a:r>
-            <a:endParaRPr lang="en-US" sz="1000" dirty="0"/>
-          </a:p>
-        </p:txBody>
-      </p:sp>
-      <p:sp>
-        <p:nvSpPr>
-          <p:cNvPr id="24" name="Shape 22"/>
+              <a:t>Modelado de BD, indicadores y reportes de cumplimiento, define el contexto enviado a la IA y almacena sus resultados</a:t>
+            </a:r>
+            <a:endParaRPr lang="en-US" sz="1150" dirty="0"/>
+          </a:p>
+        </p:txBody>
+      </p:sp>
+      <p:sp>
+        <p:nvSpPr>
+          <p:cNvPr id="18" name="Shape 16"/>
           <p:cNvSpPr/>
           <p:nvPr/>
         </p:nvSpPr>
         <p:spPr>
           <a:xfrm>
-            <a:off x="8077200" y="2971800"/>
-            <a:ext cx="3535680" cy="868680"/>
+            <a:off x="8138160" y="2011680"/>
+            <a:ext cx="3520440" cy="4114800"/>
           </a:xfrm>
           <a:prstGeom prst="roundRect">
             <a:avLst>
-              <a:gd name="adj" fmla="val 7368"/>
+              <a:gd name="adj" fmla="val 2597"/>
             </a:avLst>
           </a:prstGeom>
           <a:solidFill>
@@ -7132,18 +6717,67 @@
             </a:solidFill>
             <a:prstDash val="solid"/>
           </a:ln>
-        </p:spPr>
-      </p:sp>
-      <p:sp>
-        <p:nvSpPr>
-          <p:cNvPr id="25" name="Text 23"/>
-          <p:cNvSpPr txBox="1"/>
-          <p:nvPr/>
-        </p:nvSpPr>
-        <p:spPr>
-          <a:xfrm>
-            <a:off x="8214360" y="3044952"/>
-            <a:ext cx="3261360" cy="274320"/>
+          <a:effectLst>
+            <a:outerShdw sx="100000" sy="100000" kx="0" ky="0" algn="bl" rotWithShape="0" blurRad="76200" dist="25400" dir="5400000">
+              <a:srgbClr val="1F3A3C">
+                <a:alpha val="13000"/>
+              </a:srgbClr>
+            </a:outerShdw>
+          </a:effectLst>
+        </p:spPr>
+      </p:sp>
+      <p:sp>
+        <p:nvSpPr>
+          <p:cNvPr id="19" name="Shape 17"/>
+          <p:cNvSpPr/>
+          <p:nvPr/>
+        </p:nvSpPr>
+        <p:spPr>
+          <a:xfrm>
+            <a:off x="8138160" y="2011680"/>
+            <a:ext cx="3520440" cy="822960"/>
+          </a:xfrm>
+          <a:prstGeom prst="roundRect">
+            <a:avLst>
+              <a:gd name="adj" fmla="val 11111"/>
+            </a:avLst>
+          </a:prstGeom>
+          <a:solidFill>
+            <a:srgbClr val="02C39A"/>
+          </a:solidFill>
+          <a:ln/>
+        </p:spPr>
+      </p:sp>
+      <p:sp>
+        <p:nvSpPr>
+          <p:cNvPr id="20" name="Shape 18"/>
+          <p:cNvSpPr/>
+          <p:nvPr/>
+        </p:nvSpPr>
+        <p:spPr>
+          <a:xfrm>
+            <a:off x="8138160" y="2423160"/>
+            <a:ext cx="3520440" cy="411480"/>
+          </a:xfrm>
+          <a:prstGeom prst="rect">
+            <a:avLst/>
+          </a:prstGeom>
+          <a:solidFill>
+            <a:srgbClr val="02C39A"/>
+          </a:solidFill>
+          <a:ln/>
+        </p:spPr>
+      </p:sp>
+      <p:sp>
+        <p:nvSpPr>
+          <p:cNvPr id="21" name="Text 19"/>
+          <p:cNvSpPr txBox="1"/>
+          <p:nvPr/>
+        </p:nvSpPr>
+        <p:spPr>
+          <a:xfrm>
+            <a:off x="8366760" y="2121408"/>
+            <a:ext cx="3063240" cy="365760"/>
           </a:xfrm>
           <a:prstGeom prst="rect">
             <a:avLst/>
@@ -7159,15 +6793,54 @@
               <a:buNone/>
             </a:pPr>
             <a:r>
-              <a:rPr lang="en-US" sz="1150" b="1" dirty="0">
-                <a:solidFill>
-                  <a:srgbClr val="028090"/>
-                </a:solidFill>
-                <a:latin typeface="Calibri" pitchFamily="34" charset="0"/>
-                <a:ea typeface="Calibri" pitchFamily="34" charset="-122"/>
-                <a:cs typeface="Calibri" pitchFamily="34" charset="-120"/>
-              </a:rPr>
-              <a:t>Sprint 3 (S9-10)</a:t>
+              <a:rPr lang="en-US" sz="1500" b="1" dirty="0">
+                <a:solidFill>
+                  <a:srgbClr val="FFFFFF"/>
+                </a:solidFill>
+                <a:latin typeface="Calibri" pitchFamily="34" charset="0"/>
+                <a:ea typeface="Calibri" pitchFamily="34" charset="-122"/>
+                <a:cs typeface="Calibri" pitchFamily="34" charset="-120"/>
+              </a:rPr>
+              <a:t>Matías Pizarro</a:t>
+            </a:r>
+            <a:endParaRPr lang="en-US" sz="1500" dirty="0"/>
+          </a:p>
+        </p:txBody>
+      </p:sp>
+      <p:sp>
+        <p:nvSpPr>
+          <p:cNvPr id="22" name="Text 20"/>
+          <p:cNvSpPr txBox="1"/>
+          <p:nvPr/>
+        </p:nvSpPr>
+        <p:spPr>
+          <a:xfrm>
+            <a:off x="8366760" y="2450592"/>
+            <a:ext cx="3063240" cy="320040"/>
+          </a:xfrm>
+          <a:prstGeom prst="rect">
+            <a:avLst/>
+          </a:prstGeom>
+          <a:noFill/>
+          <a:ln/>
+        </p:spPr>
+        <p:txBody>
+          <a:bodyPr wrap="square" lIns="0" tIns="0" rIns="0" bIns="0" rtlCol="0" anchor="ctr"/>
+          <a:lstStyle/>
+          <a:p>
+            <a:pPr indent="0" marL="0">
+              <a:buNone/>
+            </a:pPr>
+            <a:r>
+              <a:rPr lang="en-US" sz="1150" dirty="0">
+                <a:solidFill>
+                  <a:srgbClr val="FFFFFF"/>
+                </a:solidFill>
+                <a:latin typeface="Calibri" pitchFamily="34" charset="0"/>
+                <a:ea typeface="Calibri" pitchFamily="34" charset="-122"/>
+                <a:cs typeface="Calibri" pitchFamily="34" charset="-120"/>
+              </a:rPr>
+              <a:t>App móvil</a:t>
             </a:r>
             <a:endParaRPr lang="en-US" sz="1150" dirty="0"/>
           </a:p>
@@ -7175,33 +6848,72 @@
       </p:sp>
       <p:sp>
         <p:nvSpPr>
-          <p:cNvPr id="26" name="Text 24"/>
-          <p:cNvSpPr txBox="1"/>
-          <p:nvPr/>
-        </p:nvSpPr>
-        <p:spPr>
-          <a:xfrm>
-            <a:off x="8214360" y="3319272"/>
-            <a:ext cx="3261360" cy="457200"/>
-          </a:xfrm>
-          <a:prstGeom prst="rect">
-            <a:avLst/>
-          </a:prstGeom>
-          <a:noFill/>
-          <a:ln/>
-        </p:spPr>
-        <p:txBody>
-          <a:bodyPr wrap="square" lIns="0" tIns="0" rIns="0" bIns="0" rtlCol="0" anchor="ctr"/>
+          <p:cNvPr id="23" name="Text 21"/>
+          <p:cNvSpPr txBox="1"/>
+          <p:nvPr/>
+        </p:nvSpPr>
+        <p:spPr>
+          <a:xfrm>
+            <a:off x="8366760" y="3017520"/>
+            <a:ext cx="3063240" cy="320040"/>
+          </a:xfrm>
+          <a:prstGeom prst="rect">
+            <a:avLst/>
+          </a:prstGeom>
+          <a:noFill/>
+          <a:ln/>
+        </p:spPr>
+        <p:txBody>
+          <a:bodyPr wrap="square" lIns="0" tIns="0" rIns="0" bIns="0" rtlCol="0" anchor="ctr"/>
+          <a:lstStyle/>
+          <a:p>
+            <a:pPr indent="0" marL="0">
+              <a:buNone/>
+            </a:pPr>
+            <a:r>
+              <a:rPr lang="en-US" sz="1100" b="1" i="1" dirty="0">
+                <a:solidFill>
+                  <a:srgbClr val="02C39A"/>
+                </a:solidFill>
+                <a:latin typeface="Calibri" pitchFamily="34" charset="0"/>
+                <a:ea typeface="Calibri" pitchFamily="34" charset="-122"/>
+                <a:cs typeface="Calibri" pitchFamily="34" charset="-120"/>
+              </a:rPr>
+              <a:t>Flutter / Dart</a:t>
+            </a:r>
+            <a:endParaRPr lang="en-US" sz="1100" dirty="0"/>
+          </a:p>
+        </p:txBody>
+      </p:sp>
+      <p:sp>
+        <p:nvSpPr>
+          <p:cNvPr id="24" name="Text 22"/>
+          <p:cNvSpPr txBox="1"/>
+          <p:nvPr/>
+        </p:nvSpPr>
+        <p:spPr>
+          <a:xfrm>
+            <a:off x="8366760" y="3429000"/>
+            <a:ext cx="3063240" cy="2468880"/>
+          </a:xfrm>
+          <a:prstGeom prst="rect">
+            <a:avLst/>
+          </a:prstGeom>
+          <a:noFill/>
+          <a:ln/>
+        </p:spPr>
+        <p:txBody>
+          <a:bodyPr wrap="square" lIns="0" tIns="0" rIns="0" bIns="0" rtlCol="0" anchor="t"/>
           <a:lstStyle/>
           <a:p>
             <a:pPr indent="0" marL="0">
               <a:lnSpc>
-                <a:spcPct val="105000"/>
+                <a:spcPct val="120000"/>
               </a:lnSpc>
               <a:buNone/>
             </a:pPr>
             <a:r>
-              <a:rPr lang="en-US" sz="1000" dirty="0">
+              <a:rPr lang="en-US" sz="1150" dirty="0">
                 <a:solidFill>
                   <a:srgbClr val="0B2B2E"/>
                 </a:solidFill>
@@ -7209,73 +6921,7 @@
                 <a:ea typeface="Calibri" pitchFamily="34" charset="-122"/>
                 <a:cs typeface="Calibri" pitchFamily="34" charset="-120"/>
               </a:rPr>
-              <a:t>Perfiles dependientes y permisos · Informe de Avance</a:t>
-            </a:r>
-            <a:endParaRPr lang="en-US" sz="1000" dirty="0"/>
-          </a:p>
-        </p:txBody>
-      </p:sp>
-      <p:sp>
-        <p:nvSpPr>
-          <p:cNvPr id="27" name="Shape 25"/>
-          <p:cNvSpPr/>
-          <p:nvPr/>
-        </p:nvSpPr>
-        <p:spPr>
-          <a:xfrm>
-            <a:off x="548640" y="3977640"/>
-            <a:ext cx="3535680" cy="868680"/>
-          </a:xfrm>
-          <a:prstGeom prst="roundRect">
-            <a:avLst>
-              <a:gd name="adj" fmla="val 7368"/>
-            </a:avLst>
-          </a:prstGeom>
-          <a:solidFill>
-            <a:srgbClr val="FFFFFF"/>
-          </a:solidFill>
-          <a:ln w="12700">
-            <a:solidFill>
-              <a:srgbClr val="DCEDEC"/>
-            </a:solidFill>
-            <a:prstDash val="solid"/>
-          </a:ln>
-        </p:spPr>
-      </p:sp>
-      <p:sp>
-        <p:nvSpPr>
-          <p:cNvPr id="28" name="Text 26"/>
-          <p:cNvSpPr txBox="1"/>
-          <p:nvPr/>
-        </p:nvSpPr>
-        <p:spPr>
-          <a:xfrm>
-            <a:off x="685800" y="4050792"/>
-            <a:ext cx="3261360" cy="274320"/>
-          </a:xfrm>
-          <a:prstGeom prst="rect">
-            <a:avLst/>
-          </a:prstGeom>
-          <a:noFill/>
-          <a:ln/>
-        </p:spPr>
-        <p:txBody>
-          <a:bodyPr wrap="square" lIns="0" tIns="0" rIns="0" bIns="0" rtlCol="0" anchor="ctr"/>
-          <a:lstStyle/>
-          <a:p>
-            <a:pPr indent="0" marL="0">
-              <a:buNone/>
-            </a:pPr>
-            <a:r>
-              <a:rPr lang="en-US" sz="1150" b="1" dirty="0">
-                <a:solidFill>
-                  <a:srgbClr val="028090"/>
-                </a:solidFill>
-                <a:latin typeface="Calibri" pitchFamily="34" charset="0"/>
-                <a:ea typeface="Calibri" pitchFamily="34" charset="-122"/>
-                <a:cs typeface="Calibri" pitchFamily="34" charset="-120"/>
-              </a:rPr>
-              <a:t>Sprint 4 (S11-12)</a:t>
+              <a:t>Interfaz para titular y perfiles dependientes, experiencia de usuario accesible</a:t>
             </a:r>
             <a:endParaRPr lang="en-US" sz="1150" dirty="0"/>
           </a:p>
@@ -7283,304 +6929,7 @@
       </p:sp>
       <p:sp>
         <p:nvSpPr>
-          <p:cNvPr id="29" name="Text 27"/>
-          <p:cNvSpPr txBox="1"/>
-          <p:nvPr/>
-        </p:nvSpPr>
-        <p:spPr>
-          <a:xfrm>
-            <a:off x="685800" y="4325112"/>
-            <a:ext cx="3261360" cy="457200"/>
-          </a:xfrm>
-          <a:prstGeom prst="rect">
-            <a:avLst/>
-          </a:prstGeom>
-          <a:noFill/>
-          <a:ln/>
-        </p:spPr>
-        <p:txBody>
-          <a:bodyPr wrap="square" lIns="0" tIns="0" rIns="0" bIns="0" rtlCol="0" anchor="ctr"/>
-          <a:lstStyle/>
-          <a:p>
-            <a:pPr indent="0" marL="0">
-              <a:lnSpc>
-                <a:spcPct val="105000"/>
-              </a:lnSpc>
-              <a:buNone/>
-            </a:pPr>
-            <a:r>
-              <a:rPr lang="en-US" sz="1000" dirty="0">
-                <a:solidFill>
-                  <a:srgbClr val="0B2B2E"/>
-                </a:solidFill>
-                <a:latin typeface="Calibri" pitchFamily="34" charset="0"/>
-                <a:ea typeface="Calibri" pitchFamily="34" charset="-122"/>
-                <a:cs typeface="Calibri" pitchFamily="34" charset="-120"/>
-              </a:rPr>
-              <a:t>Recordatorios, alertas e interfaz simplificada</a:t>
-            </a:r>
-            <a:endParaRPr lang="en-US" sz="1000" dirty="0"/>
-          </a:p>
-        </p:txBody>
-      </p:sp>
-      <p:sp>
-        <p:nvSpPr>
-          <p:cNvPr id="30" name="Shape 28"/>
-          <p:cNvSpPr/>
-          <p:nvPr/>
-        </p:nvSpPr>
-        <p:spPr>
-          <a:xfrm>
-            <a:off x="4312920" y="3977640"/>
-            <a:ext cx="3535680" cy="868680"/>
-          </a:xfrm>
-          <a:prstGeom prst="roundRect">
-            <a:avLst>
-              <a:gd name="adj" fmla="val 7368"/>
-            </a:avLst>
-          </a:prstGeom>
-          <a:solidFill>
-            <a:srgbClr val="FFFFFF"/>
-          </a:solidFill>
-          <a:ln w="12700">
-            <a:solidFill>
-              <a:srgbClr val="DCEDEC"/>
-            </a:solidFill>
-            <a:prstDash val="solid"/>
-          </a:ln>
-        </p:spPr>
-      </p:sp>
-      <p:sp>
-        <p:nvSpPr>
-          <p:cNvPr id="31" name="Text 29"/>
-          <p:cNvSpPr txBox="1"/>
-          <p:nvPr/>
-        </p:nvSpPr>
-        <p:spPr>
-          <a:xfrm>
-            <a:off x="4450080" y="4050792"/>
-            <a:ext cx="3261360" cy="274320"/>
-          </a:xfrm>
-          <a:prstGeom prst="rect">
-            <a:avLst/>
-          </a:prstGeom>
-          <a:noFill/>
-          <a:ln/>
-        </p:spPr>
-        <p:txBody>
-          <a:bodyPr wrap="square" lIns="0" tIns="0" rIns="0" bIns="0" rtlCol="0" anchor="ctr"/>
-          <a:lstStyle/>
-          <a:p>
-            <a:pPr indent="0" marL="0">
-              <a:buNone/>
-            </a:pPr>
-            <a:r>
-              <a:rPr lang="en-US" sz="1150" b="1" dirty="0">
-                <a:solidFill>
-                  <a:srgbClr val="028090"/>
-                </a:solidFill>
-                <a:latin typeface="Calibri" pitchFamily="34" charset="0"/>
-                <a:ea typeface="Calibri" pitchFamily="34" charset="-122"/>
-                <a:cs typeface="Calibri" pitchFamily="34" charset="-120"/>
-              </a:rPr>
-              <a:t>Sprint 5 (S13-14)</a:t>
-            </a:r>
-            <a:endParaRPr lang="en-US" sz="1150" dirty="0"/>
-          </a:p>
-        </p:txBody>
-      </p:sp>
-      <p:sp>
-        <p:nvSpPr>
-          <p:cNvPr id="32" name="Text 30"/>
-          <p:cNvSpPr txBox="1"/>
-          <p:nvPr/>
-        </p:nvSpPr>
-        <p:spPr>
-          <a:xfrm>
-            <a:off x="4450080" y="4325112"/>
-            <a:ext cx="3261360" cy="457200"/>
-          </a:xfrm>
-          <a:prstGeom prst="rect">
-            <a:avLst/>
-          </a:prstGeom>
-          <a:noFill/>
-          <a:ln/>
-        </p:spPr>
-        <p:txBody>
-          <a:bodyPr wrap="square" lIns="0" tIns="0" rIns="0" bIns="0" rtlCol="0" anchor="ctr"/>
-          <a:lstStyle/>
-          <a:p>
-            <a:pPr indent="0" marL="0">
-              <a:lnSpc>
-                <a:spcPct val="105000"/>
-              </a:lnSpc>
-              <a:buNone/>
-            </a:pPr>
-            <a:r>
-              <a:rPr lang="en-US" sz="1000" dirty="0">
-                <a:solidFill>
-                  <a:srgbClr val="0B2B2E"/>
-                </a:solidFill>
-                <a:latin typeface="Calibri" pitchFamily="34" charset="0"/>
-                <a:ea typeface="Calibri" pitchFamily="34" charset="-122"/>
-                <a:cs typeface="Calibri" pitchFamily="34" charset="-120"/>
-              </a:rPr>
-              <a:t>Indicadores de salud, módulo de IA y pantalla en casa</a:t>
-            </a:r>
-            <a:endParaRPr lang="en-US" sz="1000" dirty="0"/>
-          </a:p>
-        </p:txBody>
-      </p:sp>
-      <p:sp>
-        <p:nvSpPr>
-          <p:cNvPr id="33" name="Shape 31"/>
-          <p:cNvSpPr/>
-          <p:nvPr/>
-        </p:nvSpPr>
-        <p:spPr>
-          <a:xfrm>
-            <a:off x="8077200" y="3977640"/>
-            <a:ext cx="3535680" cy="868680"/>
-          </a:xfrm>
-          <a:prstGeom prst="roundRect">
-            <a:avLst>
-              <a:gd name="adj" fmla="val 7368"/>
-            </a:avLst>
-          </a:prstGeom>
-          <a:solidFill>
-            <a:srgbClr val="FFFFFF"/>
-          </a:solidFill>
-          <a:ln w="12700">
-            <a:solidFill>
-              <a:srgbClr val="DCEDEC"/>
-            </a:solidFill>
-            <a:prstDash val="solid"/>
-          </a:ln>
-        </p:spPr>
-      </p:sp>
-      <p:sp>
-        <p:nvSpPr>
-          <p:cNvPr id="34" name="Text 32"/>
-          <p:cNvSpPr txBox="1"/>
-          <p:nvPr/>
-        </p:nvSpPr>
-        <p:spPr>
-          <a:xfrm>
-            <a:off x="8214360" y="4050792"/>
-            <a:ext cx="3261360" cy="274320"/>
-          </a:xfrm>
-          <a:prstGeom prst="rect">
-            <a:avLst/>
-          </a:prstGeom>
-          <a:noFill/>
-          <a:ln/>
-        </p:spPr>
-        <p:txBody>
-          <a:bodyPr wrap="square" lIns="0" tIns="0" rIns="0" bIns="0" rtlCol="0" anchor="ctr"/>
-          <a:lstStyle/>
-          <a:p>
-            <a:pPr indent="0" marL="0">
-              <a:buNone/>
-            </a:pPr>
-            <a:r>
-              <a:rPr lang="en-US" sz="1150" b="1" dirty="0">
-                <a:solidFill>
-                  <a:srgbClr val="028090"/>
-                </a:solidFill>
-                <a:latin typeface="Calibri" pitchFamily="34" charset="0"/>
-                <a:ea typeface="Calibri" pitchFamily="34" charset="-122"/>
-                <a:cs typeface="Calibri" pitchFamily="34" charset="-120"/>
-              </a:rPr>
-              <a:t>Sprint 6 (S15)</a:t>
-            </a:r>
-            <a:endParaRPr lang="en-US" sz="1150" dirty="0"/>
-          </a:p>
-        </p:txBody>
-      </p:sp>
-      <p:sp>
-        <p:nvSpPr>
-          <p:cNvPr id="35" name="Text 33"/>
-          <p:cNvSpPr txBox="1"/>
-          <p:nvPr/>
-        </p:nvSpPr>
-        <p:spPr>
-          <a:xfrm>
-            <a:off x="8214360" y="4325112"/>
-            <a:ext cx="3261360" cy="457200"/>
-          </a:xfrm>
-          <a:prstGeom prst="rect">
-            <a:avLst/>
-          </a:prstGeom>
-          <a:noFill/>
-          <a:ln/>
-        </p:spPr>
-        <p:txBody>
-          <a:bodyPr wrap="square" lIns="0" tIns="0" rIns="0" bIns="0" rtlCol="0" anchor="ctr"/>
-          <a:lstStyle/>
-          <a:p>
-            <a:pPr indent="0" marL="0">
-              <a:lnSpc>
-                <a:spcPct val="105000"/>
-              </a:lnSpc>
-              <a:buNone/>
-            </a:pPr>
-            <a:r>
-              <a:rPr lang="en-US" sz="1000" dirty="0">
-                <a:solidFill>
-                  <a:srgbClr val="0B2B2E"/>
-                </a:solidFill>
-                <a:latin typeface="Calibri" pitchFamily="34" charset="0"/>
-                <a:ea typeface="Calibri" pitchFamily="34" charset="-122"/>
-                <a:cs typeface="Calibri" pitchFamily="34" charset="-120"/>
-              </a:rPr>
-              <a:t>Pulsera, detección de ruido, pruebas e Informe Final</a:t>
-            </a:r>
-            <a:endParaRPr lang="en-US" sz="1000" dirty="0"/>
-          </a:p>
-        </p:txBody>
-      </p:sp>
-      <p:sp>
-        <p:nvSpPr>
-          <p:cNvPr id="36" name="Text 34"/>
-          <p:cNvSpPr txBox="1"/>
-          <p:nvPr/>
-        </p:nvSpPr>
-        <p:spPr>
-          <a:xfrm>
-            <a:off x="548640" y="5257800"/>
-            <a:ext cx="11064240" cy="548640"/>
-          </a:xfrm>
-          <a:prstGeom prst="rect">
-            <a:avLst/>
-          </a:prstGeom>
-          <a:noFill/>
-          <a:ln/>
-        </p:spPr>
-        <p:txBody>
-          <a:bodyPr wrap="square" lIns="0" tIns="0" rIns="0" bIns="0" rtlCol="0" anchor="ctr"/>
-          <a:lstStyle/>
-          <a:p>
-            <a:pPr indent="0" marL="0">
-              <a:buNone/>
-            </a:pPr>
-            <a:r>
-              <a:rPr lang="en-US" sz="1150" i="1" dirty="0">
-                <a:solidFill>
-                  <a:srgbClr val="5C7A7C"/>
-                </a:solidFill>
-                <a:latin typeface="Calibri" pitchFamily="34" charset="0"/>
-                <a:ea typeface="Calibri" pitchFamily="34" charset="-122"/>
-                <a:cs typeface="Calibri" pitchFamily="34" charset="-120"/>
-              </a:rPr>
-              <a:t>Principal facilitador: el equipo ya domina las tecnologías definidas. Principal obstáculo: coordinar horarios entre los tres integrantes — se mitiga con reuniones semanales fijas.</a:t>
-            </a:r>
-            <a:endParaRPr lang="en-US" sz="1150" dirty="0"/>
-          </a:p>
-        </p:txBody>
-      </p:sp>
-      <p:sp>
-        <p:nvSpPr>
-          <p:cNvPr id="37" name="Text 35"/>
+          <p:cNvPr id="25" name="Text 23"/>
           <p:cNvSpPr txBox="1"/>
           <p:nvPr/>
         </p:nvSpPr>
@@ -7619,7 +6968,7 @@
       </p:sp>
       <p:sp>
         <p:nvSpPr>
-          <p:cNvPr id="38" name="Text 36"/>
+          <p:cNvPr id="26" name="Text 24"/>
           <p:cNvSpPr txBox="1"/>
           <p:nvPr/>
         </p:nvSpPr>
@@ -7697,7 +7046,7 @@
         <p:spPr>
           <a:xfrm>
             <a:off x="548640" y="457200"/>
-            <a:ext cx="9144000" cy="640080"/>
+            <a:ext cx="7315200" cy="640080"/>
           </a:xfrm>
           <a:prstGeom prst="rect">
             <a:avLst/>
@@ -7713,7 +7062,7 @@
               <a:buNone/>
             </a:pPr>
             <a:r>
-              <a:rPr lang="en-US" sz="3000" b="1" dirty="0">
+              <a:rPr lang="en-US" sz="3200" b="1" dirty="0">
                 <a:solidFill>
                   <a:srgbClr val="0B3D42"/>
                 </a:solidFill>
@@ -7721,26 +7070,65 @@
                 <a:ea typeface="Cambria" pitchFamily="34" charset="-122"/>
                 <a:cs typeface="Cambria" pitchFamily="34" charset="-120"/>
               </a:rPr>
-              <a:t>Evidencias planificadas</a:t>
-            </a:r>
-            <a:endParaRPr lang="en-US" sz="3000" dirty="0"/>
-          </a:p>
-        </p:txBody>
-      </p:sp>
-      <p:sp>
-        <p:nvSpPr>
-          <p:cNvPr id="3" name="Shape 1"/>
+              <a:t>Plan de trabajo</a:t>
+            </a:r>
+            <a:endParaRPr lang="en-US" sz="3200" dirty="0"/>
+          </a:p>
+        </p:txBody>
+      </p:sp>
+      <p:sp>
+        <p:nvSpPr>
+          <p:cNvPr id="3" name="Text 1"/>
+          <p:cNvSpPr txBox="1"/>
+          <p:nvPr/>
+        </p:nvSpPr>
+        <p:spPr>
+          <a:xfrm>
+            <a:off x="548640" y="1115568"/>
+            <a:ext cx="7315200" cy="365760"/>
+          </a:xfrm>
+          <a:prstGeom prst="rect">
+            <a:avLst/>
+          </a:prstGeom>
+          <a:noFill/>
+          <a:ln/>
+        </p:spPr>
+        <p:txBody>
+          <a:bodyPr wrap="square" lIns="0" tIns="0" rIns="0" bIns="0" rtlCol="0" anchor="ctr"/>
+          <a:lstStyle/>
+          <a:p>
+            <a:pPr indent="0" marL="0">
+              <a:buNone/>
+            </a:pPr>
+            <a:r>
+              <a:rPr lang="en-US" sz="1300" dirty="0">
+                <a:solidFill>
+                  <a:srgbClr val="5C7A7C"/>
+                </a:solidFill>
+                <a:latin typeface="Calibri" pitchFamily="34" charset="0"/>
+                <a:ea typeface="Calibri" pitchFamily="34" charset="-122"/>
+                <a:cs typeface="Calibri" pitchFamily="34" charset="-120"/>
+              </a:rPr>
+              <a:t>Semestre de 18 semanas · 3 fases</a:t>
+            </a:r>
+            <a:endParaRPr lang="en-US" sz="1300" dirty="0"/>
+          </a:p>
+        </p:txBody>
+      </p:sp>
+      <p:sp>
+        <p:nvSpPr>
+          <p:cNvPr id="4" name="Shape 2"/>
           <p:cNvSpPr/>
           <p:nvPr/>
         </p:nvSpPr>
         <p:spPr>
           <a:xfrm>
-            <a:off x="548640" y="1280160"/>
-            <a:ext cx="5349240" cy="502920"/>
+            <a:off x="548640" y="1828800"/>
+            <a:ext cx="2458720" cy="777240"/>
           </a:xfrm>
           <a:prstGeom prst="roundRect">
             <a:avLst>
-              <a:gd name="adj" fmla="val 12727"/>
+              <a:gd name="adj" fmla="val 7059"/>
             </a:avLst>
           </a:prstGeom>
           <a:solidFill>
@@ -7751,30 +7139,30 @@
       </p:sp>
       <p:sp>
         <p:nvSpPr>
-          <p:cNvPr id="4" name="Text 2"/>
-          <p:cNvSpPr txBox="1"/>
-          <p:nvPr/>
-        </p:nvSpPr>
-        <p:spPr>
-          <a:xfrm>
-            <a:off x="548640" y="1280160"/>
-            <a:ext cx="5349240" cy="502920"/>
-          </a:xfrm>
-          <a:prstGeom prst="rect">
-            <a:avLst/>
-          </a:prstGeom>
-          <a:noFill/>
-          <a:ln/>
-        </p:spPr>
-        <p:txBody>
-          <a:bodyPr wrap="square" lIns="0" tIns="0" rIns="0" bIns="0" rtlCol="0" anchor="ctr"/>
-          <a:lstStyle/>
-          <a:p>
-            <a:pPr algn="ctr" indent="0" marL="0">
-              <a:buNone/>
-            </a:pPr>
-            <a:r>
-              <a:rPr lang="en-US" sz="1500" b="1" dirty="0">
+          <p:cNvPr id="5" name="Text 3"/>
+          <p:cNvSpPr txBox="1"/>
+          <p:nvPr/>
+        </p:nvSpPr>
+        <p:spPr>
+          <a:xfrm>
+            <a:off x="640080" y="1883664"/>
+            <a:ext cx="2275840" cy="320040"/>
+          </a:xfrm>
+          <a:prstGeom prst="rect">
+            <a:avLst/>
+          </a:prstGeom>
+          <a:noFill/>
+          <a:ln/>
+        </p:spPr>
+        <p:txBody>
+          <a:bodyPr wrap="square" lIns="0" tIns="0" rIns="0" bIns="0" rtlCol="0" anchor="ctr"/>
+          <a:lstStyle/>
+          <a:p>
+            <a:pPr indent="0" marL="0">
+              <a:buNone/>
+            </a:pPr>
+            <a:r>
+              <a:rPr lang="en-US" sz="1300" b="1" dirty="0">
                 <a:solidFill>
                   <a:srgbClr val="FFFFFF"/>
                 </a:solidFill>
@@ -7782,26 +7170,444 @@
                 <a:ea typeface="Calibri" pitchFamily="34" charset="-122"/>
                 <a:cs typeface="Calibri" pitchFamily="34" charset="-120"/>
               </a:rPr>
-              <a:t>De avance</a:t>
-            </a:r>
-            <a:endParaRPr lang="en-US" sz="1500" dirty="0"/>
-          </a:p>
-        </p:txBody>
-      </p:sp>
-      <p:sp>
-        <p:nvSpPr>
-          <p:cNvPr id="5" name="Shape 3"/>
+              <a:t>Fase 1</a:t>
+            </a:r>
+            <a:endParaRPr lang="en-US" sz="1300" dirty="0"/>
+          </a:p>
+        </p:txBody>
+      </p:sp>
+      <p:sp>
+        <p:nvSpPr>
+          <p:cNvPr id="6" name="Text 4"/>
+          <p:cNvSpPr txBox="1"/>
+          <p:nvPr/>
+        </p:nvSpPr>
+        <p:spPr>
+          <a:xfrm>
+            <a:off x="640080" y="2194560"/>
+            <a:ext cx="2275840" cy="274320"/>
+          </a:xfrm>
+          <a:prstGeom prst="rect">
+            <a:avLst/>
+          </a:prstGeom>
+          <a:noFill/>
+          <a:ln/>
+        </p:spPr>
+        <p:txBody>
+          <a:bodyPr wrap="square" lIns="0" tIns="0" rIns="0" bIns="0" rtlCol="0" anchor="ctr"/>
+          <a:lstStyle/>
+          <a:p>
+            <a:pPr indent="0" marL="0">
+              <a:buNone/>
+            </a:pPr>
+            <a:r>
+              <a:rPr lang="en-US" sz="950" dirty="0">
+                <a:solidFill>
+                  <a:srgbClr val="FFFFFF"/>
+                </a:solidFill>
+                <a:latin typeface="Calibri" pitchFamily="34" charset="0"/>
+                <a:ea typeface="Calibri" pitchFamily="34" charset="-122"/>
+                <a:cs typeface="Calibri" pitchFamily="34" charset="-120"/>
+              </a:rPr>
+              <a:t>Definición</a:t>
+            </a:r>
+            <a:endParaRPr lang="en-US" sz="950" dirty="0"/>
+          </a:p>
+        </p:txBody>
+      </p:sp>
+      <p:sp>
+        <p:nvSpPr>
+          <p:cNvPr id="7" name="Text 5"/>
+          <p:cNvSpPr txBox="1"/>
+          <p:nvPr/>
+        </p:nvSpPr>
+        <p:spPr>
+          <a:xfrm>
+            <a:off x="640080" y="2395728"/>
+            <a:ext cx="2275840" cy="228600"/>
+          </a:xfrm>
+          <a:prstGeom prst="rect">
+            <a:avLst/>
+          </a:prstGeom>
+          <a:noFill/>
+          <a:ln/>
+        </p:spPr>
+        <p:txBody>
+          <a:bodyPr wrap="square" lIns="0" tIns="0" rIns="0" bIns="0" rtlCol="0" anchor="ctr"/>
+          <a:lstStyle/>
+          <a:p>
+            <a:pPr indent="0" marL="0">
+              <a:buNone/>
+            </a:pPr>
+            <a:r>
+              <a:rPr lang="en-US" sz="900" i="1" dirty="0">
+                <a:solidFill>
+                  <a:srgbClr val="FFFFFF"/>
+                </a:solidFill>
+                <a:latin typeface="Calibri" pitchFamily="34" charset="0"/>
+                <a:ea typeface="Calibri" pitchFamily="34" charset="-122"/>
+                <a:cs typeface="Calibri" pitchFamily="34" charset="-120"/>
+              </a:rPr>
+              <a:t>S1 – S4</a:t>
+            </a:r>
+            <a:endParaRPr lang="en-US" sz="900" dirty="0"/>
+          </a:p>
+        </p:txBody>
+      </p:sp>
+      <p:sp>
+        <p:nvSpPr>
+          <p:cNvPr id="8" name="Shape 6"/>
           <p:cNvSpPr/>
           <p:nvPr/>
         </p:nvSpPr>
         <p:spPr>
           <a:xfrm>
-            <a:off x="548640" y="1965960"/>
-            <a:ext cx="5349240" cy="1783080"/>
+            <a:off x="3007360" y="1828800"/>
+            <a:ext cx="6761480" cy="777240"/>
           </a:xfrm>
           <a:prstGeom prst="roundRect">
             <a:avLst>
-              <a:gd name="adj" fmla="val 4103"/>
+              <a:gd name="adj" fmla="val 7059"/>
+            </a:avLst>
+          </a:prstGeom>
+          <a:solidFill>
+            <a:srgbClr val="00A896"/>
+          </a:solidFill>
+          <a:ln/>
+        </p:spPr>
+      </p:sp>
+      <p:sp>
+        <p:nvSpPr>
+          <p:cNvPr id="9" name="Text 7"/>
+          <p:cNvSpPr txBox="1"/>
+          <p:nvPr/>
+        </p:nvSpPr>
+        <p:spPr>
+          <a:xfrm>
+            <a:off x="3098800" y="1883664"/>
+            <a:ext cx="6578600" cy="320040"/>
+          </a:xfrm>
+          <a:prstGeom prst="rect">
+            <a:avLst/>
+          </a:prstGeom>
+          <a:noFill/>
+          <a:ln/>
+        </p:spPr>
+        <p:txBody>
+          <a:bodyPr wrap="square" lIns="0" tIns="0" rIns="0" bIns="0" rtlCol="0" anchor="ctr"/>
+          <a:lstStyle/>
+          <a:p>
+            <a:pPr indent="0" marL="0">
+              <a:buNone/>
+            </a:pPr>
+            <a:r>
+              <a:rPr lang="en-US" sz="1300" b="1" dirty="0">
+                <a:solidFill>
+                  <a:srgbClr val="FFFFFF"/>
+                </a:solidFill>
+                <a:latin typeface="Calibri" pitchFamily="34" charset="0"/>
+                <a:ea typeface="Calibri" pitchFamily="34" charset="-122"/>
+                <a:cs typeface="Calibri" pitchFamily="34" charset="-120"/>
+              </a:rPr>
+              <a:t>Fase 2</a:t>
+            </a:r>
+            <a:endParaRPr lang="en-US" sz="1300" dirty="0"/>
+          </a:p>
+        </p:txBody>
+      </p:sp>
+      <p:sp>
+        <p:nvSpPr>
+          <p:cNvPr id="10" name="Text 8"/>
+          <p:cNvSpPr txBox="1"/>
+          <p:nvPr/>
+        </p:nvSpPr>
+        <p:spPr>
+          <a:xfrm>
+            <a:off x="3098800" y="2194560"/>
+            <a:ext cx="6578600" cy="274320"/>
+          </a:xfrm>
+          <a:prstGeom prst="rect">
+            <a:avLst/>
+          </a:prstGeom>
+          <a:noFill/>
+          <a:ln/>
+        </p:spPr>
+        <p:txBody>
+          <a:bodyPr wrap="square" lIns="0" tIns="0" rIns="0" bIns="0" rtlCol="0" anchor="ctr"/>
+          <a:lstStyle/>
+          <a:p>
+            <a:pPr indent="0" marL="0">
+              <a:buNone/>
+            </a:pPr>
+            <a:r>
+              <a:rPr lang="en-US" sz="950" dirty="0">
+                <a:solidFill>
+                  <a:srgbClr val="FFFFFF"/>
+                </a:solidFill>
+                <a:latin typeface="Calibri" pitchFamily="34" charset="0"/>
+                <a:ea typeface="Calibri" pitchFamily="34" charset="-122"/>
+                <a:cs typeface="Calibri" pitchFamily="34" charset="-120"/>
+              </a:rPr>
+              <a:t>Desarrollo (6 sprints)</a:t>
+            </a:r>
+            <a:endParaRPr lang="en-US" sz="950" dirty="0"/>
+          </a:p>
+        </p:txBody>
+      </p:sp>
+      <p:sp>
+        <p:nvSpPr>
+          <p:cNvPr id="11" name="Text 9"/>
+          <p:cNvSpPr txBox="1"/>
+          <p:nvPr/>
+        </p:nvSpPr>
+        <p:spPr>
+          <a:xfrm>
+            <a:off x="3098800" y="2395728"/>
+            <a:ext cx="6578600" cy="228600"/>
+          </a:xfrm>
+          <a:prstGeom prst="rect">
+            <a:avLst/>
+          </a:prstGeom>
+          <a:noFill/>
+          <a:ln/>
+        </p:spPr>
+        <p:txBody>
+          <a:bodyPr wrap="square" lIns="0" tIns="0" rIns="0" bIns="0" rtlCol="0" anchor="ctr"/>
+          <a:lstStyle/>
+          <a:p>
+            <a:pPr indent="0" marL="0">
+              <a:buNone/>
+            </a:pPr>
+            <a:r>
+              <a:rPr lang="en-US" sz="900" i="1" dirty="0">
+                <a:solidFill>
+                  <a:srgbClr val="FFFFFF"/>
+                </a:solidFill>
+                <a:latin typeface="Calibri" pitchFamily="34" charset="0"/>
+                <a:ea typeface="Calibri" pitchFamily="34" charset="-122"/>
+                <a:cs typeface="Calibri" pitchFamily="34" charset="-120"/>
+              </a:rPr>
+              <a:t>S5 – S15</a:t>
+            </a:r>
+            <a:endParaRPr lang="en-US" sz="900" dirty="0"/>
+          </a:p>
+        </p:txBody>
+      </p:sp>
+      <p:sp>
+        <p:nvSpPr>
+          <p:cNvPr id="12" name="Shape 10"/>
+          <p:cNvSpPr/>
+          <p:nvPr/>
+        </p:nvSpPr>
+        <p:spPr>
+          <a:xfrm>
+            <a:off x="9768840" y="1828800"/>
+            <a:ext cx="1844040" cy="777240"/>
+          </a:xfrm>
+          <a:prstGeom prst="roundRect">
+            <a:avLst>
+              <a:gd name="adj" fmla="val 7059"/>
+            </a:avLst>
+          </a:prstGeom>
+          <a:solidFill>
+            <a:srgbClr val="02C39A"/>
+          </a:solidFill>
+          <a:ln/>
+        </p:spPr>
+      </p:sp>
+      <p:sp>
+        <p:nvSpPr>
+          <p:cNvPr id="13" name="Text 11"/>
+          <p:cNvSpPr txBox="1"/>
+          <p:nvPr/>
+        </p:nvSpPr>
+        <p:spPr>
+          <a:xfrm>
+            <a:off x="9860280" y="1883664"/>
+            <a:ext cx="1661160" cy="320040"/>
+          </a:xfrm>
+          <a:prstGeom prst="rect">
+            <a:avLst/>
+          </a:prstGeom>
+          <a:noFill/>
+          <a:ln/>
+        </p:spPr>
+        <p:txBody>
+          <a:bodyPr wrap="square" lIns="0" tIns="0" rIns="0" bIns="0" rtlCol="0" anchor="ctr"/>
+          <a:lstStyle/>
+          <a:p>
+            <a:pPr indent="0" marL="0">
+              <a:buNone/>
+            </a:pPr>
+            <a:r>
+              <a:rPr lang="en-US" sz="1300" b="1" dirty="0">
+                <a:solidFill>
+                  <a:srgbClr val="FFFFFF"/>
+                </a:solidFill>
+                <a:latin typeface="Calibri" pitchFamily="34" charset="0"/>
+                <a:ea typeface="Calibri" pitchFamily="34" charset="-122"/>
+                <a:cs typeface="Calibri" pitchFamily="34" charset="-120"/>
+              </a:rPr>
+              <a:t>Fase 3</a:t>
+            </a:r>
+            <a:endParaRPr lang="en-US" sz="1300" dirty="0"/>
+          </a:p>
+        </p:txBody>
+      </p:sp>
+      <p:sp>
+        <p:nvSpPr>
+          <p:cNvPr id="14" name="Text 12"/>
+          <p:cNvSpPr txBox="1"/>
+          <p:nvPr/>
+        </p:nvSpPr>
+        <p:spPr>
+          <a:xfrm>
+            <a:off x="9860280" y="2194560"/>
+            <a:ext cx="1661160" cy="274320"/>
+          </a:xfrm>
+          <a:prstGeom prst="rect">
+            <a:avLst/>
+          </a:prstGeom>
+          <a:noFill/>
+          <a:ln/>
+        </p:spPr>
+        <p:txBody>
+          <a:bodyPr wrap="square" lIns="0" tIns="0" rIns="0" bIns="0" rtlCol="0" anchor="ctr"/>
+          <a:lstStyle/>
+          <a:p>
+            <a:pPr indent="0" marL="0">
+              <a:buNone/>
+            </a:pPr>
+            <a:r>
+              <a:rPr lang="en-US" sz="950" dirty="0">
+                <a:solidFill>
+                  <a:srgbClr val="FFFFFF"/>
+                </a:solidFill>
+                <a:latin typeface="Calibri" pitchFamily="34" charset="0"/>
+                <a:ea typeface="Calibri" pitchFamily="34" charset="-122"/>
+                <a:cs typeface="Calibri" pitchFamily="34" charset="-120"/>
+              </a:rPr>
+              <a:t>Presentación</a:t>
+            </a:r>
+            <a:endParaRPr lang="en-US" sz="950" dirty="0"/>
+          </a:p>
+        </p:txBody>
+      </p:sp>
+      <p:sp>
+        <p:nvSpPr>
+          <p:cNvPr id="15" name="Text 13"/>
+          <p:cNvSpPr txBox="1"/>
+          <p:nvPr/>
+        </p:nvSpPr>
+        <p:spPr>
+          <a:xfrm>
+            <a:off x="9860280" y="2395728"/>
+            <a:ext cx="1661160" cy="228600"/>
+          </a:xfrm>
+          <a:prstGeom prst="rect">
+            <a:avLst/>
+          </a:prstGeom>
+          <a:noFill/>
+          <a:ln/>
+        </p:spPr>
+        <p:txBody>
+          <a:bodyPr wrap="square" lIns="0" tIns="0" rIns="0" bIns="0" rtlCol="0" anchor="ctr"/>
+          <a:lstStyle/>
+          <a:p>
+            <a:pPr indent="0" marL="0">
+              <a:buNone/>
+            </a:pPr>
+            <a:r>
+              <a:rPr lang="en-US" sz="900" i="1" dirty="0">
+                <a:solidFill>
+                  <a:srgbClr val="FFFFFF"/>
+                </a:solidFill>
+                <a:latin typeface="Calibri" pitchFamily="34" charset="0"/>
+                <a:ea typeface="Calibri" pitchFamily="34" charset="-122"/>
+                <a:cs typeface="Calibri" pitchFamily="34" charset="-120"/>
+              </a:rPr>
+              <a:t>S16 – S18</a:t>
+            </a:r>
+            <a:endParaRPr lang="en-US" sz="900" dirty="0"/>
+          </a:p>
+        </p:txBody>
+      </p:sp>
+      <p:sp>
+        <p:nvSpPr>
+          <p:cNvPr id="16" name="Shape 14"/>
+          <p:cNvSpPr/>
+          <p:nvPr/>
+        </p:nvSpPr>
+        <p:spPr>
+          <a:xfrm>
+            <a:off x="3007360" y="1691640"/>
+            <a:ext cx="0" cy="1051560"/>
+          </a:xfrm>
+          <a:prstGeom prst="line">
+            <a:avLst/>
+          </a:prstGeom>
+          <a:noFill/>
+          <a:ln w="25400">
+            <a:solidFill>
+              <a:srgbClr val="0B3D42"/>
+            </a:solidFill>
+            <a:prstDash val="dash"/>
+          </a:ln>
+        </p:spPr>
+      </p:sp>
+      <p:sp>
+        <p:nvSpPr>
+          <p:cNvPr id="17" name="Text 15"/>
+          <p:cNvSpPr txBox="1"/>
+          <p:nvPr/>
+        </p:nvSpPr>
+        <p:spPr>
+          <a:xfrm>
+            <a:off x="2367280" y="1325880"/>
+            <a:ext cx="1280160" cy="320040"/>
+          </a:xfrm>
+          <a:prstGeom prst="rect">
+            <a:avLst/>
+          </a:prstGeom>
+          <a:noFill/>
+          <a:ln/>
+        </p:spPr>
+        <p:txBody>
+          <a:bodyPr wrap="square" lIns="0" tIns="0" rIns="0" bIns="0" rtlCol="0" anchor="ctr"/>
+          <a:lstStyle/>
+          <a:p>
+            <a:pPr algn="ctr" indent="0" marL="0">
+              <a:buNone/>
+            </a:pPr>
+            <a:r>
+              <a:rPr lang="en-US" sz="1000" b="1" dirty="0">
+                <a:solidFill>
+                  <a:srgbClr val="0B3D42"/>
+                </a:solidFill>
+                <a:latin typeface="Calibri" pitchFamily="34" charset="0"/>
+                <a:ea typeface="Calibri" pitchFamily="34" charset="-122"/>
+                <a:cs typeface="Calibri" pitchFamily="34" charset="-120"/>
+              </a:rPr>
+              <a:t>Estamos aquí</a:t>
+            </a:r>
+            <a:endParaRPr lang="en-US" sz="1000" dirty="0"/>
+          </a:p>
+        </p:txBody>
+      </p:sp>
+      <p:sp>
+        <p:nvSpPr>
+          <p:cNvPr id="18" name="Shape 16"/>
+          <p:cNvSpPr/>
+          <p:nvPr/>
+        </p:nvSpPr>
+        <p:spPr>
+          <a:xfrm>
+            <a:off x="548640" y="2971800"/>
+            <a:ext cx="3535680" cy="868680"/>
+          </a:xfrm>
+          <a:prstGeom prst="roundRect">
+            <a:avLst>
+              <a:gd name="adj" fmla="val 7368"/>
             </a:avLst>
           </a:prstGeom>
           <a:solidFill>
@@ -7813,25 +7619,18 @@
             </a:solidFill>
             <a:prstDash val="solid"/>
           </a:ln>
-          <a:effectLst>
-            <a:outerShdw sx="100000" sy="100000" kx="0" ky="0" algn="bl" rotWithShape="0" blurRad="76200" dist="25400" dir="5400000">
-              <a:srgbClr val="1F3A3C">
-                <a:alpha val="12000"/>
-              </a:srgbClr>
-            </a:outerShdw>
-          </a:effectLst>
-        </p:spPr>
-      </p:sp>
-      <p:sp>
-        <p:nvSpPr>
-          <p:cNvPr id="6" name="Text 4"/>
-          <p:cNvSpPr txBox="1"/>
-          <p:nvPr/>
-        </p:nvSpPr>
-        <p:spPr>
-          <a:xfrm>
-            <a:off x="777240" y="2130552"/>
-            <a:ext cx="4892040" cy="502920"/>
+        </p:spPr>
+      </p:sp>
+      <p:sp>
+        <p:nvSpPr>
+          <p:cNvPr id="19" name="Text 17"/>
+          <p:cNvSpPr txBox="1"/>
+          <p:nvPr/>
+        </p:nvSpPr>
+        <p:spPr>
+          <a:xfrm>
+            <a:off x="685800" y="3044952"/>
+            <a:ext cx="3261360" cy="274320"/>
           </a:xfrm>
           <a:prstGeom prst="rect">
             <a:avLst/>
@@ -7847,30 +7646,30 @@
               <a:buNone/>
             </a:pPr>
             <a:r>
-              <a:rPr lang="en-US" sz="1350" b="1" dirty="0">
-                <a:solidFill>
-                  <a:srgbClr val="0B2B2E"/>
-                </a:solidFill>
-                <a:latin typeface="Calibri" pitchFamily="34" charset="0"/>
-                <a:ea typeface="Calibri" pitchFamily="34" charset="-122"/>
-                <a:cs typeface="Calibri" pitchFamily="34" charset="-120"/>
-              </a:rPr>
-              <a:t>Repositorio GitHub actualizado</a:t>
-            </a:r>
-            <a:endParaRPr lang="en-US" sz="1350" dirty="0"/>
-          </a:p>
-        </p:txBody>
-      </p:sp>
-      <p:sp>
-        <p:nvSpPr>
-          <p:cNvPr id="7" name="Text 5"/>
-          <p:cNvSpPr txBox="1"/>
-          <p:nvPr/>
-        </p:nvSpPr>
-        <p:spPr>
-          <a:xfrm>
-            <a:off x="777240" y="2624328"/>
-            <a:ext cx="4892040" cy="1005840"/>
+              <a:rPr lang="en-US" sz="1150" b="1" dirty="0">
+                <a:solidFill>
+                  <a:srgbClr val="028090"/>
+                </a:solidFill>
+                <a:latin typeface="Calibri" pitchFamily="34" charset="0"/>
+                <a:ea typeface="Calibri" pitchFamily="34" charset="-122"/>
+                <a:cs typeface="Calibri" pitchFamily="34" charset="-120"/>
+              </a:rPr>
+              <a:t>Sprint 1 (S5-6)</a:t>
+            </a:r>
+            <a:endParaRPr lang="en-US" sz="1150" dirty="0"/>
+          </a:p>
+        </p:txBody>
+      </p:sp>
+      <p:sp>
+        <p:nvSpPr>
+          <p:cNvPr id="20" name="Text 18"/>
+          <p:cNvSpPr txBox="1"/>
+          <p:nvPr/>
+        </p:nvSpPr>
+        <p:spPr>
+          <a:xfrm>
+            <a:off x="685800" y="3319272"/>
+            <a:ext cx="3261360" cy="457200"/>
           </a:xfrm>
           <a:prstGeom prst="rect">
             <a:avLst/>
@@ -7884,39 +7683,39 @@
           <a:p>
             <a:pPr indent="0" marL="0">
               <a:lnSpc>
-                <a:spcPct val="115000"/>
+                <a:spcPct val="105000"/>
               </a:lnSpc>
               <a:buNone/>
             </a:pPr>
             <a:r>
-              <a:rPr lang="en-US" sz="1150" dirty="0">
-                <a:solidFill>
-                  <a:srgbClr val="5C7A7C"/>
-                </a:solidFill>
-                <a:latin typeface="Calibri" pitchFamily="34" charset="0"/>
-                <a:ea typeface="Calibri" pitchFamily="34" charset="-122"/>
-                <a:cs typeface="Calibri" pitchFamily="34" charset="-120"/>
-              </a:rPr>
-              <a:t>Código del módulo de autenticación, modelo de datos y estructura base</a:t>
-            </a:r>
-            <a:endParaRPr lang="en-US" sz="1150" dirty="0"/>
-          </a:p>
-        </p:txBody>
-      </p:sp>
-      <p:sp>
-        <p:nvSpPr>
-          <p:cNvPr id="8" name="Shape 6"/>
+              <a:rPr lang="en-US" sz="1000" dirty="0">
+                <a:solidFill>
+                  <a:srgbClr val="0B2B2E"/>
+                </a:solidFill>
+                <a:latin typeface="Calibri" pitchFamily="34" charset="0"/>
+                <a:ea typeface="Calibri" pitchFamily="34" charset="-122"/>
+                <a:cs typeface="Calibri" pitchFamily="34" charset="-120"/>
+              </a:rPr>
+              <a:t>Autenticación, modelo de datos, estructura base app</a:t>
+            </a:r>
+            <a:endParaRPr lang="en-US" sz="1000" dirty="0"/>
+          </a:p>
+        </p:txBody>
+      </p:sp>
+      <p:sp>
+        <p:nvSpPr>
+          <p:cNvPr id="21" name="Shape 19"/>
           <p:cNvSpPr/>
           <p:nvPr/>
         </p:nvSpPr>
         <p:spPr>
           <a:xfrm>
-            <a:off x="548640" y="3931920"/>
-            <a:ext cx="5349240" cy="1783080"/>
+            <a:off x="4312920" y="2971800"/>
+            <a:ext cx="3535680" cy="868680"/>
           </a:xfrm>
           <a:prstGeom prst="roundRect">
             <a:avLst>
-              <a:gd name="adj" fmla="val 4103"/>
+              <a:gd name="adj" fmla="val 7368"/>
             </a:avLst>
           </a:prstGeom>
           <a:solidFill>
@@ -7928,25 +7727,18 @@
             </a:solidFill>
             <a:prstDash val="solid"/>
           </a:ln>
-          <a:effectLst>
-            <a:outerShdw sx="100000" sy="100000" kx="0" ky="0" algn="bl" rotWithShape="0" blurRad="76200" dist="25400" dir="5400000">
-              <a:srgbClr val="1F3A3C">
-                <a:alpha val="12000"/>
-              </a:srgbClr>
-            </a:outerShdw>
-          </a:effectLst>
-        </p:spPr>
-      </p:sp>
-      <p:sp>
-        <p:nvSpPr>
-          <p:cNvPr id="9" name="Text 7"/>
-          <p:cNvSpPr txBox="1"/>
-          <p:nvPr/>
-        </p:nvSpPr>
-        <p:spPr>
-          <a:xfrm>
-            <a:off x="777240" y="4096512"/>
-            <a:ext cx="4892040" cy="502920"/>
+        </p:spPr>
+      </p:sp>
+      <p:sp>
+        <p:nvSpPr>
+          <p:cNvPr id="22" name="Text 20"/>
+          <p:cNvSpPr txBox="1"/>
+          <p:nvPr/>
+        </p:nvSpPr>
+        <p:spPr>
+          <a:xfrm>
+            <a:off x="4450080" y="3044952"/>
+            <a:ext cx="3261360" cy="274320"/>
           </a:xfrm>
           <a:prstGeom prst="rect">
             <a:avLst/>
@@ -7962,30 +7754,30 @@
               <a:buNone/>
             </a:pPr>
             <a:r>
-              <a:rPr lang="en-US" sz="1350" b="1" dirty="0">
-                <a:solidFill>
-                  <a:srgbClr val="0B2B2E"/>
-                </a:solidFill>
-                <a:latin typeface="Calibri" pitchFamily="34" charset="0"/>
-                <a:ea typeface="Calibri" pitchFamily="34" charset="-122"/>
-                <a:cs typeface="Calibri" pitchFamily="34" charset="-120"/>
-              </a:rPr>
-              <a:t>Informe de Avance Proyecto APT</a:t>
-            </a:r>
-            <a:endParaRPr lang="en-US" sz="1350" dirty="0"/>
-          </a:p>
-        </p:txBody>
-      </p:sp>
-      <p:sp>
-        <p:nvSpPr>
-          <p:cNvPr id="10" name="Text 8"/>
-          <p:cNvSpPr txBox="1"/>
-          <p:nvPr/>
-        </p:nvSpPr>
-        <p:spPr>
-          <a:xfrm>
-            <a:off x="777240" y="4590288"/>
-            <a:ext cx="4892040" cy="1005840"/>
+              <a:rPr lang="en-US" sz="1150" b="1" dirty="0">
+                <a:solidFill>
+                  <a:srgbClr val="028090"/>
+                </a:solidFill>
+                <a:latin typeface="Calibri" pitchFamily="34" charset="0"/>
+                <a:ea typeface="Calibri" pitchFamily="34" charset="-122"/>
+                <a:cs typeface="Calibri" pitchFamily="34" charset="-120"/>
+              </a:rPr>
+              <a:t>Sprint 2 (S7-8)</a:t>
+            </a:r>
+            <a:endParaRPr lang="en-US" sz="1150" dirty="0"/>
+          </a:p>
+        </p:txBody>
+      </p:sp>
+      <p:sp>
+        <p:nvSpPr>
+          <p:cNvPr id="23" name="Text 21"/>
+          <p:cNvSpPr txBox="1"/>
+          <p:nvPr/>
+        </p:nvSpPr>
+        <p:spPr>
+          <a:xfrm>
+            <a:off x="4450080" y="3319272"/>
+            <a:ext cx="3261360" cy="457200"/>
           </a:xfrm>
           <a:prstGeom prst="rect">
             <a:avLst/>
@@ -7999,100 +7791,39 @@
           <a:p>
             <a:pPr indent="0" marL="0">
               <a:lnSpc>
-                <a:spcPct val="115000"/>
+                <a:spcPct val="105000"/>
               </a:lnSpc>
               <a:buNone/>
             </a:pPr>
             <a:r>
-              <a:rPr lang="en-US" sz="1150" dirty="0">
-                <a:solidFill>
-                  <a:srgbClr val="5C7A7C"/>
-                </a:solidFill>
-                <a:latin typeface="Calibri" pitchFamily="34" charset="0"/>
-                <a:ea typeface="Calibri" pitchFamily="34" charset="-122"/>
-                <a:cs typeface="Calibri" pitchFamily="34" charset="-120"/>
-              </a:rPr>
-              <a:t>Resumen del estado de desarrollo y objetivos/metodología ajustados</a:t>
-            </a:r>
-            <a:endParaRPr lang="en-US" sz="1150" dirty="0"/>
-          </a:p>
-        </p:txBody>
-      </p:sp>
-      <p:sp>
-        <p:nvSpPr>
-          <p:cNvPr id="11" name="Shape 9"/>
+              <a:rPr lang="en-US" sz="1000" dirty="0">
+                <a:solidFill>
+                  <a:srgbClr val="0B2B2E"/>
+                </a:solidFill>
+                <a:latin typeface="Calibri" pitchFamily="34" charset="0"/>
+                <a:ea typeface="Calibri" pitchFamily="34" charset="-122"/>
+                <a:cs typeface="Calibri" pitchFamily="34" charset="-120"/>
+              </a:rPr>
+              <a:t>Medicamentos y rutinas: API + UI conectadas</a:t>
+            </a:r>
+            <a:endParaRPr lang="en-US" sz="1000" dirty="0"/>
+          </a:p>
+        </p:txBody>
+      </p:sp>
+      <p:sp>
+        <p:nvSpPr>
+          <p:cNvPr id="24" name="Shape 22"/>
           <p:cNvSpPr/>
           <p:nvPr/>
         </p:nvSpPr>
         <p:spPr>
           <a:xfrm>
-            <a:off x="6263640" y="1280160"/>
-            <a:ext cx="5349240" cy="502920"/>
+            <a:off x="8077200" y="2971800"/>
+            <a:ext cx="3535680" cy="868680"/>
           </a:xfrm>
           <a:prstGeom prst="roundRect">
             <a:avLst>
-              <a:gd name="adj" fmla="val 12727"/>
-            </a:avLst>
-          </a:prstGeom>
-          <a:solidFill>
-            <a:srgbClr val="00A896"/>
-          </a:solidFill>
-          <a:ln/>
-        </p:spPr>
-      </p:sp>
-      <p:sp>
-        <p:nvSpPr>
-          <p:cNvPr id="12" name="Text 10"/>
-          <p:cNvSpPr txBox="1"/>
-          <p:nvPr/>
-        </p:nvSpPr>
-        <p:spPr>
-          <a:xfrm>
-            <a:off x="6263640" y="1280160"/>
-            <a:ext cx="5349240" cy="502920"/>
-          </a:xfrm>
-          <a:prstGeom prst="rect">
-            <a:avLst/>
-          </a:prstGeom>
-          <a:noFill/>
-          <a:ln/>
-        </p:spPr>
-        <p:txBody>
-          <a:bodyPr wrap="square" lIns="0" tIns="0" rIns="0" bIns="0" rtlCol="0" anchor="ctr"/>
-          <a:lstStyle/>
-          <a:p>
-            <a:pPr algn="ctr" indent="0" marL="0">
-              <a:buNone/>
-            </a:pPr>
-            <a:r>
-              <a:rPr lang="en-US" sz="1500" b="1" dirty="0">
-                <a:solidFill>
-                  <a:srgbClr val="FFFFFF"/>
-                </a:solidFill>
-                <a:latin typeface="Calibri" pitchFamily="34" charset="0"/>
-                <a:ea typeface="Calibri" pitchFamily="34" charset="-122"/>
-                <a:cs typeface="Calibri" pitchFamily="34" charset="-120"/>
-              </a:rPr>
-              <a:t>Finales</a:t>
-            </a:r>
-            <a:endParaRPr lang="en-US" sz="1500" dirty="0"/>
-          </a:p>
-        </p:txBody>
-      </p:sp>
-      <p:sp>
-        <p:nvSpPr>
-          <p:cNvPr id="13" name="Shape 11"/>
-          <p:cNvSpPr/>
-          <p:nvPr/>
-        </p:nvSpPr>
-        <p:spPr>
-          <a:xfrm>
-            <a:off x="6263640" y="1965960"/>
-            <a:ext cx="5349240" cy="1783080"/>
-          </a:xfrm>
-          <a:prstGeom prst="roundRect">
-            <a:avLst>
-              <a:gd name="adj" fmla="val 4103"/>
+              <a:gd name="adj" fmla="val 7368"/>
             </a:avLst>
           </a:prstGeom>
           <a:solidFill>
@@ -8104,25 +7835,18 @@
             </a:solidFill>
             <a:prstDash val="solid"/>
           </a:ln>
-          <a:effectLst>
-            <a:outerShdw sx="100000" sy="100000" kx="0" ky="0" algn="bl" rotWithShape="0" blurRad="76200" dist="25400" dir="5400000">
-              <a:srgbClr val="1F3A3C">
-                <a:alpha val="12000"/>
-              </a:srgbClr>
-            </a:outerShdw>
-          </a:effectLst>
-        </p:spPr>
-      </p:sp>
-      <p:sp>
-        <p:nvSpPr>
-          <p:cNvPr id="14" name="Text 12"/>
-          <p:cNvSpPr txBox="1"/>
-          <p:nvPr/>
-        </p:nvSpPr>
-        <p:spPr>
-          <a:xfrm>
-            <a:off x="6492240" y="2130552"/>
-            <a:ext cx="4892040" cy="502920"/>
+        </p:spPr>
+      </p:sp>
+      <p:sp>
+        <p:nvSpPr>
+          <p:cNvPr id="25" name="Text 23"/>
+          <p:cNvSpPr txBox="1"/>
+          <p:nvPr/>
+        </p:nvSpPr>
+        <p:spPr>
+          <a:xfrm>
+            <a:off x="8214360" y="3044952"/>
+            <a:ext cx="3261360" cy="274320"/>
           </a:xfrm>
           <a:prstGeom prst="rect">
             <a:avLst/>
@@ -8138,30 +7862,30 @@
               <a:buNone/>
             </a:pPr>
             <a:r>
-              <a:rPr lang="en-US" sz="1350" b="1" dirty="0">
-                <a:solidFill>
-                  <a:srgbClr val="0B2B2E"/>
-                </a:solidFill>
-                <a:latin typeface="Calibri" pitchFamily="34" charset="0"/>
-                <a:ea typeface="Calibri" pitchFamily="34" charset="-122"/>
-                <a:cs typeface="Calibri" pitchFamily="34" charset="-120"/>
-              </a:rPr>
-              <a:t>Aplicación funcional + backend (Docker)</a:t>
-            </a:r>
-            <a:endParaRPr lang="en-US" sz="1350" dirty="0"/>
-          </a:p>
-        </p:txBody>
-      </p:sp>
-      <p:sp>
-        <p:nvSpPr>
-          <p:cNvPr id="15" name="Text 13"/>
-          <p:cNvSpPr txBox="1"/>
-          <p:nvPr/>
-        </p:nvSpPr>
-        <p:spPr>
-          <a:xfrm>
-            <a:off x="6492240" y="2624328"/>
-            <a:ext cx="4892040" cy="1005840"/>
+              <a:rPr lang="en-US" sz="1150" b="1" dirty="0">
+                <a:solidFill>
+                  <a:srgbClr val="028090"/>
+                </a:solidFill>
+                <a:latin typeface="Calibri" pitchFamily="34" charset="0"/>
+                <a:ea typeface="Calibri" pitchFamily="34" charset="-122"/>
+                <a:cs typeface="Calibri" pitchFamily="34" charset="-120"/>
+              </a:rPr>
+              <a:t>Sprint 3 (S9-10)</a:t>
+            </a:r>
+            <a:endParaRPr lang="en-US" sz="1150" dirty="0"/>
+          </a:p>
+        </p:txBody>
+      </p:sp>
+      <p:sp>
+        <p:nvSpPr>
+          <p:cNvPr id="26" name="Text 24"/>
+          <p:cNvSpPr txBox="1"/>
+          <p:nvPr/>
+        </p:nvSpPr>
+        <p:spPr>
+          <a:xfrm>
+            <a:off x="8214360" y="3319272"/>
+            <a:ext cx="3261360" cy="457200"/>
           </a:xfrm>
           <a:prstGeom prst="rect">
             <a:avLst/>
@@ -8175,39 +7899,39 @@
           <a:p>
             <a:pPr indent="0" marL="0">
               <a:lnSpc>
-                <a:spcPct val="115000"/>
+                <a:spcPct val="105000"/>
               </a:lnSpc>
               <a:buNone/>
             </a:pPr>
             <a:r>
-              <a:rPr lang="en-US" sz="1150" dirty="0">
-                <a:solidFill>
-                  <a:srgbClr val="5C7A7C"/>
-                </a:solidFill>
-                <a:latin typeface="Calibri" pitchFamily="34" charset="0"/>
-                <a:ea typeface="Calibri" pitchFamily="34" charset="-122"/>
-                <a:cs typeface="Calibri" pitchFamily="34" charset="-120"/>
-              </a:rPr>
-              <a:t>Módulos del MVP integrados y operativos</a:t>
-            </a:r>
-            <a:endParaRPr lang="en-US" sz="1150" dirty="0"/>
-          </a:p>
-        </p:txBody>
-      </p:sp>
-      <p:sp>
-        <p:nvSpPr>
-          <p:cNvPr id="16" name="Shape 14"/>
+              <a:rPr lang="en-US" sz="1000" dirty="0">
+                <a:solidFill>
+                  <a:srgbClr val="0B2B2E"/>
+                </a:solidFill>
+                <a:latin typeface="Calibri" pitchFamily="34" charset="0"/>
+                <a:ea typeface="Calibri" pitchFamily="34" charset="-122"/>
+                <a:cs typeface="Calibri" pitchFamily="34" charset="-120"/>
+              </a:rPr>
+              <a:t>Perfiles dependientes y permisos · Informe de Avance</a:t>
+            </a:r>
+            <a:endParaRPr lang="en-US" sz="1000" dirty="0"/>
+          </a:p>
+        </p:txBody>
+      </p:sp>
+      <p:sp>
+        <p:nvSpPr>
+          <p:cNvPr id="27" name="Shape 25"/>
           <p:cNvSpPr/>
           <p:nvPr/>
         </p:nvSpPr>
         <p:spPr>
           <a:xfrm>
-            <a:off x="6263640" y="3931920"/>
-            <a:ext cx="5349240" cy="1783080"/>
+            <a:off x="548640" y="3977640"/>
+            <a:ext cx="3535680" cy="868680"/>
           </a:xfrm>
           <a:prstGeom prst="roundRect">
             <a:avLst>
-              <a:gd name="adj" fmla="val 4103"/>
+              <a:gd name="adj" fmla="val 7368"/>
             </a:avLst>
           </a:prstGeom>
           <a:solidFill>
@@ -8219,25 +7943,18 @@
             </a:solidFill>
             <a:prstDash val="solid"/>
           </a:ln>
-          <a:effectLst>
-            <a:outerShdw sx="100000" sy="100000" kx="0" ky="0" algn="bl" rotWithShape="0" blurRad="76200" dist="25400" dir="5400000">
-              <a:srgbClr val="1F3A3C">
-                <a:alpha val="12000"/>
-              </a:srgbClr>
-            </a:outerShdw>
-          </a:effectLst>
-        </p:spPr>
-      </p:sp>
-      <p:sp>
-        <p:nvSpPr>
-          <p:cNvPr id="17" name="Text 15"/>
-          <p:cNvSpPr txBox="1"/>
-          <p:nvPr/>
-        </p:nvSpPr>
-        <p:spPr>
-          <a:xfrm>
-            <a:off x="6492240" y="4096512"/>
-            <a:ext cx="4892040" cy="502920"/>
+        </p:spPr>
+      </p:sp>
+      <p:sp>
+        <p:nvSpPr>
+          <p:cNvPr id="28" name="Text 26"/>
+          <p:cNvSpPr txBox="1"/>
+          <p:nvPr/>
+        </p:nvSpPr>
+        <p:spPr>
+          <a:xfrm>
+            <a:off x="685800" y="4050792"/>
+            <a:ext cx="3261360" cy="274320"/>
           </a:xfrm>
           <a:prstGeom prst="rect">
             <a:avLst/>
@@ -8253,30 +7970,30 @@
               <a:buNone/>
             </a:pPr>
             <a:r>
-              <a:rPr lang="en-US" sz="1350" b="1" dirty="0">
-                <a:solidFill>
-                  <a:srgbClr val="0B2B2E"/>
-                </a:solidFill>
-                <a:latin typeface="Calibri" pitchFamily="34" charset="0"/>
-                <a:ea typeface="Calibri" pitchFamily="34" charset="-122"/>
-                <a:cs typeface="Calibri" pitchFamily="34" charset="-120"/>
-              </a:rPr>
-              <a:t>Informe Final + manual técnico + README</a:t>
-            </a:r>
-            <a:endParaRPr lang="en-US" sz="1350" dirty="0"/>
-          </a:p>
-        </p:txBody>
-      </p:sp>
-      <p:sp>
-        <p:nvSpPr>
-          <p:cNvPr id="18" name="Text 16"/>
-          <p:cNvSpPr txBox="1"/>
-          <p:nvPr/>
-        </p:nvSpPr>
-        <p:spPr>
-          <a:xfrm>
-            <a:off x="6492240" y="4590288"/>
-            <a:ext cx="4892040" cy="1005840"/>
+              <a:rPr lang="en-US" sz="1150" b="1" dirty="0">
+                <a:solidFill>
+                  <a:srgbClr val="028090"/>
+                </a:solidFill>
+                <a:latin typeface="Calibri" pitchFamily="34" charset="0"/>
+                <a:ea typeface="Calibri" pitchFamily="34" charset="-122"/>
+                <a:cs typeface="Calibri" pitchFamily="34" charset="-120"/>
+              </a:rPr>
+              <a:t>Sprint 4 (S11-12)</a:t>
+            </a:r>
+            <a:endParaRPr lang="en-US" sz="1150" dirty="0"/>
+          </a:p>
+        </p:txBody>
+      </p:sp>
+      <p:sp>
+        <p:nvSpPr>
+          <p:cNvPr id="29" name="Text 27"/>
+          <p:cNvSpPr txBox="1"/>
+          <p:nvPr/>
+        </p:nvSpPr>
+        <p:spPr>
+          <a:xfrm>
+            <a:off x="685800" y="4325112"/>
+            <a:ext cx="3261360" cy="457200"/>
           </a:xfrm>
           <a:prstGeom prst="rect">
             <a:avLst/>
@@ -8290,12 +8007,267 @@
           <a:p>
             <a:pPr indent="0" marL="0">
               <a:lnSpc>
-                <a:spcPct val="115000"/>
+                <a:spcPct val="105000"/>
               </a:lnSpc>
               <a:buNone/>
             </a:pPr>
             <a:r>
-              <a:rPr lang="en-US" sz="1150" dirty="0">
+              <a:rPr lang="en-US" sz="1000" dirty="0">
+                <a:solidFill>
+                  <a:srgbClr val="0B2B2E"/>
+                </a:solidFill>
+                <a:latin typeface="Calibri" pitchFamily="34" charset="0"/>
+                <a:ea typeface="Calibri" pitchFamily="34" charset="-122"/>
+                <a:cs typeface="Calibri" pitchFamily="34" charset="-120"/>
+              </a:rPr>
+              <a:t>Recordatorios, alertas e interfaz simplificada</a:t>
+            </a:r>
+            <a:endParaRPr lang="en-US" sz="1000" dirty="0"/>
+          </a:p>
+        </p:txBody>
+      </p:sp>
+      <p:sp>
+        <p:nvSpPr>
+          <p:cNvPr id="30" name="Shape 28"/>
+          <p:cNvSpPr/>
+          <p:nvPr/>
+        </p:nvSpPr>
+        <p:spPr>
+          <a:xfrm>
+            <a:off x="4312920" y="3977640"/>
+            <a:ext cx="3535680" cy="868680"/>
+          </a:xfrm>
+          <a:prstGeom prst="roundRect">
+            <a:avLst>
+              <a:gd name="adj" fmla="val 7368"/>
+            </a:avLst>
+          </a:prstGeom>
+          <a:solidFill>
+            <a:srgbClr val="FFFFFF"/>
+          </a:solidFill>
+          <a:ln w="12700">
+            <a:solidFill>
+              <a:srgbClr val="DCEDEC"/>
+            </a:solidFill>
+            <a:prstDash val="solid"/>
+          </a:ln>
+        </p:spPr>
+      </p:sp>
+      <p:sp>
+        <p:nvSpPr>
+          <p:cNvPr id="31" name="Text 29"/>
+          <p:cNvSpPr txBox="1"/>
+          <p:nvPr/>
+        </p:nvSpPr>
+        <p:spPr>
+          <a:xfrm>
+            <a:off x="4450080" y="4050792"/>
+            <a:ext cx="3261360" cy="274320"/>
+          </a:xfrm>
+          <a:prstGeom prst="rect">
+            <a:avLst/>
+          </a:prstGeom>
+          <a:noFill/>
+          <a:ln/>
+        </p:spPr>
+        <p:txBody>
+          <a:bodyPr wrap="square" lIns="0" tIns="0" rIns="0" bIns="0" rtlCol="0" anchor="ctr"/>
+          <a:lstStyle/>
+          <a:p>
+            <a:pPr indent="0" marL="0">
+              <a:buNone/>
+            </a:pPr>
+            <a:r>
+              <a:rPr lang="en-US" sz="1150" b="1" dirty="0">
+                <a:solidFill>
+                  <a:srgbClr val="028090"/>
+                </a:solidFill>
+                <a:latin typeface="Calibri" pitchFamily="34" charset="0"/>
+                <a:ea typeface="Calibri" pitchFamily="34" charset="-122"/>
+                <a:cs typeface="Calibri" pitchFamily="34" charset="-120"/>
+              </a:rPr>
+              <a:t>Sprint 5 (S13-14)</a:t>
+            </a:r>
+            <a:endParaRPr lang="en-US" sz="1150" dirty="0"/>
+          </a:p>
+        </p:txBody>
+      </p:sp>
+      <p:sp>
+        <p:nvSpPr>
+          <p:cNvPr id="32" name="Text 30"/>
+          <p:cNvSpPr txBox="1"/>
+          <p:nvPr/>
+        </p:nvSpPr>
+        <p:spPr>
+          <a:xfrm>
+            <a:off x="4450080" y="4325112"/>
+            <a:ext cx="3261360" cy="457200"/>
+          </a:xfrm>
+          <a:prstGeom prst="rect">
+            <a:avLst/>
+          </a:prstGeom>
+          <a:noFill/>
+          <a:ln/>
+        </p:spPr>
+        <p:txBody>
+          <a:bodyPr wrap="square" lIns="0" tIns="0" rIns="0" bIns="0" rtlCol="0" anchor="ctr"/>
+          <a:lstStyle/>
+          <a:p>
+            <a:pPr indent="0" marL="0">
+              <a:lnSpc>
+                <a:spcPct val="105000"/>
+              </a:lnSpc>
+              <a:buNone/>
+            </a:pPr>
+            <a:r>
+              <a:rPr lang="en-US" sz="1000" dirty="0">
+                <a:solidFill>
+                  <a:srgbClr val="0B2B2E"/>
+                </a:solidFill>
+                <a:latin typeface="Calibri" pitchFamily="34" charset="0"/>
+                <a:ea typeface="Calibri" pitchFamily="34" charset="-122"/>
+                <a:cs typeface="Calibri" pitchFamily="34" charset="-120"/>
+              </a:rPr>
+              <a:t>Indicadores de salud, módulo de IA y pulsera inteligente</a:t>
+            </a:r>
+            <a:endParaRPr lang="en-US" sz="1000" dirty="0"/>
+          </a:p>
+        </p:txBody>
+      </p:sp>
+      <p:sp>
+        <p:nvSpPr>
+          <p:cNvPr id="33" name="Shape 31"/>
+          <p:cNvSpPr/>
+          <p:nvPr/>
+        </p:nvSpPr>
+        <p:spPr>
+          <a:xfrm>
+            <a:off x="8077200" y="3977640"/>
+            <a:ext cx="3535680" cy="868680"/>
+          </a:xfrm>
+          <a:prstGeom prst="roundRect">
+            <a:avLst>
+              <a:gd name="adj" fmla="val 7368"/>
+            </a:avLst>
+          </a:prstGeom>
+          <a:solidFill>
+            <a:srgbClr val="FFFFFF"/>
+          </a:solidFill>
+          <a:ln w="12700">
+            <a:solidFill>
+              <a:srgbClr val="DCEDEC"/>
+            </a:solidFill>
+            <a:prstDash val="solid"/>
+          </a:ln>
+        </p:spPr>
+      </p:sp>
+      <p:sp>
+        <p:nvSpPr>
+          <p:cNvPr id="34" name="Text 32"/>
+          <p:cNvSpPr txBox="1"/>
+          <p:nvPr/>
+        </p:nvSpPr>
+        <p:spPr>
+          <a:xfrm>
+            <a:off x="8214360" y="4050792"/>
+            <a:ext cx="3261360" cy="274320"/>
+          </a:xfrm>
+          <a:prstGeom prst="rect">
+            <a:avLst/>
+          </a:prstGeom>
+          <a:noFill/>
+          <a:ln/>
+        </p:spPr>
+        <p:txBody>
+          <a:bodyPr wrap="square" lIns="0" tIns="0" rIns="0" bIns="0" rtlCol="0" anchor="ctr"/>
+          <a:lstStyle/>
+          <a:p>
+            <a:pPr indent="0" marL="0">
+              <a:buNone/>
+            </a:pPr>
+            <a:r>
+              <a:rPr lang="en-US" sz="1150" b="1" dirty="0">
+                <a:solidFill>
+                  <a:srgbClr val="028090"/>
+                </a:solidFill>
+                <a:latin typeface="Calibri" pitchFamily="34" charset="0"/>
+                <a:ea typeface="Calibri" pitchFamily="34" charset="-122"/>
+                <a:cs typeface="Calibri" pitchFamily="34" charset="-120"/>
+              </a:rPr>
+              <a:t>Sprint 6 (S15)</a:t>
+            </a:r>
+            <a:endParaRPr lang="en-US" sz="1150" dirty="0"/>
+          </a:p>
+        </p:txBody>
+      </p:sp>
+      <p:sp>
+        <p:nvSpPr>
+          <p:cNvPr id="35" name="Text 33"/>
+          <p:cNvSpPr txBox="1"/>
+          <p:nvPr/>
+        </p:nvSpPr>
+        <p:spPr>
+          <a:xfrm>
+            <a:off x="8214360" y="4325112"/>
+            <a:ext cx="3261360" cy="457200"/>
+          </a:xfrm>
+          <a:prstGeom prst="rect">
+            <a:avLst/>
+          </a:prstGeom>
+          <a:noFill/>
+          <a:ln/>
+        </p:spPr>
+        <p:txBody>
+          <a:bodyPr wrap="square" lIns="0" tIns="0" rIns="0" bIns="0" rtlCol="0" anchor="ctr"/>
+          <a:lstStyle/>
+          <a:p>
+            <a:pPr indent="0" marL="0">
+              <a:lnSpc>
+                <a:spcPct val="105000"/>
+              </a:lnSpc>
+              <a:buNone/>
+            </a:pPr>
+            <a:r>
+              <a:rPr lang="en-US" sz="1000" dirty="0">
+                <a:solidFill>
+                  <a:srgbClr val="0B2B2E"/>
+                </a:solidFill>
+                <a:latin typeface="Calibri" pitchFamily="34" charset="0"/>
+                <a:ea typeface="Calibri" pitchFamily="34" charset="-122"/>
+                <a:cs typeface="Calibri" pitchFamily="34" charset="-120"/>
+              </a:rPr>
+              <a:t>Recordatorios extendidos, farmacias vía IA, pruebas e Informe Final</a:t>
+            </a:r>
+            <a:endParaRPr lang="en-US" sz="1000" dirty="0"/>
+          </a:p>
+        </p:txBody>
+      </p:sp>
+      <p:sp>
+        <p:nvSpPr>
+          <p:cNvPr id="36" name="Text 34"/>
+          <p:cNvSpPr txBox="1"/>
+          <p:nvPr/>
+        </p:nvSpPr>
+        <p:spPr>
+          <a:xfrm>
+            <a:off x="548640" y="5257800"/>
+            <a:ext cx="11064240" cy="548640"/>
+          </a:xfrm>
+          <a:prstGeom prst="rect">
+            <a:avLst/>
+          </a:prstGeom>
+          <a:noFill/>
+          <a:ln/>
+        </p:spPr>
+        <p:txBody>
+          <a:bodyPr wrap="square" lIns="0" tIns="0" rIns="0" bIns="0" rtlCol="0" anchor="ctr"/>
+          <a:lstStyle/>
+          <a:p>
+            <a:pPr indent="0" marL="0">
+              <a:buNone/>
+            </a:pPr>
+            <a:r>
+              <a:rPr lang="en-US" sz="1150" i="1" dirty="0">
                 <a:solidFill>
                   <a:srgbClr val="5C7A7C"/>
                 </a:solidFill>
@@ -8303,7 +8275,7 @@
                 <a:ea typeface="Calibri" pitchFamily="34" charset="-122"/>
                 <a:cs typeface="Calibri" pitchFamily="34" charset="-120"/>
               </a:rPr>
-              <a:t>Documentación completa, arquitectura y despliegue</a:t>
+              <a:t>Principal facilitador: el equipo ya domina las tecnologías definidas. Principal obstáculo: coordinar horarios entre los tres integrantes — se mitiga con reuniones semanales fijas.</a:t>
             </a:r>
             <a:endParaRPr lang="en-US" sz="1150" dirty="0"/>
           </a:p>
@@ -8311,46 +8283,7 @@
       </p:sp>
       <p:sp>
         <p:nvSpPr>
-          <p:cNvPr id="19" name="Text 17"/>
-          <p:cNvSpPr txBox="1"/>
-          <p:nvPr/>
-        </p:nvSpPr>
-        <p:spPr>
-          <a:xfrm>
-            <a:off x="548640" y="5989320"/>
-            <a:ext cx="11064240" cy="365760"/>
-          </a:xfrm>
-          <a:prstGeom prst="rect">
-            <a:avLst/>
-          </a:prstGeom>
-          <a:noFill/>
-          <a:ln/>
-        </p:spPr>
-        <p:txBody>
-          <a:bodyPr wrap="square" lIns="0" tIns="0" rIns="0" bIns="0" rtlCol="0" anchor="ctr"/>
-          <a:lstStyle/>
-          <a:p>
-            <a:pPr indent="0" marL="0">
-              <a:buNone/>
-            </a:pPr>
-            <a:r>
-              <a:rPr lang="en-US" sz="1100" i="1" dirty="0">
-                <a:solidFill>
-                  <a:srgbClr val="5C7A7C"/>
-                </a:solidFill>
-                <a:latin typeface="Calibri" pitchFamily="34" charset="0"/>
-                <a:ea typeface="Calibri" pitchFamily="34" charset="-122"/>
-                <a:cs typeface="Calibri" pitchFamily="34" charset="-120"/>
-              </a:rPr>
-              <a:t>En Fase 1 el proyecto está en etapa de definición y planificación; los indicadores de implementación se evidenciarán en Fase 2.</a:t>
-            </a:r>
-            <a:endParaRPr lang="en-US" sz="1100" dirty="0"/>
-          </a:p>
-        </p:txBody>
-      </p:sp>
-      <p:sp>
-        <p:nvSpPr>
-          <p:cNvPr id="20" name="Text 18"/>
+          <p:cNvPr id="37" name="Text 35"/>
           <p:cNvSpPr txBox="1"/>
           <p:nvPr/>
         </p:nvSpPr>
@@ -8389,7 +8322,7 @@
       </p:sp>
       <p:sp>
         <p:nvSpPr>
-          <p:cNvPr id="21" name="Text 19"/>
+          <p:cNvPr id="38" name="Text 36"/>
           <p:cNvSpPr txBox="1"/>
           <p:nvPr/>
         </p:nvSpPr>
@@ -8491,7 +8424,7 @@
                 <a:ea typeface="Cambria" pitchFamily="34" charset="-122"/>
                 <a:cs typeface="Cambria" pitchFamily="34" charset="-120"/>
               </a:rPr>
-              <a:t>Factibilidad del proyecto</a:t>
+              <a:t>Evidencias planificadas</a:t>
             </a:r>
             <a:endParaRPr lang="en-US" sz="3000" dirty="0"/>
           </a:p>
@@ -8505,12 +8438,73 @@
         </p:nvSpPr>
         <p:spPr>
           <a:xfrm>
-            <a:off x="548640" y="1325880"/>
-            <a:ext cx="3474720" cy="2011680"/>
+            <a:off x="548640" y="1280160"/>
+            <a:ext cx="5349240" cy="502920"/>
           </a:xfrm>
           <a:prstGeom prst="roundRect">
             <a:avLst>
-              <a:gd name="adj" fmla="val 4091"/>
+              <a:gd name="adj" fmla="val 12727"/>
+            </a:avLst>
+          </a:prstGeom>
+          <a:solidFill>
+            <a:srgbClr val="028090"/>
+          </a:solidFill>
+          <a:ln/>
+        </p:spPr>
+      </p:sp>
+      <p:sp>
+        <p:nvSpPr>
+          <p:cNvPr id="4" name="Text 2"/>
+          <p:cNvSpPr txBox="1"/>
+          <p:nvPr/>
+        </p:nvSpPr>
+        <p:spPr>
+          <a:xfrm>
+            <a:off x="548640" y="1280160"/>
+            <a:ext cx="5349240" cy="502920"/>
+          </a:xfrm>
+          <a:prstGeom prst="rect">
+            <a:avLst/>
+          </a:prstGeom>
+          <a:noFill/>
+          <a:ln/>
+        </p:spPr>
+        <p:txBody>
+          <a:bodyPr wrap="square" lIns="0" tIns="0" rIns="0" bIns="0" rtlCol="0" anchor="ctr"/>
+          <a:lstStyle/>
+          <a:p>
+            <a:pPr algn="ctr" indent="0" marL="0">
+              <a:buNone/>
+            </a:pPr>
+            <a:r>
+              <a:rPr lang="en-US" sz="1500" b="1" dirty="0">
+                <a:solidFill>
+                  <a:srgbClr val="FFFFFF"/>
+                </a:solidFill>
+                <a:latin typeface="Calibri" pitchFamily="34" charset="0"/>
+                <a:ea typeface="Calibri" pitchFamily="34" charset="-122"/>
+                <a:cs typeface="Calibri" pitchFamily="34" charset="-120"/>
+              </a:rPr>
+              <a:t>De avance</a:t>
+            </a:r>
+            <a:endParaRPr lang="en-US" sz="1500" dirty="0"/>
+          </a:p>
+        </p:txBody>
+      </p:sp>
+      <p:sp>
+        <p:nvSpPr>
+          <p:cNvPr id="5" name="Shape 3"/>
+          <p:cNvSpPr/>
+          <p:nvPr/>
+        </p:nvSpPr>
+        <p:spPr>
+          <a:xfrm>
+            <a:off x="548640" y="1965960"/>
+            <a:ext cx="5349240" cy="1783080"/>
+          </a:xfrm>
+          <a:prstGeom prst="roundRect">
+            <a:avLst>
+              <a:gd name="adj" fmla="val 4103"/>
             </a:avLst>
           </a:prstGeom>
           <a:solidFill>
@@ -8533,73 +8527,14 @@
       </p:sp>
       <p:sp>
         <p:nvSpPr>
-          <p:cNvPr id="4" name="Shape 2"/>
-          <p:cNvSpPr/>
-          <p:nvPr/>
-        </p:nvSpPr>
-        <p:spPr>
-          <a:xfrm>
-            <a:off x="731520" y="1508760"/>
-            <a:ext cx="502920" cy="502920"/>
-          </a:xfrm>
-          <a:prstGeom prst="ellipse">
-            <a:avLst/>
-          </a:prstGeom>
-          <a:solidFill>
-            <a:srgbClr val="028090"/>
-          </a:solidFill>
-          <a:ln/>
-        </p:spPr>
-      </p:sp>
-      <p:sp>
-        <p:nvSpPr>
-          <p:cNvPr id="5" name="Text 3"/>
-          <p:cNvSpPr txBox="1"/>
-          <p:nvPr/>
-        </p:nvSpPr>
-        <p:spPr>
-          <a:xfrm>
-            <a:off x="731520" y="1508760"/>
-            <a:ext cx="502920" cy="502920"/>
-          </a:xfrm>
-          <a:prstGeom prst="rect">
-            <a:avLst/>
-          </a:prstGeom>
-          <a:noFill/>
-          <a:ln/>
-        </p:spPr>
-        <p:txBody>
-          <a:bodyPr wrap="square" lIns="0" tIns="0" rIns="0" bIns="0" rtlCol="0" anchor="ctr"/>
-          <a:lstStyle/>
-          <a:p>
-            <a:pPr algn="ctr" indent="0" marL="0">
-              <a:buNone/>
-            </a:pPr>
-            <a:r>
-              <a:rPr lang="en-US" sz="1800" dirty="0">
-                <a:solidFill>
-                  <a:srgbClr val="000000"/>
-                </a:solidFill>
-                <a:latin typeface="Calibri" pitchFamily="34" charset="0"/>
-                <a:ea typeface="Calibri" pitchFamily="34" charset="-122"/>
-                <a:cs typeface="Calibri" pitchFamily="34" charset="-120"/>
-              </a:rPr>
-              <a:t>🕒</a:t>
-            </a:r>
-            <a:endParaRPr lang="en-US" sz="1800" dirty="0"/>
-          </a:p>
-        </p:txBody>
-      </p:sp>
-      <p:sp>
-        <p:nvSpPr>
           <p:cNvPr id="6" name="Text 4"/>
           <p:cNvSpPr txBox="1"/>
           <p:nvPr/>
         </p:nvSpPr>
         <p:spPr>
           <a:xfrm>
-            <a:off x="1371600" y="1527048"/>
-            <a:ext cx="2468880" cy="365760"/>
+            <a:off x="777240" y="2130552"/>
+            <a:ext cx="4892040" cy="502920"/>
           </a:xfrm>
           <a:prstGeom prst="rect">
             <a:avLst/>
@@ -8623,7 +8558,7 @@
                 <a:ea typeface="Calibri" pitchFamily="34" charset="-122"/>
                 <a:cs typeface="Calibri" pitchFamily="34" charset="-120"/>
               </a:rPr>
-              <a:t>Tiempo</a:t>
+              <a:t>Repositorio GitHub actualizado</a:t>
             </a:r>
             <a:endParaRPr lang="en-US" sz="1350" dirty="0"/>
           </a:p>
@@ -8637,8 +8572,8 @@
         </p:nvSpPr>
         <p:spPr>
           <a:xfrm>
-            <a:off x="731520" y="2148840"/>
-            <a:ext cx="3108960" cy="1097280"/>
+            <a:off x="777240" y="2624328"/>
+            <a:ext cx="4892040" cy="1005840"/>
           </a:xfrm>
           <a:prstGeom prst="rect">
             <a:avLst/>
@@ -8657,7 +8592,7 @@
               <a:buNone/>
             </a:pPr>
             <a:r>
-              <a:rPr lang="en-US" sz="1080" dirty="0">
+              <a:rPr lang="en-US" sz="1150" dirty="0">
                 <a:solidFill>
                   <a:srgbClr val="5C7A7C"/>
                 </a:solidFill>
@@ -8665,9 +8600,9 @@
                 <a:ea typeface="Calibri" pitchFamily="34" charset="-122"/>
                 <a:cs typeface="Calibri" pitchFamily="34" charset="-120"/>
               </a:rPr>
-              <a:t>18 semanas de semestre, con 11 semanas de desarrollo intensivo en Fase 2</a:t>
-            </a:r>
-            <a:endParaRPr lang="en-US" sz="1080" dirty="0"/>
+              <a:t>Código del módulo de autenticación, modelo de datos y estructura base</a:t>
+            </a:r>
+            <a:endParaRPr lang="en-US" sz="1150" dirty="0"/>
           </a:p>
         </p:txBody>
       </p:sp>
@@ -8679,12 +8614,12 @@
         </p:nvSpPr>
         <p:spPr>
           <a:xfrm>
-            <a:off x="4343400" y="1325880"/>
-            <a:ext cx="3474720" cy="2011680"/>
+            <a:off x="548640" y="3931920"/>
+            <a:ext cx="5349240" cy="1783080"/>
           </a:xfrm>
           <a:prstGeom prst="roundRect">
             <a:avLst>
-              <a:gd name="adj" fmla="val 4091"/>
+              <a:gd name="adj" fmla="val 4103"/>
             </a:avLst>
           </a:prstGeom>
           <a:solidFill>
@@ -8707,23 +8642,42 @@
       </p:sp>
       <p:sp>
         <p:nvSpPr>
-          <p:cNvPr id="9" name="Shape 7"/>
-          <p:cNvSpPr/>
-          <p:nvPr/>
-        </p:nvSpPr>
-        <p:spPr>
-          <a:xfrm>
-            <a:off x="4526280" y="1508760"/>
-            <a:ext cx="502920" cy="502920"/>
-          </a:xfrm>
-          <a:prstGeom prst="ellipse">
-            <a:avLst/>
-          </a:prstGeom>
-          <a:solidFill>
-            <a:srgbClr val="00A896"/>
-          </a:solidFill>
-          <a:ln/>
-        </p:spPr>
+          <p:cNvPr id="9" name="Text 7"/>
+          <p:cNvSpPr txBox="1"/>
+          <p:nvPr/>
+        </p:nvSpPr>
+        <p:spPr>
+          <a:xfrm>
+            <a:off x="777240" y="4096512"/>
+            <a:ext cx="4892040" cy="502920"/>
+          </a:xfrm>
+          <a:prstGeom prst="rect">
+            <a:avLst/>
+          </a:prstGeom>
+          <a:noFill/>
+          <a:ln/>
+        </p:spPr>
+        <p:txBody>
+          <a:bodyPr wrap="square" lIns="0" tIns="0" rIns="0" bIns="0" rtlCol="0" anchor="ctr"/>
+          <a:lstStyle/>
+          <a:p>
+            <a:pPr indent="0" marL="0">
+              <a:buNone/>
+            </a:pPr>
+            <a:r>
+              <a:rPr lang="en-US" sz="1350" b="1" dirty="0">
+                <a:solidFill>
+                  <a:srgbClr val="0B2B2E"/>
+                </a:solidFill>
+                <a:latin typeface="Calibri" pitchFamily="34" charset="0"/>
+                <a:ea typeface="Calibri" pitchFamily="34" charset="-122"/>
+                <a:cs typeface="Calibri" pitchFamily="34" charset="-120"/>
+              </a:rPr>
+              <a:t>Informe de Avance Proyecto APT</a:t>
+            </a:r>
+            <a:endParaRPr lang="en-US" sz="1350" dirty="0"/>
+          </a:p>
+        </p:txBody>
       </p:sp>
       <p:sp>
         <p:nvSpPr>
@@ -8733,86 +8687,8 @@
         </p:nvSpPr>
         <p:spPr>
           <a:xfrm>
-            <a:off x="4526280" y="1508760"/>
-            <a:ext cx="502920" cy="502920"/>
-          </a:xfrm>
-          <a:prstGeom prst="rect">
-            <a:avLst/>
-          </a:prstGeom>
-          <a:noFill/>
-          <a:ln/>
-        </p:spPr>
-        <p:txBody>
-          <a:bodyPr wrap="square" lIns="0" tIns="0" rIns="0" bIns="0" rtlCol="0" anchor="ctr"/>
-          <a:lstStyle/>
-          <a:p>
-            <a:pPr algn="ctr" indent="0" marL="0">
-              <a:buNone/>
-            </a:pPr>
-            <a:r>
-              <a:rPr lang="en-US" sz="1800" dirty="0">
-                <a:solidFill>
-                  <a:srgbClr val="000000"/>
-                </a:solidFill>
-                <a:latin typeface="Calibri" pitchFamily="34" charset="0"/>
-                <a:ea typeface="Calibri" pitchFamily="34" charset="-122"/>
-                <a:cs typeface="Calibri" pitchFamily="34" charset="-120"/>
-              </a:rPr>
-              <a:t>🎓</a:t>
-            </a:r>
-            <a:endParaRPr lang="en-US" sz="1800" dirty="0"/>
-          </a:p>
-        </p:txBody>
-      </p:sp>
-      <p:sp>
-        <p:nvSpPr>
-          <p:cNvPr id="11" name="Text 9"/>
-          <p:cNvSpPr txBox="1"/>
-          <p:nvPr/>
-        </p:nvSpPr>
-        <p:spPr>
-          <a:xfrm>
-            <a:off x="5166360" y="1527048"/>
-            <a:ext cx="2468880" cy="365760"/>
-          </a:xfrm>
-          <a:prstGeom prst="rect">
-            <a:avLst/>
-          </a:prstGeom>
-          <a:noFill/>
-          <a:ln/>
-        </p:spPr>
-        <p:txBody>
-          <a:bodyPr wrap="square" lIns="0" tIns="0" rIns="0" bIns="0" rtlCol="0" anchor="ctr"/>
-          <a:lstStyle/>
-          <a:p>
-            <a:pPr indent="0" marL="0">
-              <a:buNone/>
-            </a:pPr>
-            <a:r>
-              <a:rPr lang="en-US" sz="1350" b="1" dirty="0">
-                <a:solidFill>
-                  <a:srgbClr val="0B2B2E"/>
-                </a:solidFill>
-                <a:latin typeface="Calibri" pitchFamily="34" charset="0"/>
-                <a:ea typeface="Calibri" pitchFamily="34" charset="-122"/>
-                <a:cs typeface="Calibri" pitchFamily="34" charset="-120"/>
-              </a:rPr>
-              <a:t>Horas asignadas</a:t>
-            </a:r>
-            <a:endParaRPr lang="en-US" sz="1350" dirty="0"/>
-          </a:p>
-        </p:txBody>
-      </p:sp>
-      <p:sp>
-        <p:nvSpPr>
-          <p:cNvPr id="12" name="Text 10"/>
-          <p:cNvSpPr txBox="1"/>
-          <p:nvPr/>
-        </p:nvSpPr>
-        <p:spPr>
-          <a:xfrm>
-            <a:off x="4526280" y="2148840"/>
-            <a:ext cx="3108960" cy="1097280"/>
+            <a:off x="777240" y="4590288"/>
+            <a:ext cx="4892040" cy="1005840"/>
           </a:xfrm>
           <a:prstGeom prst="rect">
             <a:avLst/>
@@ -8831,7 +8707,7 @@
               <a:buNone/>
             </a:pPr>
             <a:r>
-              <a:rPr lang="en-US" sz="1080" dirty="0">
+              <a:rPr lang="en-US" sz="1150" dirty="0">
                 <a:solidFill>
                   <a:srgbClr val="5C7A7C"/>
                 </a:solidFill>
@@ -8839,9 +8715,70 @@
                 <a:ea typeface="Calibri" pitchFamily="34" charset="-122"/>
                 <a:cs typeface="Calibri" pitchFamily="34" charset="-120"/>
               </a:rPr>
-              <a:t>CAPSTONE: 20 créditos (10 trabajo docente + 10 trabajo autónomo)</a:t>
-            </a:r>
-            <a:endParaRPr lang="en-US" sz="1080" dirty="0"/>
+              <a:t>Resumen del estado de desarrollo y objetivos/metodología ajustados</a:t>
+            </a:r>
+            <a:endParaRPr lang="en-US" sz="1150" dirty="0"/>
+          </a:p>
+        </p:txBody>
+      </p:sp>
+      <p:sp>
+        <p:nvSpPr>
+          <p:cNvPr id="11" name="Shape 9"/>
+          <p:cNvSpPr/>
+          <p:nvPr/>
+        </p:nvSpPr>
+        <p:spPr>
+          <a:xfrm>
+            <a:off x="6263640" y="1280160"/>
+            <a:ext cx="5349240" cy="502920"/>
+          </a:xfrm>
+          <a:prstGeom prst="roundRect">
+            <a:avLst>
+              <a:gd name="adj" fmla="val 12727"/>
+            </a:avLst>
+          </a:prstGeom>
+          <a:solidFill>
+            <a:srgbClr val="00A896"/>
+          </a:solidFill>
+          <a:ln/>
+        </p:spPr>
+      </p:sp>
+      <p:sp>
+        <p:nvSpPr>
+          <p:cNvPr id="12" name="Text 10"/>
+          <p:cNvSpPr txBox="1"/>
+          <p:nvPr/>
+        </p:nvSpPr>
+        <p:spPr>
+          <a:xfrm>
+            <a:off x="6263640" y="1280160"/>
+            <a:ext cx="5349240" cy="502920"/>
+          </a:xfrm>
+          <a:prstGeom prst="rect">
+            <a:avLst/>
+          </a:prstGeom>
+          <a:noFill/>
+          <a:ln/>
+        </p:spPr>
+        <p:txBody>
+          <a:bodyPr wrap="square" lIns="0" tIns="0" rIns="0" bIns="0" rtlCol="0" anchor="ctr"/>
+          <a:lstStyle/>
+          <a:p>
+            <a:pPr algn="ctr" indent="0" marL="0">
+              <a:buNone/>
+            </a:pPr>
+            <a:r>
+              <a:rPr lang="en-US" sz="1500" b="1" dirty="0">
+                <a:solidFill>
+                  <a:srgbClr val="FFFFFF"/>
+                </a:solidFill>
+                <a:latin typeface="Calibri" pitchFamily="34" charset="0"/>
+                <a:ea typeface="Calibri" pitchFamily="34" charset="-122"/>
+                <a:cs typeface="Calibri" pitchFamily="34" charset="-120"/>
+              </a:rPr>
+              <a:t>Finales</a:t>
+            </a:r>
+            <a:endParaRPr lang="en-US" sz="1500" dirty="0"/>
           </a:p>
         </p:txBody>
       </p:sp>
@@ -8853,12 +8790,12 @@
         </p:nvSpPr>
         <p:spPr>
           <a:xfrm>
-            <a:off x="8138160" y="1325880"/>
-            <a:ext cx="3474720" cy="2011680"/>
+            <a:off x="6263640" y="1965960"/>
+            <a:ext cx="5349240" cy="1783080"/>
           </a:xfrm>
           <a:prstGeom prst="roundRect">
             <a:avLst>
-              <a:gd name="adj" fmla="val 4091"/>
+              <a:gd name="adj" fmla="val 4103"/>
             </a:avLst>
           </a:prstGeom>
           <a:solidFill>
@@ -8881,23 +8818,42 @@
       </p:sp>
       <p:sp>
         <p:nvSpPr>
-          <p:cNvPr id="14" name="Shape 12"/>
-          <p:cNvSpPr/>
-          <p:nvPr/>
-        </p:nvSpPr>
-        <p:spPr>
-          <a:xfrm>
-            <a:off x="8321040" y="1508760"/>
-            <a:ext cx="502920" cy="502920"/>
-          </a:xfrm>
-          <a:prstGeom prst="ellipse">
-            <a:avLst/>
-          </a:prstGeom>
-          <a:solidFill>
-            <a:srgbClr val="02C39A"/>
-          </a:solidFill>
-          <a:ln/>
-        </p:spPr>
+          <p:cNvPr id="14" name="Text 12"/>
+          <p:cNvSpPr txBox="1"/>
+          <p:nvPr/>
+        </p:nvSpPr>
+        <p:spPr>
+          <a:xfrm>
+            <a:off x="6492240" y="2130552"/>
+            <a:ext cx="4892040" cy="502920"/>
+          </a:xfrm>
+          <a:prstGeom prst="rect">
+            <a:avLst/>
+          </a:prstGeom>
+          <a:noFill/>
+          <a:ln/>
+        </p:spPr>
+        <p:txBody>
+          <a:bodyPr wrap="square" lIns="0" tIns="0" rIns="0" bIns="0" rtlCol="0" anchor="ctr"/>
+          <a:lstStyle/>
+          <a:p>
+            <a:pPr indent="0" marL="0">
+              <a:buNone/>
+            </a:pPr>
+            <a:r>
+              <a:rPr lang="en-US" sz="1350" b="1" dirty="0">
+                <a:solidFill>
+                  <a:srgbClr val="0B2B2E"/>
+                </a:solidFill>
+                <a:latin typeface="Calibri" pitchFamily="34" charset="0"/>
+                <a:ea typeface="Calibri" pitchFamily="34" charset="-122"/>
+                <a:cs typeface="Calibri" pitchFamily="34" charset="-120"/>
+              </a:rPr>
+              <a:t>Aplicación funcional + backend (Docker)</a:t>
+            </a:r>
+            <a:endParaRPr lang="en-US" sz="1350" dirty="0"/>
+          </a:p>
+        </p:txBody>
       </p:sp>
       <p:sp>
         <p:nvSpPr>
@@ -8907,86 +8863,8 @@
         </p:nvSpPr>
         <p:spPr>
           <a:xfrm>
-            <a:off x="8321040" y="1508760"/>
-            <a:ext cx="502920" cy="502920"/>
-          </a:xfrm>
-          <a:prstGeom prst="rect">
-            <a:avLst/>
-          </a:prstGeom>
-          <a:noFill/>
-          <a:ln/>
-        </p:spPr>
-        <p:txBody>
-          <a:bodyPr wrap="square" lIns="0" tIns="0" rIns="0" bIns="0" rtlCol="0" anchor="ctr"/>
-          <a:lstStyle/>
-          <a:p>
-            <a:pPr algn="ctr" indent="0" marL="0">
-              <a:buNone/>
-            </a:pPr>
-            <a:r>
-              <a:rPr lang="en-US" sz="1800" dirty="0">
-                <a:solidFill>
-                  <a:srgbClr val="000000"/>
-                </a:solidFill>
-                <a:latin typeface="Calibri" pitchFamily="34" charset="0"/>
-                <a:ea typeface="Calibri" pitchFamily="34" charset="-122"/>
-                <a:cs typeface="Calibri" pitchFamily="34" charset="-120"/>
-              </a:rPr>
-              <a:t>🧰</a:t>
-            </a:r>
-            <a:endParaRPr lang="en-US" sz="1800" dirty="0"/>
-          </a:p>
-        </p:txBody>
-      </p:sp>
-      <p:sp>
-        <p:nvSpPr>
-          <p:cNvPr id="16" name="Text 14"/>
-          <p:cNvSpPr txBox="1"/>
-          <p:nvPr/>
-        </p:nvSpPr>
-        <p:spPr>
-          <a:xfrm>
-            <a:off x="8961120" y="1527048"/>
-            <a:ext cx="2468880" cy="365760"/>
-          </a:xfrm>
-          <a:prstGeom prst="rect">
-            <a:avLst/>
-          </a:prstGeom>
-          <a:noFill/>
-          <a:ln/>
-        </p:spPr>
-        <p:txBody>
-          <a:bodyPr wrap="square" lIns="0" tIns="0" rIns="0" bIns="0" rtlCol="0" anchor="ctr"/>
-          <a:lstStyle/>
-          <a:p>
-            <a:pPr indent="0" marL="0">
-              <a:buNone/>
-            </a:pPr>
-            <a:r>
-              <a:rPr lang="en-US" sz="1350" b="1" dirty="0">
-                <a:solidFill>
-                  <a:srgbClr val="0B2B2E"/>
-                </a:solidFill>
-                <a:latin typeface="Calibri" pitchFamily="34" charset="0"/>
-                <a:ea typeface="Calibri" pitchFamily="34" charset="-122"/>
-                <a:cs typeface="Calibri" pitchFamily="34" charset="-120"/>
-              </a:rPr>
-              <a:t>Materiales</a:t>
-            </a:r>
-            <a:endParaRPr lang="en-US" sz="1350" dirty="0"/>
-          </a:p>
-        </p:txBody>
-      </p:sp>
-      <p:sp>
-        <p:nvSpPr>
-          <p:cNvPr id="17" name="Text 15"/>
-          <p:cNvSpPr txBox="1"/>
-          <p:nvPr/>
-        </p:nvSpPr>
-        <p:spPr>
-          <a:xfrm>
-            <a:off x="8321040" y="2148840"/>
-            <a:ext cx="3108960" cy="1097280"/>
+            <a:off x="6492240" y="2624328"/>
+            <a:ext cx="4892040" cy="1005840"/>
           </a:xfrm>
           <a:prstGeom prst="rect">
             <a:avLst/>
@@ -9005,7 +8883,7 @@
               <a:buNone/>
             </a:pPr>
             <a:r>
-              <a:rPr lang="en-US" sz="1080" dirty="0">
+              <a:rPr lang="en-US" sz="1150" dirty="0">
                 <a:solidFill>
                   <a:srgbClr val="5C7A7C"/>
                 </a:solidFill>
@@ -9013,26 +8891,26 @@
                 <a:ea typeface="Calibri" pitchFamily="34" charset="-122"/>
                 <a:cs typeface="Calibri" pitchFamily="34" charset="-120"/>
               </a:rPr>
-              <a:t>Equipos propios y librerías open source (Flutter, FastAPI, PostgreSQL, Docker) — sin costo de licencias</a:t>
-            </a:r>
-            <a:endParaRPr lang="en-US" sz="1080" dirty="0"/>
-          </a:p>
-        </p:txBody>
-      </p:sp>
-      <p:sp>
-        <p:nvSpPr>
-          <p:cNvPr id="18" name="Shape 16"/>
+              <a:t>Módulos del MVP integrados y operativos</a:t>
+            </a:r>
+            <a:endParaRPr lang="en-US" sz="1150" dirty="0"/>
+          </a:p>
+        </p:txBody>
+      </p:sp>
+      <p:sp>
+        <p:nvSpPr>
+          <p:cNvPr id="16" name="Shape 14"/>
           <p:cNvSpPr/>
           <p:nvPr/>
         </p:nvSpPr>
         <p:spPr>
           <a:xfrm>
-            <a:off x="548640" y="3657600"/>
-            <a:ext cx="3474720" cy="2011680"/>
+            <a:off x="6263640" y="3931920"/>
+            <a:ext cx="5349240" cy="1783080"/>
           </a:xfrm>
           <a:prstGeom prst="roundRect">
             <a:avLst>
-              <a:gd name="adj" fmla="val 4091"/>
+              <a:gd name="adj" fmla="val 4103"/>
             </a:avLst>
           </a:prstGeom>
           <a:solidFill>
@@ -9055,73 +8933,14 @@
       </p:sp>
       <p:sp>
         <p:nvSpPr>
-          <p:cNvPr id="19" name="Shape 17"/>
-          <p:cNvSpPr/>
-          <p:nvPr/>
-        </p:nvSpPr>
-        <p:spPr>
-          <a:xfrm>
-            <a:off x="731520" y="3840480"/>
-            <a:ext cx="502920" cy="502920"/>
-          </a:xfrm>
-          <a:prstGeom prst="ellipse">
-            <a:avLst/>
-          </a:prstGeom>
-          <a:solidFill>
-            <a:srgbClr val="028090"/>
-          </a:solidFill>
-          <a:ln/>
-        </p:spPr>
-      </p:sp>
-      <p:sp>
-        <p:nvSpPr>
-          <p:cNvPr id="20" name="Text 18"/>
-          <p:cNvSpPr txBox="1"/>
-          <p:nvPr/>
-        </p:nvSpPr>
-        <p:spPr>
-          <a:xfrm>
-            <a:off x="731520" y="3840480"/>
-            <a:ext cx="502920" cy="502920"/>
-          </a:xfrm>
-          <a:prstGeom prst="rect">
-            <a:avLst/>
-          </a:prstGeom>
-          <a:noFill/>
-          <a:ln/>
-        </p:spPr>
-        <p:txBody>
-          <a:bodyPr wrap="square" lIns="0" tIns="0" rIns="0" bIns="0" rtlCol="0" anchor="ctr"/>
-          <a:lstStyle/>
-          <a:p>
-            <a:pPr algn="ctr" indent="0" marL="0">
-              <a:buNone/>
-            </a:pPr>
-            <a:r>
-              <a:rPr lang="en-US" sz="1800" dirty="0">
-                <a:solidFill>
-                  <a:srgbClr val="000000"/>
-                </a:solidFill>
-                <a:latin typeface="Calibri" pitchFamily="34" charset="0"/>
-                <a:ea typeface="Calibri" pitchFamily="34" charset="-122"/>
-                <a:cs typeface="Calibri" pitchFamily="34" charset="-120"/>
-              </a:rPr>
-              <a:t>✅</a:t>
-            </a:r>
-            <a:endParaRPr lang="en-US" sz="1800" dirty="0"/>
-          </a:p>
-        </p:txBody>
-      </p:sp>
-      <p:sp>
-        <p:nvSpPr>
-          <p:cNvPr id="21" name="Text 19"/>
-          <p:cNvSpPr txBox="1"/>
-          <p:nvPr/>
-        </p:nvSpPr>
-        <p:spPr>
-          <a:xfrm>
-            <a:off x="1371600" y="3858768"/>
-            <a:ext cx="2468880" cy="365760"/>
+          <p:cNvPr id="17" name="Text 15"/>
+          <p:cNvSpPr txBox="1"/>
+          <p:nvPr/>
+        </p:nvSpPr>
+        <p:spPr>
+          <a:xfrm>
+            <a:off x="6492240" y="4096512"/>
+            <a:ext cx="4892040" cy="502920"/>
           </a:xfrm>
           <a:prstGeom prst="rect">
             <a:avLst/>
@@ -9145,7 +8964,7 @@
                 <a:ea typeface="Calibri" pitchFamily="34" charset="-122"/>
                 <a:cs typeface="Calibri" pitchFamily="34" charset="-120"/>
               </a:rPr>
-              <a:t>A favor</a:t>
+              <a:t>Informe Final + manual técnico + README</a:t>
             </a:r>
             <a:endParaRPr lang="en-US" sz="1350" dirty="0"/>
           </a:p>
@@ -9153,14 +8972,14 @@
       </p:sp>
       <p:sp>
         <p:nvSpPr>
-          <p:cNvPr id="22" name="Text 20"/>
-          <p:cNvSpPr txBox="1"/>
-          <p:nvPr/>
-        </p:nvSpPr>
-        <p:spPr>
-          <a:xfrm>
-            <a:off x="731520" y="4480560"/>
-            <a:ext cx="3108960" cy="1097280"/>
+          <p:cNvPr id="18" name="Text 16"/>
+          <p:cNvSpPr txBox="1"/>
+          <p:nvPr/>
+        </p:nvSpPr>
+        <p:spPr>
+          <a:xfrm>
+            <a:off x="6492240" y="4590288"/>
+            <a:ext cx="4892040" cy="1005840"/>
           </a:xfrm>
           <a:prstGeom prst="rect">
             <a:avLst/>
@@ -9179,7 +8998,7 @@
               <a:buNone/>
             </a:pPr>
             <a:r>
-              <a:rPr lang="en-US" sz="1080" dirty="0">
+              <a:rPr lang="en-US" sz="1150" dirty="0">
                 <a:solidFill>
                   <a:srgbClr val="5C7A7C"/>
                 </a:solidFill>
@@ -9187,21 +9006,1004 @@
                 <a:ea typeface="Calibri" pitchFamily="34" charset="-122"/>
                 <a:cs typeface="Calibri" pitchFamily="34" charset="-120"/>
               </a:rPr>
-              <a:t>El equipo ya maneja las tecnologías definidas y cuenta con roles claros por módulo</a:t>
-            </a:r>
-            <a:endParaRPr lang="en-US" sz="1080" dirty="0"/>
-          </a:p>
-        </p:txBody>
-      </p:sp>
-      <p:sp>
-        <p:nvSpPr>
-          <p:cNvPr id="23" name="Shape 21"/>
+              <a:t>Documentación completa, arquitectura y despliegue</a:t>
+            </a:r>
+            <a:endParaRPr lang="en-US" sz="1150" dirty="0"/>
+          </a:p>
+        </p:txBody>
+      </p:sp>
+      <p:sp>
+        <p:nvSpPr>
+          <p:cNvPr id="19" name="Text 17"/>
+          <p:cNvSpPr txBox="1"/>
+          <p:nvPr/>
+        </p:nvSpPr>
+        <p:spPr>
+          <a:xfrm>
+            <a:off x="548640" y="5989320"/>
+            <a:ext cx="11064240" cy="365760"/>
+          </a:xfrm>
+          <a:prstGeom prst="rect">
+            <a:avLst/>
+          </a:prstGeom>
+          <a:noFill/>
+          <a:ln/>
+        </p:spPr>
+        <p:txBody>
+          <a:bodyPr wrap="square" lIns="0" tIns="0" rIns="0" bIns="0" rtlCol="0" anchor="ctr"/>
+          <a:lstStyle/>
+          <a:p>
+            <a:pPr indent="0" marL="0">
+              <a:buNone/>
+            </a:pPr>
+            <a:r>
+              <a:rPr lang="en-US" sz="1100" i="1" dirty="0">
+                <a:solidFill>
+                  <a:srgbClr val="5C7A7C"/>
+                </a:solidFill>
+                <a:latin typeface="Calibri" pitchFamily="34" charset="0"/>
+                <a:ea typeface="Calibri" pitchFamily="34" charset="-122"/>
+                <a:cs typeface="Calibri" pitchFamily="34" charset="-120"/>
+              </a:rPr>
+              <a:t>En Fase 1 el proyecto está en etapa de definición y planificación; los indicadores de implementación se evidenciarán en Fase 2.</a:t>
+            </a:r>
+            <a:endParaRPr lang="en-US" sz="1100" dirty="0"/>
+          </a:p>
+        </p:txBody>
+      </p:sp>
+      <p:sp>
+        <p:nvSpPr>
+          <p:cNvPr id="20" name="Text 18"/>
+          <p:cNvSpPr txBox="1"/>
+          <p:nvPr/>
+        </p:nvSpPr>
+        <p:spPr>
+          <a:xfrm>
+            <a:off x="457200" y="6510528"/>
+            <a:ext cx="7315200" cy="274320"/>
+          </a:xfrm>
+          <a:prstGeom prst="rect">
+            <a:avLst/>
+          </a:prstGeom>
+          <a:noFill/>
+          <a:ln/>
+        </p:spPr>
+        <p:txBody>
+          <a:bodyPr wrap="square" lIns="0" tIns="0" rIns="0" bIns="0" rtlCol="0" anchor="ctr"/>
+          <a:lstStyle/>
+          <a:p>
+            <a:pPr algn="l" indent="0" marL="0">
+              <a:buNone/>
+            </a:pPr>
+            <a:r>
+              <a:rPr lang="en-US" sz="900" dirty="0">
+                <a:solidFill>
+                  <a:srgbClr val="5C7A7C"/>
+                </a:solidFill>
+                <a:latin typeface="Calibri" pitchFamily="34" charset="0"/>
+                <a:ea typeface="Calibri" pitchFamily="34" charset="-122"/>
+                <a:cs typeface="Calibri" pitchFamily="34" charset="-120"/>
+              </a:rPr>
+              <a:t>Perfil Médico+  ·  Capstone_005D · Grupo 7  ·  PTY4614</a:t>
+            </a:r>
+            <a:endParaRPr lang="en-US" sz="900" dirty="0"/>
+          </a:p>
+        </p:txBody>
+      </p:sp>
+      <p:sp>
+        <p:nvSpPr>
+          <p:cNvPr id="21" name="Text 19"/>
+          <p:cNvSpPr txBox="1"/>
+          <p:nvPr/>
+        </p:nvSpPr>
+        <p:spPr>
+          <a:xfrm>
+            <a:off x="11521440" y="6510528"/>
+            <a:ext cx="457200" cy="274320"/>
+          </a:xfrm>
+          <a:prstGeom prst="rect">
+            <a:avLst/>
+          </a:prstGeom>
+          <a:noFill/>
+          <a:ln/>
+        </p:spPr>
+        <p:txBody>
+          <a:bodyPr wrap="square" lIns="0" tIns="0" rIns="0" bIns="0" rtlCol="0" anchor="ctr"/>
+          <a:lstStyle/>
+          <a:p>
+            <a:pPr algn="r" indent="0" marL="0">
+              <a:buNone/>
+            </a:pPr>
+            <a:r>
+              <a:rPr lang="en-US" sz="900" dirty="0">
+                <a:solidFill>
+                  <a:srgbClr val="5C7A7C"/>
+                </a:solidFill>
+                <a:latin typeface="Calibri" pitchFamily="34" charset="0"/>
+                <a:ea typeface="Calibri" pitchFamily="34" charset="-122"/>
+                <a:cs typeface="Calibri" pitchFamily="34" charset="-120"/>
+              </a:rPr>
+              <a:t>15</a:t>
+            </a:r>
+            <a:endParaRPr lang="en-US" sz="900" dirty="0"/>
+          </a:p>
+        </p:txBody>
+      </p:sp>
+    </p:spTree>
+  </p:cSld>
+  <p:clrMapOvr>
+    <a:masterClrMapping/>
+  </p:clrMapOvr>
+</p:sld>
+</file>
+
+<file path=ppt/slides/slide16.xml><?xml version="1.0" encoding="utf-8"?>
+<p:sld xmlns:a="http://schemas.openxmlformats.org/drawingml/2006/main" xmlns:r="http://schemas.openxmlformats.org/officeDocument/2006/relationships" xmlns:p="http://schemas.openxmlformats.org/presentationml/2006/main">
+  <p:cSld name="Slide 16">
+    <p:bg>
+      <p:bgPr>
+        <a:solidFill>
+          <a:srgbClr val="F4FAF9"/>
+        </a:solidFill>
+      </p:bgPr>
+    </p:bg>
+    <p:spTree>
+      <p:nvGrpSpPr>
+        <p:cNvPr id="1" name=""/>
+        <p:cNvGrpSpPr/>
+        <p:nvPr/>
+      </p:nvGrpSpPr>
+      <p:grpSpPr>
+        <a:xfrm>
+          <a:off x="0" y="0"/>
+          <a:ext cx="0" cy="0"/>
+          <a:chOff x="0" y="0"/>
+          <a:chExt cx="0" cy="0"/>
+        </a:xfrm>
+      </p:grpSpPr>
+      <p:sp>
+        <p:nvSpPr>
+          <p:cNvPr id="2" name="Text 0"/>
+          <p:cNvSpPr txBox="1"/>
+          <p:nvPr/>
+        </p:nvSpPr>
+        <p:spPr>
+          <a:xfrm>
+            <a:off x="548640" y="457200"/>
+            <a:ext cx="10881360" cy="640080"/>
+          </a:xfrm>
+          <a:prstGeom prst="rect">
+            <a:avLst/>
+          </a:prstGeom>
+          <a:noFill/>
+          <a:ln/>
+        </p:spPr>
+        <p:txBody>
+          <a:bodyPr wrap="square" lIns="0" tIns="0" rIns="0" bIns="0" rtlCol="0" anchor="ctr"/>
+          <a:lstStyle/>
+          <a:p>
+            <a:pPr indent="0" marL="0">
+              <a:buNone/>
+            </a:pPr>
+            <a:r>
+              <a:rPr lang="en-US" sz="2800" b="1" dirty="0">
+                <a:solidFill>
+                  <a:srgbClr val="0B3D42"/>
+                </a:solidFill>
+                <a:latin typeface="Cambria" pitchFamily="34" charset="0"/>
+                <a:ea typeface="Cambria" pitchFamily="34" charset="-122"/>
+                <a:cs typeface="Cambria" pitchFamily="34" charset="-120"/>
+              </a:rPr>
+              <a:t>Modelo de negocio: Gratis vs Premium</a:t>
+            </a:r>
+            <a:endParaRPr lang="en-US" sz="2800" dirty="0"/>
+          </a:p>
+        </p:txBody>
+      </p:sp>
+      <p:sp>
+        <p:nvSpPr>
+          <p:cNvPr id="3" name="Text 1"/>
+          <p:cNvSpPr txBox="1"/>
+          <p:nvPr/>
+        </p:nvSpPr>
+        <p:spPr>
+          <a:xfrm>
+            <a:off x="548640" y="1170432"/>
+            <a:ext cx="10881360" cy="457200"/>
+          </a:xfrm>
+          <a:prstGeom prst="rect">
+            <a:avLst/>
+          </a:prstGeom>
+          <a:noFill/>
+          <a:ln/>
+        </p:spPr>
+        <p:txBody>
+          <a:bodyPr wrap="square" lIns="0" tIns="0" rIns="0" bIns="0" rtlCol="0" anchor="ctr"/>
+          <a:lstStyle/>
+          <a:p>
+            <a:pPr indent="0" marL="0">
+              <a:buNone/>
+            </a:pPr>
+            <a:r>
+              <a:rPr lang="en-US" sz="1300" dirty="0">
+                <a:solidFill>
+                  <a:srgbClr val="5C7A7C"/>
+                </a:solidFill>
+                <a:latin typeface="Calibri" pitchFamily="34" charset="0"/>
+                <a:ea typeface="Calibri" pitchFamily="34" charset="-122"/>
+                <a:cs typeface="Calibri" pitchFamily="34" charset="-120"/>
+              </a:rPr>
+              <a:t>Proyección a futuro del proyecto: el plan pagado se activa naturalmente cuando el usuario necesita cuidar a alguien más.</a:t>
+            </a:r>
+            <a:endParaRPr lang="en-US" sz="1300" dirty="0"/>
+          </a:p>
+        </p:txBody>
+      </p:sp>
+      <p:sp>
+        <p:nvSpPr>
+          <p:cNvPr id="4" name="Shape 2"/>
           <p:cNvSpPr/>
           <p:nvPr/>
         </p:nvSpPr>
         <p:spPr>
           <a:xfrm>
-            <a:off x="4343400" y="3657600"/>
+            <a:off x="548640" y="1920240"/>
+            <a:ext cx="5257800" cy="4160520"/>
+          </a:xfrm>
+          <a:prstGeom prst="roundRect">
+            <a:avLst>
+              <a:gd name="adj" fmla="val 2198"/>
+            </a:avLst>
+          </a:prstGeom>
+          <a:solidFill>
+            <a:srgbClr val="FFFFFF"/>
+          </a:solidFill>
+          <a:ln w="12700">
+            <a:solidFill>
+              <a:srgbClr val="DCEDEC"/>
+            </a:solidFill>
+            <a:prstDash val="solid"/>
+          </a:ln>
+          <a:effectLst>
+            <a:outerShdw sx="100000" sy="100000" kx="0" ky="0" algn="bl" rotWithShape="0" blurRad="76200" dist="25400" dir="5400000">
+              <a:srgbClr val="1F3A3C">
+                <a:alpha val="13000"/>
+              </a:srgbClr>
+            </a:outerShdw>
+          </a:effectLst>
+        </p:spPr>
+      </p:sp>
+      <p:sp>
+        <p:nvSpPr>
+          <p:cNvPr id="5" name="Shape 3"/>
+          <p:cNvSpPr/>
+          <p:nvPr/>
+        </p:nvSpPr>
+        <p:spPr>
+          <a:xfrm>
+            <a:off x="548640" y="1920240"/>
+            <a:ext cx="5257800" cy="1005840"/>
+          </a:xfrm>
+          <a:prstGeom prst="roundRect">
+            <a:avLst>
+              <a:gd name="adj" fmla="val 9091"/>
+            </a:avLst>
+          </a:prstGeom>
+          <a:solidFill>
+            <a:srgbClr val="00A896"/>
+          </a:solidFill>
+          <a:ln/>
+        </p:spPr>
+      </p:sp>
+      <p:sp>
+        <p:nvSpPr>
+          <p:cNvPr id="6" name="Shape 4"/>
+          <p:cNvSpPr/>
+          <p:nvPr/>
+        </p:nvSpPr>
+        <p:spPr>
+          <a:xfrm>
+            <a:off x="548640" y="2423160"/>
+            <a:ext cx="5257800" cy="502920"/>
+          </a:xfrm>
+          <a:prstGeom prst="rect">
+            <a:avLst/>
+          </a:prstGeom>
+          <a:solidFill>
+            <a:srgbClr val="00A896"/>
+          </a:solidFill>
+          <a:ln/>
+        </p:spPr>
+      </p:sp>
+      <p:sp>
+        <p:nvSpPr>
+          <p:cNvPr id="7" name="Text 5"/>
+          <p:cNvSpPr txBox="1"/>
+          <p:nvPr/>
+        </p:nvSpPr>
+        <p:spPr>
+          <a:xfrm>
+            <a:off x="822960" y="2057400"/>
+            <a:ext cx="4709160" cy="411480"/>
+          </a:xfrm>
+          <a:prstGeom prst="rect">
+            <a:avLst/>
+          </a:prstGeom>
+          <a:noFill/>
+          <a:ln/>
+        </p:spPr>
+        <p:txBody>
+          <a:bodyPr wrap="square" lIns="0" tIns="0" rIns="0" bIns="0" rtlCol="0" anchor="ctr"/>
+          <a:lstStyle/>
+          <a:p>
+            <a:pPr indent="0" marL="0">
+              <a:buNone/>
+            </a:pPr>
+            <a:r>
+              <a:rPr lang="en-US" sz="1700" b="1" dirty="0">
+                <a:solidFill>
+                  <a:srgbClr val="FFFFFF"/>
+                </a:solidFill>
+                <a:latin typeface="Calibri" pitchFamily="34" charset="0"/>
+                <a:ea typeface="Calibri" pitchFamily="34" charset="-122"/>
+                <a:cs typeface="Calibri" pitchFamily="34" charset="-120"/>
+              </a:rPr>
+              <a:t>Gratis</a:t>
+            </a:r>
+            <a:endParaRPr lang="en-US" sz="1700" dirty="0"/>
+          </a:p>
+        </p:txBody>
+      </p:sp>
+      <p:sp>
+        <p:nvSpPr>
+          <p:cNvPr id="8" name="Text 6"/>
+          <p:cNvSpPr txBox="1"/>
+          <p:nvPr/>
+        </p:nvSpPr>
+        <p:spPr>
+          <a:xfrm>
+            <a:off x="822960" y="2468880"/>
+            <a:ext cx="4709160" cy="365760"/>
+          </a:xfrm>
+          <a:prstGeom prst="rect">
+            <a:avLst/>
+          </a:prstGeom>
+          <a:noFill/>
+          <a:ln/>
+        </p:spPr>
+        <p:txBody>
+          <a:bodyPr wrap="square" lIns="0" tIns="0" rIns="0" bIns="0" rtlCol="0" anchor="ctr"/>
+          <a:lstStyle/>
+          <a:p>
+            <a:pPr indent="0" marL="0">
+              <a:buNone/>
+            </a:pPr>
+            <a:r>
+              <a:rPr lang="en-US" sz="1300" i="1" dirty="0">
+                <a:solidFill>
+                  <a:srgbClr val="FFFFFF"/>
+                </a:solidFill>
+                <a:latin typeface="Calibri" pitchFamily="34" charset="0"/>
+                <a:ea typeface="Calibri" pitchFamily="34" charset="-122"/>
+                <a:cs typeface="Calibri" pitchFamily="34" charset="-120"/>
+              </a:rPr>
+              <a:t>$0</a:t>
+            </a:r>
+            <a:endParaRPr lang="en-US" sz="1300" dirty="0"/>
+          </a:p>
+        </p:txBody>
+      </p:sp>
+      <p:sp>
+        <p:nvSpPr>
+          <p:cNvPr id="9" name="Text 7"/>
+          <p:cNvSpPr txBox="1"/>
+          <p:nvPr/>
+        </p:nvSpPr>
+        <p:spPr>
+          <a:xfrm>
+            <a:off x="868680" y="3154680"/>
+            <a:ext cx="4617720" cy="2788920"/>
+          </a:xfrm>
+          <a:prstGeom prst="rect">
+            <a:avLst/>
+          </a:prstGeom>
+          <a:noFill/>
+          <a:ln/>
+        </p:spPr>
+        <p:txBody>
+          <a:bodyPr wrap="square" lIns="0" tIns="0" rIns="0" bIns="0" rtlCol="0" anchor="t"/>
+          <a:lstStyle/>
+          <a:p>
+            <a:pPr marL="342900" indent="-342900">
+              <a:lnSpc>
+                <a:spcPct val="115000"/>
+              </a:lnSpc>
+              <a:spcAft>
+                <a:spcPts val="1200"/>
+              </a:spcAft>
+              <a:buSzPct val="100000"/>
+              <a:buChar char="▪"/>
+            </a:pPr>
+            <a:r>
+              <a:rPr lang="en-US" sz="1250" dirty="0">
+                <a:solidFill>
+                  <a:srgbClr val="0B2B2E"/>
+                </a:solidFill>
+                <a:latin typeface="Calibri" pitchFamily="34" charset="0"/>
+                <a:ea typeface="Calibri" pitchFamily="34" charset="-122"/>
+                <a:cs typeface="Calibri" pitchFamily="34" charset="-120"/>
+              </a:rPr>
+              <a:t>1 perfil</a:t>
+            </a:r>
+            <a:endParaRPr lang="en-US" sz="1250" dirty="0"/>
+          </a:p>
+          <a:p>
+            <a:pPr marL="342900" indent="-342900">
+              <a:lnSpc>
+                <a:spcPct val="115000"/>
+              </a:lnSpc>
+              <a:spcAft>
+                <a:spcPts val="1200"/>
+              </a:spcAft>
+              <a:buSzPct val="100000"/>
+              <a:buChar char="▪"/>
+            </a:pPr>
+            <a:r>
+              <a:rPr lang="en-US" sz="1250" dirty="0">
+                <a:solidFill>
+                  <a:srgbClr val="0B2B2E"/>
+                </a:solidFill>
+                <a:latin typeface="Calibri" pitchFamily="34" charset="0"/>
+                <a:ea typeface="Calibri" pitchFamily="34" charset="-122"/>
+                <a:cs typeface="Calibri" pitchFamily="34" charset="-120"/>
+              </a:rPr>
+              <a:t>Recordatorios básicos</a:t>
+            </a:r>
+            <a:endParaRPr lang="en-US" sz="1250" dirty="0"/>
+          </a:p>
+          <a:p>
+            <a:pPr marL="342900" indent="-342900">
+              <a:lnSpc>
+                <a:spcPct val="115000"/>
+              </a:lnSpc>
+              <a:spcAft>
+                <a:spcPts val="1200"/>
+              </a:spcAft>
+              <a:buSzPct val="100000"/>
+              <a:buChar char="▪"/>
+            </a:pPr>
+            <a:r>
+              <a:rPr lang="en-US" sz="1250" dirty="0">
+                <a:solidFill>
+                  <a:srgbClr val="0B2B2E"/>
+                </a:solidFill>
+                <a:latin typeface="Calibri" pitchFamily="34" charset="0"/>
+                <a:ea typeface="Calibri" pitchFamily="34" charset="-122"/>
+                <a:cs typeface="Calibri" pitchFamily="34" charset="-120"/>
+              </a:rPr>
+              <a:t>Confirmación manual</a:t>
+            </a:r>
+            <a:endParaRPr lang="en-US" sz="1250" dirty="0"/>
+          </a:p>
+          <a:p>
+            <a:pPr marL="342900" indent="-342900">
+              <a:lnSpc>
+                <a:spcPct val="115000"/>
+              </a:lnSpc>
+              <a:spcAft>
+                <a:spcPts val="1200"/>
+              </a:spcAft>
+              <a:buSzPct val="100000"/>
+              <a:buChar char="▪"/>
+            </a:pPr>
+            <a:r>
+              <a:rPr lang="en-US" sz="1250" dirty="0">
+                <a:solidFill>
+                  <a:srgbClr val="0B2B2E"/>
+                </a:solidFill>
+                <a:latin typeface="Calibri" pitchFamily="34" charset="0"/>
+                <a:ea typeface="Calibri" pitchFamily="34" charset="-122"/>
+                <a:cs typeface="Calibri" pitchFamily="34" charset="-120"/>
+              </a:rPr>
+              <a:t>Historial de 7 días</a:t>
+            </a:r>
+            <a:endParaRPr lang="en-US" sz="1250" dirty="0"/>
+          </a:p>
+        </p:txBody>
+      </p:sp>
+      <p:sp>
+        <p:nvSpPr>
+          <p:cNvPr id="10" name="Shape 8"/>
+          <p:cNvSpPr/>
+          <p:nvPr/>
+        </p:nvSpPr>
+        <p:spPr>
+          <a:xfrm>
+            <a:off x="6355080" y="1920240"/>
+            <a:ext cx="5257800" cy="4160520"/>
+          </a:xfrm>
+          <a:prstGeom prst="roundRect">
+            <a:avLst>
+              <a:gd name="adj" fmla="val 2198"/>
+            </a:avLst>
+          </a:prstGeom>
+          <a:solidFill>
+            <a:srgbClr val="FFFFFF"/>
+          </a:solidFill>
+          <a:ln w="12700">
+            <a:solidFill>
+              <a:srgbClr val="DCEDEC"/>
+            </a:solidFill>
+            <a:prstDash val="solid"/>
+          </a:ln>
+          <a:effectLst>
+            <a:outerShdw sx="100000" sy="100000" kx="0" ky="0" algn="bl" rotWithShape="0" blurRad="76200" dist="25400" dir="5400000">
+              <a:srgbClr val="1F3A3C">
+                <a:alpha val="13000"/>
+              </a:srgbClr>
+            </a:outerShdw>
+          </a:effectLst>
+        </p:spPr>
+      </p:sp>
+      <p:sp>
+        <p:nvSpPr>
+          <p:cNvPr id="11" name="Shape 9"/>
+          <p:cNvSpPr/>
+          <p:nvPr/>
+        </p:nvSpPr>
+        <p:spPr>
+          <a:xfrm>
+            <a:off x="6355080" y="1920240"/>
+            <a:ext cx="5257800" cy="1005840"/>
+          </a:xfrm>
+          <a:prstGeom prst="roundRect">
+            <a:avLst>
+              <a:gd name="adj" fmla="val 9091"/>
+            </a:avLst>
+          </a:prstGeom>
+          <a:solidFill>
+            <a:srgbClr val="028090"/>
+          </a:solidFill>
+          <a:ln/>
+        </p:spPr>
+      </p:sp>
+      <p:sp>
+        <p:nvSpPr>
+          <p:cNvPr id="12" name="Shape 10"/>
+          <p:cNvSpPr/>
+          <p:nvPr/>
+        </p:nvSpPr>
+        <p:spPr>
+          <a:xfrm>
+            <a:off x="6355080" y="2423160"/>
+            <a:ext cx="5257800" cy="502920"/>
+          </a:xfrm>
+          <a:prstGeom prst="rect">
+            <a:avLst/>
+          </a:prstGeom>
+          <a:solidFill>
+            <a:srgbClr val="028090"/>
+          </a:solidFill>
+          <a:ln/>
+        </p:spPr>
+      </p:sp>
+      <p:sp>
+        <p:nvSpPr>
+          <p:cNvPr id="13" name="Text 11"/>
+          <p:cNvSpPr txBox="1"/>
+          <p:nvPr/>
+        </p:nvSpPr>
+        <p:spPr>
+          <a:xfrm>
+            <a:off x="6629400" y="2057400"/>
+            <a:ext cx="4709160" cy="411480"/>
+          </a:xfrm>
+          <a:prstGeom prst="rect">
+            <a:avLst/>
+          </a:prstGeom>
+          <a:noFill/>
+          <a:ln/>
+        </p:spPr>
+        <p:txBody>
+          <a:bodyPr wrap="square" lIns="0" tIns="0" rIns="0" bIns="0" rtlCol="0" anchor="ctr"/>
+          <a:lstStyle/>
+          <a:p>
+            <a:pPr indent="0" marL="0">
+              <a:buNone/>
+            </a:pPr>
+            <a:r>
+              <a:rPr lang="en-US" sz="1700" b="1" dirty="0">
+                <a:solidFill>
+                  <a:srgbClr val="FFFFFF"/>
+                </a:solidFill>
+                <a:latin typeface="Calibri" pitchFamily="34" charset="0"/>
+                <a:ea typeface="Calibri" pitchFamily="34" charset="-122"/>
+                <a:cs typeface="Calibri" pitchFamily="34" charset="-120"/>
+              </a:rPr>
+              <a:t>Perfil Médico+ Premium</a:t>
+            </a:r>
+            <a:endParaRPr lang="en-US" sz="1700" dirty="0"/>
+          </a:p>
+        </p:txBody>
+      </p:sp>
+      <p:sp>
+        <p:nvSpPr>
+          <p:cNvPr id="14" name="Text 12"/>
+          <p:cNvSpPr txBox="1"/>
+          <p:nvPr/>
+        </p:nvSpPr>
+        <p:spPr>
+          <a:xfrm>
+            <a:off x="6629400" y="2468880"/>
+            <a:ext cx="4709160" cy="365760"/>
+          </a:xfrm>
+          <a:prstGeom prst="rect">
+            <a:avLst/>
+          </a:prstGeom>
+          <a:noFill/>
+          <a:ln/>
+        </p:spPr>
+        <p:txBody>
+          <a:bodyPr wrap="square" lIns="0" tIns="0" rIns="0" bIns="0" rtlCol="0" anchor="ctr"/>
+          <a:lstStyle/>
+          <a:p>
+            <a:pPr indent="0" marL="0">
+              <a:buNone/>
+            </a:pPr>
+            <a:r>
+              <a:rPr lang="en-US" sz="1300" i="1" dirty="0">
+                <a:solidFill>
+                  <a:srgbClr val="FFFFFF"/>
+                </a:solidFill>
+                <a:latin typeface="Calibri" pitchFamily="34" charset="0"/>
+                <a:ea typeface="Calibri" pitchFamily="34" charset="-122"/>
+                <a:cs typeface="Calibri" pitchFamily="34" charset="-120"/>
+              </a:rPr>
+              <a:t>$2.990-$3.990 / mes</a:t>
+            </a:r>
+            <a:endParaRPr lang="en-US" sz="1300" dirty="0"/>
+          </a:p>
+        </p:txBody>
+      </p:sp>
+      <p:sp>
+        <p:nvSpPr>
+          <p:cNvPr id="15" name="Text 13"/>
+          <p:cNvSpPr txBox="1"/>
+          <p:nvPr/>
+        </p:nvSpPr>
+        <p:spPr>
+          <a:xfrm>
+            <a:off x="6675120" y="3154680"/>
+            <a:ext cx="4617720" cy="2788920"/>
+          </a:xfrm>
+          <a:prstGeom prst="rect">
+            <a:avLst/>
+          </a:prstGeom>
+          <a:noFill/>
+          <a:ln/>
+        </p:spPr>
+        <p:txBody>
+          <a:bodyPr wrap="square" lIns="0" tIns="0" rIns="0" bIns="0" rtlCol="0" anchor="t"/>
+          <a:lstStyle/>
+          <a:p>
+            <a:pPr marL="342900" indent="-342900">
+              <a:lnSpc>
+                <a:spcPct val="115000"/>
+              </a:lnSpc>
+              <a:spcAft>
+                <a:spcPts val="1200"/>
+              </a:spcAft>
+              <a:buSzPct val="100000"/>
+              <a:buChar char="▪"/>
+            </a:pPr>
+            <a:r>
+              <a:rPr lang="en-US" sz="1250" dirty="0">
+                <a:solidFill>
+                  <a:srgbClr val="0B2B2E"/>
+                </a:solidFill>
+                <a:latin typeface="Calibri" pitchFamily="34" charset="0"/>
+                <a:ea typeface="Calibri" pitchFamily="34" charset="-122"/>
+                <a:cs typeface="Calibri" pitchFamily="34" charset="-120"/>
+              </a:rPr>
+              <a:t>Perfiles dependientes ilimitados</a:t>
+            </a:r>
+            <a:endParaRPr lang="en-US" sz="1250" dirty="0"/>
+          </a:p>
+          <a:p>
+            <a:pPr marL="342900" indent="-342900">
+              <a:lnSpc>
+                <a:spcPct val="115000"/>
+              </a:lnSpc>
+              <a:spcAft>
+                <a:spcPts val="1200"/>
+              </a:spcAft>
+              <a:buSzPct val="100000"/>
+              <a:buChar char="▪"/>
+            </a:pPr>
+            <a:r>
+              <a:rPr lang="en-US" sz="1250" dirty="0">
+                <a:solidFill>
+                  <a:srgbClr val="0B2B2E"/>
+                </a:solidFill>
+                <a:latin typeface="Calibri" pitchFamily="34" charset="0"/>
+                <a:ea typeface="Calibri" pitchFamily="34" charset="-122"/>
+                <a:cs typeface="Calibri" pitchFamily="34" charset="-120"/>
+              </a:rPr>
+              <a:t>Pulsera inteligente conectada (GPS, salud, seguridad)</a:t>
+            </a:r>
+            <a:endParaRPr lang="en-US" sz="1250" dirty="0"/>
+          </a:p>
+          <a:p>
+            <a:pPr marL="342900" indent="-342900">
+              <a:lnSpc>
+                <a:spcPct val="115000"/>
+              </a:lnSpc>
+              <a:spcAft>
+                <a:spcPts val="1200"/>
+              </a:spcAft>
+              <a:buSzPct val="100000"/>
+              <a:buChar char="▪"/>
+            </a:pPr>
+            <a:r>
+              <a:rPr lang="en-US" sz="1250" dirty="0">
+                <a:solidFill>
+                  <a:srgbClr val="0B2B2E"/>
+                </a:solidFill>
+                <a:latin typeface="Calibri" pitchFamily="34" charset="0"/>
+                <a:ea typeface="Calibri" pitchFamily="34" charset="-122"/>
+                <a:cs typeface="Calibri" pitchFamily="34" charset="-120"/>
+              </a:rPr>
+              <a:t>Alertas escalonadas al cuidador</a:t>
+            </a:r>
+            <a:endParaRPr lang="en-US" sz="1250" dirty="0"/>
+          </a:p>
+          <a:p>
+            <a:pPr marL="342900" indent="-342900">
+              <a:lnSpc>
+                <a:spcPct val="115000"/>
+              </a:lnSpc>
+              <a:spcAft>
+                <a:spcPts val="1200"/>
+              </a:spcAft>
+              <a:buSzPct val="100000"/>
+              <a:buChar char="▪"/>
+            </a:pPr>
+            <a:r>
+              <a:rPr lang="en-US" sz="1250" dirty="0">
+                <a:solidFill>
+                  <a:srgbClr val="0B2B2E"/>
+                </a:solidFill>
+                <a:latin typeface="Calibri" pitchFamily="34" charset="0"/>
+                <a:ea typeface="Calibri" pitchFamily="34" charset="-122"/>
+                <a:cs typeface="Calibri" pitchFamily="34" charset="-120"/>
+              </a:rPr>
+              <a:t>Historial completo + reportes para el médico</a:t>
+            </a:r>
+            <a:endParaRPr lang="en-US" sz="1250" dirty="0"/>
+          </a:p>
+          <a:p>
+            <a:pPr marL="342900" indent="-342900">
+              <a:lnSpc>
+                <a:spcPct val="115000"/>
+              </a:lnSpc>
+              <a:spcAft>
+                <a:spcPts val="1200"/>
+              </a:spcAft>
+              <a:buSzPct val="100000"/>
+              <a:buChar char="▪"/>
+            </a:pPr>
+            <a:r>
+              <a:rPr lang="en-US" sz="1250" dirty="0">
+                <a:solidFill>
+                  <a:srgbClr val="0B2B2E"/>
+                </a:solidFill>
+                <a:latin typeface="Calibri" pitchFamily="34" charset="0"/>
+                <a:ea typeface="Calibri" pitchFamily="34" charset="-122"/>
+                <a:cs typeface="Calibri" pitchFamily="34" charset="-120"/>
+              </a:rPr>
+              <a:t>Módulo de IA (orientación + farmacias)</a:t>
+            </a:r>
+            <a:endParaRPr lang="en-US" sz="1250" dirty="0"/>
+          </a:p>
+        </p:txBody>
+      </p:sp>
+      <p:sp>
+        <p:nvSpPr>
+          <p:cNvPr id="16" name="Text 14"/>
+          <p:cNvSpPr txBox="1"/>
+          <p:nvPr/>
+        </p:nvSpPr>
+        <p:spPr>
+          <a:xfrm>
+            <a:off x="548640" y="6263640"/>
+            <a:ext cx="11064240" cy="320040"/>
+          </a:xfrm>
+          <a:prstGeom prst="rect">
+            <a:avLst/>
+          </a:prstGeom>
+          <a:noFill/>
+          <a:ln/>
+        </p:spPr>
+        <p:txBody>
+          <a:bodyPr wrap="square" lIns="0" tIns="0" rIns="0" bIns="0" rtlCol="0" anchor="ctr"/>
+          <a:lstStyle/>
+          <a:p>
+            <a:pPr indent="0" marL="0">
+              <a:buNone/>
+            </a:pPr>
+            <a:r>
+              <a:rPr lang="en-US" sz="1050" i="1" dirty="0">
+                <a:solidFill>
+                  <a:srgbClr val="5C7A7C"/>
+                </a:solidFill>
+                <a:latin typeface="Calibri" pitchFamily="34" charset="0"/>
+                <a:ea typeface="Calibri" pitchFamily="34" charset="-122"/>
+                <a:cs typeface="Calibri" pitchFamily="34" charset="-120"/>
+              </a:rPr>
+              <a:t>Plan anual: $24.990-$29.990 CLP (equivalente a ~2 meses gratis frente al pago mensual).</a:t>
+            </a:r>
+            <a:endParaRPr lang="en-US" sz="1050" dirty="0"/>
+          </a:p>
+        </p:txBody>
+      </p:sp>
+      <p:sp>
+        <p:nvSpPr>
+          <p:cNvPr id="17" name="Text 15"/>
+          <p:cNvSpPr txBox="1"/>
+          <p:nvPr/>
+        </p:nvSpPr>
+        <p:spPr>
+          <a:xfrm>
+            <a:off x="457200" y="6510528"/>
+            <a:ext cx="7315200" cy="274320"/>
+          </a:xfrm>
+          <a:prstGeom prst="rect">
+            <a:avLst/>
+          </a:prstGeom>
+          <a:noFill/>
+          <a:ln/>
+        </p:spPr>
+        <p:txBody>
+          <a:bodyPr wrap="square" lIns="0" tIns="0" rIns="0" bIns="0" rtlCol="0" anchor="ctr"/>
+          <a:lstStyle/>
+          <a:p>
+            <a:pPr algn="l" indent="0" marL="0">
+              <a:buNone/>
+            </a:pPr>
+            <a:r>
+              <a:rPr lang="en-US" sz="900" dirty="0">
+                <a:solidFill>
+                  <a:srgbClr val="5C7A7C"/>
+                </a:solidFill>
+                <a:latin typeface="Calibri" pitchFamily="34" charset="0"/>
+                <a:ea typeface="Calibri" pitchFamily="34" charset="-122"/>
+                <a:cs typeface="Calibri" pitchFamily="34" charset="-120"/>
+              </a:rPr>
+              <a:t>Perfil Médico+  ·  Capstone_005D · Grupo 7  ·  PTY4614</a:t>
+            </a:r>
+            <a:endParaRPr lang="en-US" sz="900" dirty="0"/>
+          </a:p>
+        </p:txBody>
+      </p:sp>
+      <p:sp>
+        <p:nvSpPr>
+          <p:cNvPr id="18" name="Text 16"/>
+          <p:cNvSpPr txBox="1"/>
+          <p:nvPr/>
+        </p:nvSpPr>
+        <p:spPr>
+          <a:xfrm>
+            <a:off x="11521440" y="6510528"/>
+            <a:ext cx="457200" cy="274320"/>
+          </a:xfrm>
+          <a:prstGeom prst="rect">
+            <a:avLst/>
+          </a:prstGeom>
+          <a:noFill/>
+          <a:ln/>
+        </p:spPr>
+        <p:txBody>
+          <a:bodyPr wrap="square" lIns="0" tIns="0" rIns="0" bIns="0" rtlCol="0" anchor="ctr"/>
+          <a:lstStyle/>
+          <a:p>
+            <a:pPr algn="r" indent="0" marL="0">
+              <a:buNone/>
+            </a:pPr>
+            <a:r>
+              <a:rPr lang="en-US" sz="900" dirty="0">
+                <a:solidFill>
+                  <a:srgbClr val="5C7A7C"/>
+                </a:solidFill>
+                <a:latin typeface="Calibri" pitchFamily="34" charset="0"/>
+                <a:ea typeface="Calibri" pitchFamily="34" charset="-122"/>
+                <a:cs typeface="Calibri" pitchFamily="34" charset="-120"/>
+              </a:rPr>
+              <a:t>16</a:t>
+            </a:r>
+            <a:endParaRPr lang="en-US" sz="900" dirty="0"/>
+          </a:p>
+        </p:txBody>
+      </p:sp>
+    </p:spTree>
+  </p:cSld>
+  <p:clrMapOvr>
+    <a:masterClrMapping/>
+  </p:clrMapOvr>
+</p:sld>
+</file>
+
+<file path=ppt/slides/slide17.xml><?xml version="1.0" encoding="utf-8"?>
+<p:sld xmlns:a="http://schemas.openxmlformats.org/drawingml/2006/main" xmlns:r="http://schemas.openxmlformats.org/officeDocument/2006/relationships" xmlns:p="http://schemas.openxmlformats.org/presentationml/2006/main">
+  <p:cSld name="Slide 17">
+    <p:bg>
+      <p:bgPr>
+        <a:solidFill>
+          <a:srgbClr val="F4FAF9"/>
+        </a:solidFill>
+      </p:bgPr>
+    </p:bg>
+    <p:spTree>
+      <p:nvGrpSpPr>
+        <p:cNvPr id="1" name=""/>
+        <p:cNvGrpSpPr/>
+        <p:nvPr/>
+      </p:nvGrpSpPr>
+      <p:grpSpPr>
+        <a:xfrm>
+          <a:off x="0" y="0"/>
+          <a:ext cx="0" cy="0"/>
+          <a:chOff x="0" y="0"/>
+          <a:chExt cx="0" cy="0"/>
+        </a:xfrm>
+      </p:grpSpPr>
+      <p:sp>
+        <p:nvSpPr>
+          <p:cNvPr id="2" name="Text 0"/>
+          <p:cNvSpPr txBox="1"/>
+          <p:nvPr/>
+        </p:nvSpPr>
+        <p:spPr>
+          <a:xfrm>
+            <a:off x="548640" y="457200"/>
+            <a:ext cx="9144000" cy="640080"/>
+          </a:xfrm>
+          <a:prstGeom prst="rect">
+            <a:avLst/>
+          </a:prstGeom>
+          <a:noFill/>
+          <a:ln/>
+        </p:spPr>
+        <p:txBody>
+          <a:bodyPr wrap="square" lIns="0" tIns="0" rIns="0" bIns="0" rtlCol="0" anchor="ctr"/>
+          <a:lstStyle/>
+          <a:p>
+            <a:pPr indent="0" marL="0">
+              <a:buNone/>
+            </a:pPr>
+            <a:r>
+              <a:rPr lang="en-US" sz="3000" b="1" dirty="0">
+                <a:solidFill>
+                  <a:srgbClr val="0B3D42"/>
+                </a:solidFill>
+                <a:latin typeface="Cambria" pitchFamily="34" charset="0"/>
+                <a:ea typeface="Cambria" pitchFamily="34" charset="-122"/>
+                <a:cs typeface="Cambria" pitchFamily="34" charset="-120"/>
+              </a:rPr>
+              <a:t>Factibilidad del proyecto</a:t>
+            </a:r>
+            <a:endParaRPr lang="en-US" sz="3000" dirty="0"/>
+          </a:p>
+        </p:txBody>
+      </p:sp>
+      <p:sp>
+        <p:nvSpPr>
+          <p:cNvPr id="3" name="Shape 1"/>
+          <p:cNvSpPr/>
+          <p:nvPr/>
+        </p:nvSpPr>
+        <p:spPr>
+          <a:xfrm>
+            <a:off x="548640" y="1325880"/>
             <a:ext cx="3474720" cy="2011680"/>
           </a:xfrm>
           <a:prstGeom prst="roundRect">
@@ -9229,33 +10031,33 @@
       </p:sp>
       <p:sp>
         <p:nvSpPr>
-          <p:cNvPr id="24" name="Shape 22"/>
+          <p:cNvPr id="4" name="Shape 2"/>
           <p:cNvSpPr/>
           <p:nvPr/>
         </p:nvSpPr>
         <p:spPr>
           <a:xfrm>
-            <a:off x="4526280" y="3840480"/>
+            <a:off x="731520" y="1508760"/>
             <a:ext cx="502920" cy="502920"/>
           </a:xfrm>
           <a:prstGeom prst="ellipse">
             <a:avLst/>
           </a:prstGeom>
           <a:solidFill>
-            <a:srgbClr val="00A896"/>
+            <a:srgbClr val="028090"/>
           </a:solidFill>
           <a:ln/>
         </p:spPr>
       </p:sp>
       <p:sp>
         <p:nvSpPr>
-          <p:cNvPr id="25" name="Text 23"/>
-          <p:cNvSpPr txBox="1"/>
-          <p:nvPr/>
-        </p:nvSpPr>
-        <p:spPr>
-          <a:xfrm>
-            <a:off x="4526280" y="3840480"/>
+          <p:cNvPr id="5" name="Text 3"/>
+          <p:cNvSpPr txBox="1"/>
+          <p:nvPr/>
+        </p:nvSpPr>
+        <p:spPr>
+          <a:xfrm>
+            <a:off x="731520" y="1508760"/>
             <a:ext cx="502920" cy="502920"/>
           </a:xfrm>
           <a:prstGeom prst="rect">
@@ -9280,7 +10082,7 @@
                 <a:ea typeface="Calibri" pitchFamily="34" charset="-122"/>
                 <a:cs typeface="Calibri" pitchFamily="34" charset="-120"/>
               </a:rPr>
-              <a:t>⚠️</a:t>
+              <a:t>🕒</a:t>
             </a:r>
             <a:endParaRPr lang="en-US" sz="1800" dirty="0"/>
           </a:p>
@@ -9288,13 +10090,13 @@
       </p:sp>
       <p:sp>
         <p:nvSpPr>
-          <p:cNvPr id="26" name="Text 24"/>
-          <p:cNvSpPr txBox="1"/>
-          <p:nvPr/>
-        </p:nvSpPr>
-        <p:spPr>
-          <a:xfrm>
-            <a:off x="5166360" y="3858768"/>
+          <p:cNvPr id="6" name="Text 4"/>
+          <p:cNvSpPr txBox="1"/>
+          <p:nvPr/>
+        </p:nvSpPr>
+        <p:spPr>
+          <a:xfrm>
+            <a:off x="1371600" y="1527048"/>
             <a:ext cx="2468880" cy="365760"/>
           </a:xfrm>
           <a:prstGeom prst="rect">
@@ -9319,7 +10121,7 @@
                 <a:ea typeface="Calibri" pitchFamily="34" charset="-122"/>
                 <a:cs typeface="Calibri" pitchFamily="34" charset="-120"/>
               </a:rPr>
-              <a:t>Riesgos</a:t>
+              <a:t>Tiempo</a:t>
             </a:r>
             <a:endParaRPr lang="en-US" sz="1350" dirty="0"/>
           </a:p>
@@ -9327,13 +10129,13 @@
       </p:sp>
       <p:sp>
         <p:nvSpPr>
-          <p:cNvPr id="27" name="Text 25"/>
-          <p:cNvSpPr txBox="1"/>
-          <p:nvPr/>
-        </p:nvSpPr>
-        <p:spPr>
-          <a:xfrm>
-            <a:off x="4526280" y="4480560"/>
+          <p:cNvPr id="7" name="Text 5"/>
+          <p:cNvSpPr txBox="1"/>
+          <p:nvPr/>
+        </p:nvSpPr>
+        <p:spPr>
+          <a:xfrm>
+            <a:off x="731520" y="2148840"/>
             <a:ext cx="3108960" cy="1097280"/>
           </a:xfrm>
           <a:prstGeom prst="rect">
@@ -9361,7 +10163,7 @@
                 <a:ea typeface="Calibri" pitchFamily="34" charset="-122"/>
                 <a:cs typeface="Calibri" pitchFamily="34" charset="-120"/>
               </a:rPr>
-              <a:t>Coordinación de horarios y curva de aprendizaje del módulo de IA</a:t>
+              <a:t>18 semanas de semestre, con 11 semanas de desarrollo intensivo en Fase 2</a:t>
             </a:r>
             <a:endParaRPr lang="en-US" sz="1080" dirty="0"/>
           </a:p>
@@ -9369,13 +10171,13 @@
       </p:sp>
       <p:sp>
         <p:nvSpPr>
-          <p:cNvPr id="28" name="Shape 26"/>
+          <p:cNvPr id="8" name="Shape 6"/>
           <p:cNvSpPr/>
           <p:nvPr/>
         </p:nvSpPr>
         <p:spPr>
           <a:xfrm>
-            <a:off x="8138160" y="3657600"/>
+            <a:off x="4343400" y="1325880"/>
             <a:ext cx="3474720" cy="2011680"/>
           </a:xfrm>
           <a:prstGeom prst="roundRect">
@@ -9403,33 +10205,33 @@
       </p:sp>
       <p:sp>
         <p:nvSpPr>
-          <p:cNvPr id="29" name="Shape 27"/>
+          <p:cNvPr id="9" name="Shape 7"/>
           <p:cNvSpPr/>
           <p:nvPr/>
         </p:nvSpPr>
         <p:spPr>
           <a:xfrm>
-            <a:off x="8321040" y="3840480"/>
+            <a:off x="4526280" y="1508760"/>
             <a:ext cx="502920" cy="502920"/>
           </a:xfrm>
           <a:prstGeom prst="ellipse">
             <a:avLst/>
           </a:prstGeom>
           <a:solidFill>
-            <a:srgbClr val="02C39A"/>
+            <a:srgbClr val="00A896"/>
           </a:solidFill>
           <a:ln/>
         </p:spPr>
       </p:sp>
       <p:sp>
         <p:nvSpPr>
-          <p:cNvPr id="30" name="Text 28"/>
-          <p:cNvSpPr txBox="1"/>
-          <p:nvPr/>
-        </p:nvSpPr>
-        <p:spPr>
-          <a:xfrm>
-            <a:off x="8321040" y="3840480"/>
+          <p:cNvPr id="10" name="Text 8"/>
+          <p:cNvSpPr txBox="1"/>
+          <p:nvPr/>
+        </p:nvSpPr>
+        <p:spPr>
+          <a:xfrm>
+            <a:off x="4526280" y="1508760"/>
             <a:ext cx="502920" cy="502920"/>
           </a:xfrm>
           <a:prstGeom prst="rect">
@@ -9454,7 +10256,7 @@
                 <a:ea typeface="Calibri" pitchFamily="34" charset="-122"/>
                 <a:cs typeface="Calibri" pitchFamily="34" charset="-120"/>
               </a:rPr>
-              <a:t>🛡️</a:t>
+              <a:t>🎓</a:t>
             </a:r>
             <a:endParaRPr lang="en-US" sz="1800" dirty="0"/>
           </a:p>
@@ -9462,13 +10264,13 @@
       </p:sp>
       <p:sp>
         <p:nvSpPr>
-          <p:cNvPr id="31" name="Text 29"/>
-          <p:cNvSpPr txBox="1"/>
-          <p:nvPr/>
-        </p:nvSpPr>
-        <p:spPr>
-          <a:xfrm>
-            <a:off x="8961120" y="3858768"/>
+          <p:cNvPr id="11" name="Text 9"/>
+          <p:cNvSpPr txBox="1"/>
+          <p:nvPr/>
+        </p:nvSpPr>
+        <p:spPr>
+          <a:xfrm>
+            <a:off x="5166360" y="1527048"/>
             <a:ext cx="2468880" cy="365760"/>
           </a:xfrm>
           <a:prstGeom prst="rect">
@@ -9493,7 +10295,7 @@
                 <a:ea typeface="Calibri" pitchFamily="34" charset="-122"/>
                 <a:cs typeface="Calibri" pitchFamily="34" charset="-120"/>
               </a:rPr>
-              <a:t>Mitigación</a:t>
+              <a:t>Horas asignadas</a:t>
             </a:r>
             <a:endParaRPr lang="en-US" sz="1350" dirty="0"/>
           </a:p>
@@ -9501,13 +10303,13 @@
       </p:sp>
       <p:sp>
         <p:nvSpPr>
-          <p:cNvPr id="32" name="Text 30"/>
-          <p:cNvSpPr txBox="1"/>
-          <p:nvPr/>
-        </p:nvSpPr>
-        <p:spPr>
-          <a:xfrm>
-            <a:off x="8321040" y="4480560"/>
+          <p:cNvPr id="12" name="Text 10"/>
+          <p:cNvSpPr txBox="1"/>
+          <p:nvPr/>
+        </p:nvSpPr>
+        <p:spPr>
+          <a:xfrm>
+            <a:off x="4526280" y="2148840"/>
             <a:ext cx="3108960" cy="1097280"/>
           </a:xfrm>
           <a:prstGeom prst="rect">
@@ -9535,6 +10337,702 @@
                 <a:ea typeface="Calibri" pitchFamily="34" charset="-122"/>
                 <a:cs typeface="Calibri" pitchFamily="34" charset="-120"/>
               </a:rPr>
+              <a:t>CAPSTONE: 20 créditos (10 trabajo docente + 10 trabajo autónomo)</a:t>
+            </a:r>
+            <a:endParaRPr lang="en-US" sz="1080" dirty="0"/>
+          </a:p>
+        </p:txBody>
+      </p:sp>
+      <p:sp>
+        <p:nvSpPr>
+          <p:cNvPr id="13" name="Shape 11"/>
+          <p:cNvSpPr/>
+          <p:nvPr/>
+        </p:nvSpPr>
+        <p:spPr>
+          <a:xfrm>
+            <a:off x="8138160" y="1325880"/>
+            <a:ext cx="3474720" cy="2011680"/>
+          </a:xfrm>
+          <a:prstGeom prst="roundRect">
+            <a:avLst>
+              <a:gd name="adj" fmla="val 4091"/>
+            </a:avLst>
+          </a:prstGeom>
+          <a:solidFill>
+            <a:srgbClr val="FFFFFF"/>
+          </a:solidFill>
+          <a:ln w="12700">
+            <a:solidFill>
+              <a:srgbClr val="DCEDEC"/>
+            </a:solidFill>
+            <a:prstDash val="solid"/>
+          </a:ln>
+          <a:effectLst>
+            <a:outerShdw sx="100000" sy="100000" kx="0" ky="0" algn="bl" rotWithShape="0" blurRad="76200" dist="25400" dir="5400000">
+              <a:srgbClr val="1F3A3C">
+                <a:alpha val="12000"/>
+              </a:srgbClr>
+            </a:outerShdw>
+          </a:effectLst>
+        </p:spPr>
+      </p:sp>
+      <p:sp>
+        <p:nvSpPr>
+          <p:cNvPr id="14" name="Shape 12"/>
+          <p:cNvSpPr/>
+          <p:nvPr/>
+        </p:nvSpPr>
+        <p:spPr>
+          <a:xfrm>
+            <a:off x="8321040" y="1508760"/>
+            <a:ext cx="502920" cy="502920"/>
+          </a:xfrm>
+          <a:prstGeom prst="ellipse">
+            <a:avLst/>
+          </a:prstGeom>
+          <a:solidFill>
+            <a:srgbClr val="02C39A"/>
+          </a:solidFill>
+          <a:ln/>
+        </p:spPr>
+      </p:sp>
+      <p:sp>
+        <p:nvSpPr>
+          <p:cNvPr id="15" name="Text 13"/>
+          <p:cNvSpPr txBox="1"/>
+          <p:nvPr/>
+        </p:nvSpPr>
+        <p:spPr>
+          <a:xfrm>
+            <a:off x="8321040" y="1508760"/>
+            <a:ext cx="502920" cy="502920"/>
+          </a:xfrm>
+          <a:prstGeom prst="rect">
+            <a:avLst/>
+          </a:prstGeom>
+          <a:noFill/>
+          <a:ln/>
+        </p:spPr>
+        <p:txBody>
+          <a:bodyPr wrap="square" lIns="0" tIns="0" rIns="0" bIns="0" rtlCol="0" anchor="ctr"/>
+          <a:lstStyle/>
+          <a:p>
+            <a:pPr algn="ctr" indent="0" marL="0">
+              <a:buNone/>
+            </a:pPr>
+            <a:r>
+              <a:rPr lang="en-US" sz="1800" dirty="0">
+                <a:solidFill>
+                  <a:srgbClr val="000000"/>
+                </a:solidFill>
+                <a:latin typeface="Calibri" pitchFamily="34" charset="0"/>
+                <a:ea typeface="Calibri" pitchFamily="34" charset="-122"/>
+                <a:cs typeface="Calibri" pitchFamily="34" charset="-120"/>
+              </a:rPr>
+              <a:t>🧰</a:t>
+            </a:r>
+            <a:endParaRPr lang="en-US" sz="1800" dirty="0"/>
+          </a:p>
+        </p:txBody>
+      </p:sp>
+      <p:sp>
+        <p:nvSpPr>
+          <p:cNvPr id="16" name="Text 14"/>
+          <p:cNvSpPr txBox="1"/>
+          <p:nvPr/>
+        </p:nvSpPr>
+        <p:spPr>
+          <a:xfrm>
+            <a:off x="8961120" y="1527048"/>
+            <a:ext cx="2468880" cy="365760"/>
+          </a:xfrm>
+          <a:prstGeom prst="rect">
+            <a:avLst/>
+          </a:prstGeom>
+          <a:noFill/>
+          <a:ln/>
+        </p:spPr>
+        <p:txBody>
+          <a:bodyPr wrap="square" lIns="0" tIns="0" rIns="0" bIns="0" rtlCol="0" anchor="ctr"/>
+          <a:lstStyle/>
+          <a:p>
+            <a:pPr indent="0" marL="0">
+              <a:buNone/>
+            </a:pPr>
+            <a:r>
+              <a:rPr lang="en-US" sz="1350" b="1" dirty="0">
+                <a:solidFill>
+                  <a:srgbClr val="0B2B2E"/>
+                </a:solidFill>
+                <a:latin typeface="Calibri" pitchFamily="34" charset="0"/>
+                <a:ea typeface="Calibri" pitchFamily="34" charset="-122"/>
+                <a:cs typeface="Calibri" pitchFamily="34" charset="-120"/>
+              </a:rPr>
+              <a:t>Materiales</a:t>
+            </a:r>
+            <a:endParaRPr lang="en-US" sz="1350" dirty="0"/>
+          </a:p>
+        </p:txBody>
+      </p:sp>
+      <p:sp>
+        <p:nvSpPr>
+          <p:cNvPr id="17" name="Text 15"/>
+          <p:cNvSpPr txBox="1"/>
+          <p:nvPr/>
+        </p:nvSpPr>
+        <p:spPr>
+          <a:xfrm>
+            <a:off x="8321040" y="2148840"/>
+            <a:ext cx="3108960" cy="1097280"/>
+          </a:xfrm>
+          <a:prstGeom prst="rect">
+            <a:avLst/>
+          </a:prstGeom>
+          <a:noFill/>
+          <a:ln/>
+        </p:spPr>
+        <p:txBody>
+          <a:bodyPr wrap="square" lIns="0" tIns="0" rIns="0" bIns="0" rtlCol="0" anchor="ctr"/>
+          <a:lstStyle/>
+          <a:p>
+            <a:pPr indent="0" marL="0">
+              <a:lnSpc>
+                <a:spcPct val="115000"/>
+              </a:lnSpc>
+              <a:buNone/>
+            </a:pPr>
+            <a:r>
+              <a:rPr lang="en-US" sz="1080" dirty="0">
+                <a:solidFill>
+                  <a:srgbClr val="5C7A7C"/>
+                </a:solidFill>
+                <a:latin typeface="Calibri" pitchFamily="34" charset="0"/>
+                <a:ea typeface="Calibri" pitchFamily="34" charset="-122"/>
+                <a:cs typeface="Calibri" pitchFamily="34" charset="-120"/>
+              </a:rPr>
+              <a:t>Equipos propios y librerías open source (Flutter, FastAPI, PostgreSQL, Docker) — sin costo de licencias</a:t>
+            </a:r>
+            <a:endParaRPr lang="en-US" sz="1080" dirty="0"/>
+          </a:p>
+        </p:txBody>
+      </p:sp>
+      <p:sp>
+        <p:nvSpPr>
+          <p:cNvPr id="18" name="Shape 16"/>
+          <p:cNvSpPr/>
+          <p:nvPr/>
+        </p:nvSpPr>
+        <p:spPr>
+          <a:xfrm>
+            <a:off x="548640" y="3657600"/>
+            <a:ext cx="3474720" cy="2011680"/>
+          </a:xfrm>
+          <a:prstGeom prst="roundRect">
+            <a:avLst>
+              <a:gd name="adj" fmla="val 4091"/>
+            </a:avLst>
+          </a:prstGeom>
+          <a:solidFill>
+            <a:srgbClr val="FFFFFF"/>
+          </a:solidFill>
+          <a:ln w="12700">
+            <a:solidFill>
+              <a:srgbClr val="DCEDEC"/>
+            </a:solidFill>
+            <a:prstDash val="solid"/>
+          </a:ln>
+          <a:effectLst>
+            <a:outerShdw sx="100000" sy="100000" kx="0" ky="0" algn="bl" rotWithShape="0" blurRad="76200" dist="25400" dir="5400000">
+              <a:srgbClr val="1F3A3C">
+                <a:alpha val="12000"/>
+              </a:srgbClr>
+            </a:outerShdw>
+          </a:effectLst>
+        </p:spPr>
+      </p:sp>
+      <p:sp>
+        <p:nvSpPr>
+          <p:cNvPr id="19" name="Shape 17"/>
+          <p:cNvSpPr/>
+          <p:nvPr/>
+        </p:nvSpPr>
+        <p:spPr>
+          <a:xfrm>
+            <a:off x="731520" y="3840480"/>
+            <a:ext cx="502920" cy="502920"/>
+          </a:xfrm>
+          <a:prstGeom prst="ellipse">
+            <a:avLst/>
+          </a:prstGeom>
+          <a:solidFill>
+            <a:srgbClr val="028090"/>
+          </a:solidFill>
+          <a:ln/>
+        </p:spPr>
+      </p:sp>
+      <p:sp>
+        <p:nvSpPr>
+          <p:cNvPr id="20" name="Text 18"/>
+          <p:cNvSpPr txBox="1"/>
+          <p:nvPr/>
+        </p:nvSpPr>
+        <p:spPr>
+          <a:xfrm>
+            <a:off x="731520" y="3840480"/>
+            <a:ext cx="502920" cy="502920"/>
+          </a:xfrm>
+          <a:prstGeom prst="rect">
+            <a:avLst/>
+          </a:prstGeom>
+          <a:noFill/>
+          <a:ln/>
+        </p:spPr>
+        <p:txBody>
+          <a:bodyPr wrap="square" lIns="0" tIns="0" rIns="0" bIns="0" rtlCol="0" anchor="ctr"/>
+          <a:lstStyle/>
+          <a:p>
+            <a:pPr algn="ctr" indent="0" marL="0">
+              <a:buNone/>
+            </a:pPr>
+            <a:r>
+              <a:rPr lang="en-US" sz="1800" dirty="0">
+                <a:solidFill>
+                  <a:srgbClr val="000000"/>
+                </a:solidFill>
+                <a:latin typeface="Calibri" pitchFamily="34" charset="0"/>
+                <a:ea typeface="Calibri" pitchFamily="34" charset="-122"/>
+                <a:cs typeface="Calibri" pitchFamily="34" charset="-120"/>
+              </a:rPr>
+              <a:t>✅</a:t>
+            </a:r>
+            <a:endParaRPr lang="en-US" sz="1800" dirty="0"/>
+          </a:p>
+        </p:txBody>
+      </p:sp>
+      <p:sp>
+        <p:nvSpPr>
+          <p:cNvPr id="21" name="Text 19"/>
+          <p:cNvSpPr txBox="1"/>
+          <p:nvPr/>
+        </p:nvSpPr>
+        <p:spPr>
+          <a:xfrm>
+            <a:off x="1371600" y="3858768"/>
+            <a:ext cx="2468880" cy="365760"/>
+          </a:xfrm>
+          <a:prstGeom prst="rect">
+            <a:avLst/>
+          </a:prstGeom>
+          <a:noFill/>
+          <a:ln/>
+        </p:spPr>
+        <p:txBody>
+          <a:bodyPr wrap="square" lIns="0" tIns="0" rIns="0" bIns="0" rtlCol="0" anchor="ctr"/>
+          <a:lstStyle/>
+          <a:p>
+            <a:pPr indent="0" marL="0">
+              <a:buNone/>
+            </a:pPr>
+            <a:r>
+              <a:rPr lang="en-US" sz="1350" b="1" dirty="0">
+                <a:solidFill>
+                  <a:srgbClr val="0B2B2E"/>
+                </a:solidFill>
+                <a:latin typeface="Calibri" pitchFamily="34" charset="0"/>
+                <a:ea typeface="Calibri" pitchFamily="34" charset="-122"/>
+                <a:cs typeface="Calibri" pitchFamily="34" charset="-120"/>
+              </a:rPr>
+              <a:t>A favor</a:t>
+            </a:r>
+            <a:endParaRPr lang="en-US" sz="1350" dirty="0"/>
+          </a:p>
+        </p:txBody>
+      </p:sp>
+      <p:sp>
+        <p:nvSpPr>
+          <p:cNvPr id="22" name="Text 20"/>
+          <p:cNvSpPr txBox="1"/>
+          <p:nvPr/>
+        </p:nvSpPr>
+        <p:spPr>
+          <a:xfrm>
+            <a:off x="731520" y="4480560"/>
+            <a:ext cx="3108960" cy="1097280"/>
+          </a:xfrm>
+          <a:prstGeom prst="rect">
+            <a:avLst/>
+          </a:prstGeom>
+          <a:noFill/>
+          <a:ln/>
+        </p:spPr>
+        <p:txBody>
+          <a:bodyPr wrap="square" lIns="0" tIns="0" rIns="0" bIns="0" rtlCol="0" anchor="ctr"/>
+          <a:lstStyle/>
+          <a:p>
+            <a:pPr indent="0" marL="0">
+              <a:lnSpc>
+                <a:spcPct val="115000"/>
+              </a:lnSpc>
+              <a:buNone/>
+            </a:pPr>
+            <a:r>
+              <a:rPr lang="en-US" sz="1080" dirty="0">
+                <a:solidFill>
+                  <a:srgbClr val="5C7A7C"/>
+                </a:solidFill>
+                <a:latin typeface="Calibri" pitchFamily="34" charset="0"/>
+                <a:ea typeface="Calibri" pitchFamily="34" charset="-122"/>
+                <a:cs typeface="Calibri" pitchFamily="34" charset="-120"/>
+              </a:rPr>
+              <a:t>El equipo ya maneja las tecnologías definidas y cuenta con roles claros por módulo</a:t>
+            </a:r>
+            <a:endParaRPr lang="en-US" sz="1080" dirty="0"/>
+          </a:p>
+        </p:txBody>
+      </p:sp>
+      <p:sp>
+        <p:nvSpPr>
+          <p:cNvPr id="23" name="Shape 21"/>
+          <p:cNvSpPr/>
+          <p:nvPr/>
+        </p:nvSpPr>
+        <p:spPr>
+          <a:xfrm>
+            <a:off x="4343400" y="3657600"/>
+            <a:ext cx="3474720" cy="2011680"/>
+          </a:xfrm>
+          <a:prstGeom prst="roundRect">
+            <a:avLst>
+              <a:gd name="adj" fmla="val 4091"/>
+            </a:avLst>
+          </a:prstGeom>
+          <a:solidFill>
+            <a:srgbClr val="FFFFFF"/>
+          </a:solidFill>
+          <a:ln w="12700">
+            <a:solidFill>
+              <a:srgbClr val="DCEDEC"/>
+            </a:solidFill>
+            <a:prstDash val="solid"/>
+          </a:ln>
+          <a:effectLst>
+            <a:outerShdw sx="100000" sy="100000" kx="0" ky="0" algn="bl" rotWithShape="0" blurRad="76200" dist="25400" dir="5400000">
+              <a:srgbClr val="1F3A3C">
+                <a:alpha val="12000"/>
+              </a:srgbClr>
+            </a:outerShdw>
+          </a:effectLst>
+        </p:spPr>
+      </p:sp>
+      <p:sp>
+        <p:nvSpPr>
+          <p:cNvPr id="24" name="Shape 22"/>
+          <p:cNvSpPr/>
+          <p:nvPr/>
+        </p:nvSpPr>
+        <p:spPr>
+          <a:xfrm>
+            <a:off x="4526280" y="3840480"/>
+            <a:ext cx="502920" cy="502920"/>
+          </a:xfrm>
+          <a:prstGeom prst="ellipse">
+            <a:avLst/>
+          </a:prstGeom>
+          <a:solidFill>
+            <a:srgbClr val="00A896"/>
+          </a:solidFill>
+          <a:ln/>
+        </p:spPr>
+      </p:sp>
+      <p:sp>
+        <p:nvSpPr>
+          <p:cNvPr id="25" name="Text 23"/>
+          <p:cNvSpPr txBox="1"/>
+          <p:nvPr/>
+        </p:nvSpPr>
+        <p:spPr>
+          <a:xfrm>
+            <a:off x="4526280" y="3840480"/>
+            <a:ext cx="502920" cy="502920"/>
+          </a:xfrm>
+          <a:prstGeom prst="rect">
+            <a:avLst/>
+          </a:prstGeom>
+          <a:noFill/>
+          <a:ln/>
+        </p:spPr>
+        <p:txBody>
+          <a:bodyPr wrap="square" lIns="0" tIns="0" rIns="0" bIns="0" rtlCol="0" anchor="ctr"/>
+          <a:lstStyle/>
+          <a:p>
+            <a:pPr algn="ctr" indent="0" marL="0">
+              <a:buNone/>
+            </a:pPr>
+            <a:r>
+              <a:rPr lang="en-US" sz="1800" dirty="0">
+                <a:solidFill>
+                  <a:srgbClr val="000000"/>
+                </a:solidFill>
+                <a:latin typeface="Calibri" pitchFamily="34" charset="0"/>
+                <a:ea typeface="Calibri" pitchFamily="34" charset="-122"/>
+                <a:cs typeface="Calibri" pitchFamily="34" charset="-120"/>
+              </a:rPr>
+              <a:t>⚠️</a:t>
+            </a:r>
+            <a:endParaRPr lang="en-US" sz="1800" dirty="0"/>
+          </a:p>
+        </p:txBody>
+      </p:sp>
+      <p:sp>
+        <p:nvSpPr>
+          <p:cNvPr id="26" name="Text 24"/>
+          <p:cNvSpPr txBox="1"/>
+          <p:nvPr/>
+        </p:nvSpPr>
+        <p:spPr>
+          <a:xfrm>
+            <a:off x="5166360" y="3858768"/>
+            <a:ext cx="2468880" cy="365760"/>
+          </a:xfrm>
+          <a:prstGeom prst="rect">
+            <a:avLst/>
+          </a:prstGeom>
+          <a:noFill/>
+          <a:ln/>
+        </p:spPr>
+        <p:txBody>
+          <a:bodyPr wrap="square" lIns="0" tIns="0" rIns="0" bIns="0" rtlCol="0" anchor="ctr"/>
+          <a:lstStyle/>
+          <a:p>
+            <a:pPr indent="0" marL="0">
+              <a:buNone/>
+            </a:pPr>
+            <a:r>
+              <a:rPr lang="en-US" sz="1350" b="1" dirty="0">
+                <a:solidFill>
+                  <a:srgbClr val="0B2B2E"/>
+                </a:solidFill>
+                <a:latin typeface="Calibri" pitchFamily="34" charset="0"/>
+                <a:ea typeface="Calibri" pitchFamily="34" charset="-122"/>
+                <a:cs typeface="Calibri" pitchFamily="34" charset="-120"/>
+              </a:rPr>
+              <a:t>Riesgos</a:t>
+            </a:r>
+            <a:endParaRPr lang="en-US" sz="1350" dirty="0"/>
+          </a:p>
+        </p:txBody>
+      </p:sp>
+      <p:sp>
+        <p:nvSpPr>
+          <p:cNvPr id="27" name="Text 25"/>
+          <p:cNvSpPr txBox="1"/>
+          <p:nvPr/>
+        </p:nvSpPr>
+        <p:spPr>
+          <a:xfrm>
+            <a:off x="4526280" y="4480560"/>
+            <a:ext cx="3108960" cy="1097280"/>
+          </a:xfrm>
+          <a:prstGeom prst="rect">
+            <a:avLst/>
+          </a:prstGeom>
+          <a:noFill/>
+          <a:ln/>
+        </p:spPr>
+        <p:txBody>
+          <a:bodyPr wrap="square" lIns="0" tIns="0" rIns="0" bIns="0" rtlCol="0" anchor="ctr"/>
+          <a:lstStyle/>
+          <a:p>
+            <a:pPr indent="0" marL="0">
+              <a:lnSpc>
+                <a:spcPct val="115000"/>
+              </a:lnSpc>
+              <a:buNone/>
+            </a:pPr>
+            <a:r>
+              <a:rPr lang="en-US" sz="1080" dirty="0">
+                <a:solidFill>
+                  <a:srgbClr val="5C7A7C"/>
+                </a:solidFill>
+                <a:latin typeface="Calibri" pitchFamily="34" charset="0"/>
+                <a:ea typeface="Calibri" pitchFamily="34" charset="-122"/>
+                <a:cs typeface="Calibri" pitchFamily="34" charset="-120"/>
+              </a:rPr>
+              <a:t>Coordinación de horarios y curva de aprendizaje del módulo de IA</a:t>
+            </a:r>
+            <a:endParaRPr lang="en-US" sz="1080" dirty="0"/>
+          </a:p>
+        </p:txBody>
+      </p:sp>
+      <p:sp>
+        <p:nvSpPr>
+          <p:cNvPr id="28" name="Shape 26"/>
+          <p:cNvSpPr/>
+          <p:nvPr/>
+        </p:nvSpPr>
+        <p:spPr>
+          <a:xfrm>
+            <a:off x="8138160" y="3657600"/>
+            <a:ext cx="3474720" cy="2011680"/>
+          </a:xfrm>
+          <a:prstGeom prst="roundRect">
+            <a:avLst>
+              <a:gd name="adj" fmla="val 4091"/>
+            </a:avLst>
+          </a:prstGeom>
+          <a:solidFill>
+            <a:srgbClr val="FFFFFF"/>
+          </a:solidFill>
+          <a:ln w="12700">
+            <a:solidFill>
+              <a:srgbClr val="DCEDEC"/>
+            </a:solidFill>
+            <a:prstDash val="solid"/>
+          </a:ln>
+          <a:effectLst>
+            <a:outerShdw sx="100000" sy="100000" kx="0" ky="0" algn="bl" rotWithShape="0" blurRad="76200" dist="25400" dir="5400000">
+              <a:srgbClr val="1F3A3C">
+                <a:alpha val="12000"/>
+              </a:srgbClr>
+            </a:outerShdw>
+          </a:effectLst>
+        </p:spPr>
+      </p:sp>
+      <p:sp>
+        <p:nvSpPr>
+          <p:cNvPr id="29" name="Shape 27"/>
+          <p:cNvSpPr/>
+          <p:nvPr/>
+        </p:nvSpPr>
+        <p:spPr>
+          <a:xfrm>
+            <a:off x="8321040" y="3840480"/>
+            <a:ext cx="502920" cy="502920"/>
+          </a:xfrm>
+          <a:prstGeom prst="ellipse">
+            <a:avLst/>
+          </a:prstGeom>
+          <a:solidFill>
+            <a:srgbClr val="02C39A"/>
+          </a:solidFill>
+          <a:ln/>
+        </p:spPr>
+      </p:sp>
+      <p:sp>
+        <p:nvSpPr>
+          <p:cNvPr id="30" name="Text 28"/>
+          <p:cNvSpPr txBox="1"/>
+          <p:nvPr/>
+        </p:nvSpPr>
+        <p:spPr>
+          <a:xfrm>
+            <a:off x="8321040" y="3840480"/>
+            <a:ext cx="502920" cy="502920"/>
+          </a:xfrm>
+          <a:prstGeom prst="rect">
+            <a:avLst/>
+          </a:prstGeom>
+          <a:noFill/>
+          <a:ln/>
+        </p:spPr>
+        <p:txBody>
+          <a:bodyPr wrap="square" lIns="0" tIns="0" rIns="0" bIns="0" rtlCol="0" anchor="ctr"/>
+          <a:lstStyle/>
+          <a:p>
+            <a:pPr algn="ctr" indent="0" marL="0">
+              <a:buNone/>
+            </a:pPr>
+            <a:r>
+              <a:rPr lang="en-US" sz="1800" dirty="0">
+                <a:solidFill>
+                  <a:srgbClr val="000000"/>
+                </a:solidFill>
+                <a:latin typeface="Calibri" pitchFamily="34" charset="0"/>
+                <a:ea typeface="Calibri" pitchFamily="34" charset="-122"/>
+                <a:cs typeface="Calibri" pitchFamily="34" charset="-120"/>
+              </a:rPr>
+              <a:t>🛡️</a:t>
+            </a:r>
+            <a:endParaRPr lang="en-US" sz="1800" dirty="0"/>
+          </a:p>
+        </p:txBody>
+      </p:sp>
+      <p:sp>
+        <p:nvSpPr>
+          <p:cNvPr id="31" name="Text 29"/>
+          <p:cNvSpPr txBox="1"/>
+          <p:nvPr/>
+        </p:nvSpPr>
+        <p:spPr>
+          <a:xfrm>
+            <a:off x="8961120" y="3858768"/>
+            <a:ext cx="2468880" cy="365760"/>
+          </a:xfrm>
+          <a:prstGeom prst="rect">
+            <a:avLst/>
+          </a:prstGeom>
+          <a:noFill/>
+          <a:ln/>
+        </p:spPr>
+        <p:txBody>
+          <a:bodyPr wrap="square" lIns="0" tIns="0" rIns="0" bIns="0" rtlCol="0" anchor="ctr"/>
+          <a:lstStyle/>
+          <a:p>
+            <a:pPr indent="0" marL="0">
+              <a:buNone/>
+            </a:pPr>
+            <a:r>
+              <a:rPr lang="en-US" sz="1350" b="1" dirty="0">
+                <a:solidFill>
+                  <a:srgbClr val="0B2B2E"/>
+                </a:solidFill>
+                <a:latin typeface="Calibri" pitchFamily="34" charset="0"/>
+                <a:ea typeface="Calibri" pitchFamily="34" charset="-122"/>
+                <a:cs typeface="Calibri" pitchFamily="34" charset="-120"/>
+              </a:rPr>
+              <a:t>Mitigación</a:t>
+            </a:r>
+            <a:endParaRPr lang="en-US" sz="1350" dirty="0"/>
+          </a:p>
+        </p:txBody>
+      </p:sp>
+      <p:sp>
+        <p:nvSpPr>
+          <p:cNvPr id="32" name="Text 30"/>
+          <p:cNvSpPr txBox="1"/>
+          <p:nvPr/>
+        </p:nvSpPr>
+        <p:spPr>
+          <a:xfrm>
+            <a:off x="8321040" y="4480560"/>
+            <a:ext cx="3108960" cy="1097280"/>
+          </a:xfrm>
+          <a:prstGeom prst="rect">
+            <a:avLst/>
+          </a:prstGeom>
+          <a:noFill/>
+          <a:ln/>
+        </p:spPr>
+        <p:txBody>
+          <a:bodyPr wrap="square" lIns="0" tIns="0" rIns="0" bIns="0" rtlCol="0" anchor="ctr"/>
+          <a:lstStyle/>
+          <a:p>
+            <a:pPr indent="0" marL="0">
+              <a:lnSpc>
+                <a:spcPct val="115000"/>
+              </a:lnSpc>
+              <a:buNone/>
+            </a:pPr>
+            <a:r>
+              <a:rPr lang="en-US" sz="1080" dirty="0">
+                <a:solidFill>
+                  <a:srgbClr val="5C7A7C"/>
+                </a:solidFill>
+                <a:latin typeface="Calibri" pitchFamily="34" charset="0"/>
+                <a:ea typeface="Calibri" pitchFamily="34" charset="-122"/>
+                <a:cs typeface="Calibri" pitchFamily="34" charset="-120"/>
+              </a:rPr>
               <a:t>Reuniones semanales fijas; IA como funcionalidad de menor prioridad en el backlog</a:t>
             </a:r>
             <a:endParaRPr lang="en-US" sz="1080" dirty="0"/>
@@ -9613,7 +11111,7 @@
                 <a:ea typeface="Calibri" pitchFamily="34" charset="-122"/>
                 <a:cs typeface="Calibri" pitchFamily="34" charset="-120"/>
               </a:rPr>
-              <a:t>15</a:t>
+              <a:t>17</a:t>
             </a:r>
             <a:endParaRPr lang="en-US" sz="900" dirty="0"/>
           </a:p>
@@ -9627,9 +11125,9 @@
 </p:sld>
 </file>
 
-<file path=ppt/slides/slide16.xml><?xml version="1.0" encoding="utf-8"?>
+<file path=ppt/slides/slide18.xml><?xml version="1.0" encoding="utf-8"?>
 <p:sld xmlns:a="http://schemas.openxmlformats.org/drawingml/2006/main" xmlns:r="http://schemas.openxmlformats.org/officeDocument/2006/relationships" xmlns:p="http://schemas.openxmlformats.org/presentationml/2006/main">
-  <p:cSld name="Slide 16">
+  <p:cSld name="Slide 18">
     <p:bg>
       <p:bgPr>
         <a:solidFill>
@@ -11286,7 +12784,7 @@
                 <a:ea typeface="Calibri" pitchFamily="34" charset="-122"/>
                 <a:cs typeface="Calibri" pitchFamily="34" charset="-120"/>
               </a:rPr>
-              <a:t>A quién impacta: adultos mayores · pacientes crónicos · niños · sus cuidadores y familiares.</a:t>
+              <a:t>A quién impacta: adultos mayores · niños · perfiles dependientes con enfermedades crónicas · sus cuidadores y familiares.</a:t>
             </a:r>
             <a:endParaRPr lang="en-US" sz="1200" dirty="0"/>
           </a:p>

--- a/Fase 1/Evidencias Grupales/PerfilMedico_ExposicionFase1.pptx
+++ b/Fase 1/Evidencias Grupales/PerfilMedico_ExposicionFase1.pptx
@@ -2922,7 +2922,7 @@
                 <a:ea typeface="Calibri" pitchFamily="34" charset="-122"/>
                 <a:cs typeface="Calibri" pitchFamily="34" charset="-120"/>
               </a:rPr>
-              <a:t>GPS con geocercas: alerta si el niño no llega al colegio o el adulto mayor sale de una zona segura</a:t>
+              <a:t>GPS con geocercas vía servidor propio (Traccar, open source): sin depender de la app cerrada del fabricante</a:t>
             </a:r>
             <a:endParaRPr lang="en-US" sz="1300" dirty="0"/>
           </a:p>
@@ -9659,7 +9659,7 @@
                 <a:ea typeface="Calibri" pitchFamily="34" charset="-122"/>
                 <a:cs typeface="Calibri" pitchFamily="34" charset="-120"/>
               </a:rPr>
-              <a:t>$2.990-$3.990 / mes</a:t>
+              <a:t>$3.490 / mes (1er perfil)</a:t>
             </a:r>
             <a:endParaRPr lang="en-US" sz="1300" dirty="0"/>
           </a:p>
@@ -9705,7 +9705,7 @@
                 <a:ea typeface="Calibri" pitchFamily="34" charset="-122"/>
                 <a:cs typeface="Calibri" pitchFamily="34" charset="-120"/>
               </a:rPr>
-              <a:t>Perfiles dependientes ilimitados</a:t>
+              <a:t>Pulsera inteligente conectada (GPS, salud, seguridad)</a:t>
             </a:r>
             <a:endParaRPr lang="en-US" sz="1250" dirty="0"/>
           </a:p>
@@ -9729,7 +9729,7 @@
                 <a:ea typeface="Calibri" pitchFamily="34" charset="-122"/>
                 <a:cs typeface="Calibri" pitchFamily="34" charset="-120"/>
               </a:rPr>
-              <a:t>Pulsera inteligente conectada (GPS, salud, seguridad)</a:t>
+              <a:t>Alertas escalonadas al cuidador</a:t>
             </a:r>
             <a:endParaRPr lang="en-US" sz="1250" dirty="0"/>
           </a:p>
@@ -9753,7 +9753,7 @@
                 <a:ea typeface="Calibri" pitchFamily="34" charset="-122"/>
                 <a:cs typeface="Calibri" pitchFamily="34" charset="-120"/>
               </a:rPr>
-              <a:t>Alertas escalonadas al cuidador</a:t>
+              <a:t>Historial completo + reportes para el médico</a:t>
             </a:r>
             <a:endParaRPr lang="en-US" sz="1250" dirty="0"/>
           </a:p>
@@ -9777,7 +9777,7 @@
                 <a:ea typeface="Calibri" pitchFamily="34" charset="-122"/>
                 <a:cs typeface="Calibri" pitchFamily="34" charset="-120"/>
               </a:rPr>
-              <a:t>Historial completo + reportes para el médico</a:t>
+              <a:t>Módulo de IA (orientación + farmacias)</a:t>
             </a:r>
             <a:endParaRPr lang="en-US" sz="1250" dirty="0"/>
           </a:p>
@@ -9801,7 +9801,7 @@
                 <a:ea typeface="Calibri" pitchFamily="34" charset="-122"/>
                 <a:cs typeface="Calibri" pitchFamily="34" charset="-120"/>
               </a:rPr>
-              <a:t>Módulo de IA (orientación + farmacias)</a:t>
+              <a:t>Cada perfil adicional: 5% de descuento</a:t>
             </a:r>
             <a:endParaRPr lang="en-US" sz="1250" dirty="0"/>
           </a:p>
@@ -9816,7 +9816,7 @@
         <p:spPr>
           <a:xfrm>
             <a:off x="548640" y="6263640"/>
-            <a:ext cx="11064240" cy="320040"/>
+            <a:ext cx="11064240" cy="411480"/>
           </a:xfrm>
           <a:prstGeom prst="rect">
             <a:avLst/>
@@ -9840,7 +9840,7 @@
                 <a:ea typeface="Calibri" pitchFamily="34" charset="-122"/>
                 <a:cs typeface="Calibri" pitchFamily="34" charset="-120"/>
               </a:rPr>
-              <a:t>Plan anual: $24.990-$29.990 CLP (equivalente a ~2 meses gratis frente al pago mensual).</a:t>
+              <a:t>Plan anual: $29.990 CLP (primer perfil). Segundo perfil dependiente en la misma cuenta: ~$3.315/mes (5% de descuento), y así por cada persona extra a cuidar.</a:t>
             </a:r>
             <a:endParaRPr lang="en-US" sz="1050" dirty="0"/>
           </a:p>
